--- a/reports/mid_sem_presentation.pptx
+++ b/reports/mid_sem_presentation.pptx
@@ -17,7 +17,6 @@
     <p:sldId id="265" r:id="rId16"/>
     <p:sldId id="266" r:id="rId17"/>
     <p:sldId id="267" r:id="rId18"/>
-    <p:sldId id="268" r:id="rId19"/>
   </p:sldIdLst>
   <p:sldSz cx="12191695" cy="6858000" type="screen4x3"/>
   <p:notesSz cx="6858000" cy="9144000"/>
@@ -3153,7 +3152,7 @@
         </p:nvSpPr>
         <p:spPr>
           <a:xfrm>
-            <a:off x="1097280" y="1188720"/>
+            <a:off x="1097280" y="1097280"/>
             <a:ext cx="1371600" cy="73152"/>
           </a:xfrm>
           <a:prstGeom prst="rect">
@@ -3198,7 +3197,7 @@
         </p:nvSpPr>
         <p:spPr>
           <a:xfrm>
-            <a:off x="1097280" y="1463040"/>
+            <a:off x="1097280" y="1325880"/>
             <a:ext cx="9966960" cy="2011680"/>
           </a:xfrm>
           <a:prstGeom prst="rect">
@@ -3213,7 +3212,7 @@
           <a:lstStyle/>
           <a:p>
             <a:pPr>
-              <a:defRPr sz="3200" b="1">
+              <a:defRPr sz="3000" b="1">
                 <a:solidFill>
                   <a:srgbClr val="FFFFFF"/>
                 </a:solidFill>
@@ -3226,9 +3225,9 @@
           <a:p>
             <a:pPr>
               <a:spcBef>
-                <a:spcPts val="1200"/>
+                <a:spcPts val="1000"/>
               </a:spcBef>
-              <a:defRPr sz="1800">
+              <a:defRPr sz="1700">
                 <a:solidFill>
                   <a:srgbClr val="0D9488"/>
                 </a:solidFill>
@@ -3248,8 +3247,8 @@
         </p:nvSpPr>
         <p:spPr>
           <a:xfrm>
-            <a:off x="1097280" y="3931920"/>
-            <a:ext cx="9966960" cy="2194560"/>
+            <a:off x="1097280" y="3657600"/>
+            <a:ext cx="9966960" cy="2468880"/>
           </a:xfrm>
           <a:prstGeom prst="roundRect">
             <a:avLst/>
@@ -3293,8 +3292,8 @@
         </p:nvSpPr>
         <p:spPr>
           <a:xfrm>
-            <a:off x="1371600" y="4114800"/>
-            <a:ext cx="9418320" cy="1828800"/>
+            <a:off x="1371600" y="3794760"/>
+            <a:ext cx="9418320" cy="2194560"/>
           </a:xfrm>
           <a:prstGeom prst="rect">
             <a:avLst/>
@@ -3308,14 +3307,74 @@
           <a:lstStyle/>
           <a:p>
             <a:pPr>
-              <a:defRPr sz="1300" b="1">
+              <a:defRPr sz="1400" b="1">
+                <a:solidFill>
+                  <a:srgbClr val="0D9488"/>
+                </a:solidFill>
+              </a:defRPr>
+            </a:pPr>
+            <a:r>
+              <a:t>PROJECT METADATA &amp; TEAM ROSTER</a:t>
+            </a:r>
+          </a:p>
+          <a:p>
+            <a:pPr>
+              <a:spcBef>
+                <a:spcPts val="400"/>
+              </a:spcBef>
+              <a:defRPr sz="1200">
                 <a:solidFill>
                   <a:srgbClr val="FFFFFF"/>
                 </a:solidFill>
               </a:defRPr>
             </a:pPr>
             <a:r>
-              <a:t>Project Code: ERI 5 / TY_CSE_10  |  Academic Year: 2026–2027</a:t>
+              <a:t>• Project ID / Code: ERI 5 / TY_CSE_10  |  Academic Year: 2026–2027</a:t>
+            </a:r>
+          </a:p>
+          <a:p>
+            <a:pPr>
+              <a:spcBef>
+                <a:spcPts val="300"/>
+              </a:spcBef>
+              <a:defRPr sz="1200">
+                <a:solidFill>
+                  <a:srgbClr val="E2E8F0"/>
+                </a:solidFill>
+              </a:defRPr>
+            </a:pPr>
+            <a:r>
+              <a:t>• Team Lead: Harshwardhan Suryawanshi (Quantum Architecture &amp; Bridge Integration)</a:t>
+            </a:r>
+          </a:p>
+          <a:p>
+            <a:pPr>
+              <a:spcBef>
+                <a:spcPts val="300"/>
+              </a:spcBef>
+              <a:defRPr sz="1200">
+                <a:solidFill>
+                  <a:srgbClr val="E2E8F0"/>
+                </a:solidFill>
+              </a:defRPr>
+            </a:pPr>
+            <a:r>
+              <a:t>• Project Group Members: [Team Member 2 - Baselines &amp; Loss] | [Team Member 3 - Preprocessing] | [Team Member 4 - Compression &amp; Phase 4]</a:t>
+            </a:r>
+          </a:p>
+          <a:p>
+            <a:pPr>
+              <a:spcBef>
+                <a:spcPts val="300"/>
+              </a:spcBef>
+              <a:defRPr sz="1200">
+                <a:solidFill>
+                  <a:srgbClr val="E2E8F0"/>
+                </a:solidFill>
+              </a:defRPr>
+            </a:pPr>
+            <a:r>
+              <a:t>• Project Guide / Mentor: Respective EDI Guide (Mr. Gopal B. Deshmukh)</a:t>
             </a:r>
           </a:p>
           <a:p>
@@ -3323,44 +3382,14 @@
               <a:spcBef>
                 <a:spcPts val="600"/>
               </a:spcBef>
-              <a:defRPr sz="1300">
-                <a:solidFill>
-                  <a:srgbClr val="E2E8F0"/>
-                </a:solidFill>
-              </a:defRPr>
-            </a:pPr>
-            <a:r>
-              <a:t>Team Members: Harshwardhan Suryawanshi (Lead) &amp; Project Group Members</a:t>
-            </a:r>
-          </a:p>
-          <a:p>
-            <a:pPr>
-              <a:spcBef>
-                <a:spcPts val="400"/>
-              </a:spcBef>
-              <a:defRPr sz="1300">
-                <a:solidFill>
-                  <a:srgbClr val="E2E8F0"/>
-                </a:solidFill>
-              </a:defRPr>
-            </a:pPr>
-            <a:r>
-              <a:t>Guide / Mentor: Respective EDI Guide (Mr. Gopal B. Deshmukh)</a:t>
-            </a:r>
-          </a:p>
-          <a:p>
-            <a:pPr>
-              <a:spcBef>
-                <a:spcPts val="800"/>
-              </a:spcBef>
-              <a:defRPr sz="1200" b="1">
+              <a:defRPr sz="1100" b="1">
                 <a:solidFill>
                   <a:srgbClr val="0D9488"/>
                 </a:solidFill>
               </a:defRPr>
             </a:pPr>
             <a:r>
-              <a:t>Verified Checkpoint: 4-Qubit Autoencoder Hybrid (QWK: 0.7693, AUC-ROC: 0.8716) | Commit: 91bd77d</a:t>
+              <a:t>• Verified Checkpoint: 4-Qubit Autoencoder Hybrid (QWK: 0.7693, AUC-ROC: 0.8716) | Commit: 91bd77d</a:t>
             </a:r>
           </a:p>
         </p:txBody>
@@ -3445,82 +3474,82 @@
           <a:noFill/>
         </p:spPr>
         <p:txBody>
-          <a:bodyPr wrap="square">
-            <a:spAutoFit/>
-          </a:bodyPr>
-          <a:lstStyle/>
-          <a:p>
-            <a:pPr>
-              <a:defRPr sz="1100" b="1">
-                <a:solidFill>
-                  <a:srgbClr val="0D9488"/>
-                </a:solidFill>
-              </a:defRPr>
-            </a:pPr>
-            <a:r>
-              <a:t>EDI PARAMETER 3: COST, RESOURCES, ENVIRONMENTAL RELEVANCE, AND SUSTAINABILITY</a:t>
-            </a:r>
-          </a:p>
-        </p:txBody>
-      </p:sp>
-      <p:sp>
-        <p:nvSpPr>
-          <p:cNvPr id="4" name="TextBox 3"/>
-          <p:cNvSpPr txBox="1"/>
-          <p:nvPr/>
-        </p:nvSpPr>
-        <p:spPr>
-          <a:xfrm>
-            <a:off x="731520" y="365760"/>
-            <a:ext cx="10698480" cy="502920"/>
-          </a:xfrm>
-          <a:prstGeom prst="rect">
-            <a:avLst/>
-          </a:prstGeom>
-          <a:noFill/>
-        </p:spPr>
-        <p:txBody>
-          <a:bodyPr wrap="square">
-            <a:spAutoFit/>
-          </a:bodyPr>
-          <a:lstStyle/>
-          <a:p>
-            <a:pPr>
-              <a:defRPr sz="2200" b="1">
-                <a:solidFill>
-                  <a:srgbClr val="FFFFFF"/>
-                </a:solidFill>
-              </a:defRPr>
-            </a:pPr>
-            <a:r>
-              <a:t>Cost, Resources, Environmental Relevance, &amp; Sustainability</a:t>
-            </a:r>
-          </a:p>
-        </p:txBody>
-      </p:sp>
-      <p:sp>
-        <p:nvSpPr>
-          <p:cNvPr id="5" name="TextBox 4"/>
-          <p:cNvSpPr txBox="1"/>
-          <p:nvPr/>
-        </p:nvSpPr>
-        <p:spPr>
-          <a:xfrm>
-            <a:off x="731520" y="6492240"/>
-            <a:ext cx="10698480" cy="274320"/>
-          </a:xfrm>
-          <a:prstGeom prst="rect">
-            <a:avLst/>
-          </a:prstGeom>
-          <a:noFill/>
-        </p:spPr>
-        <p:txBody>
           <a:bodyPr wrap="none">
             <a:spAutoFit/>
           </a:bodyPr>
           <a:lstStyle/>
           <a:p>
             <a:pPr>
+              <a:defRPr sz="1100" b="1">
+                <a:solidFill>
+                  <a:srgbClr val="0D9488"/>
+                </a:solidFill>
+              </a:defRPr>
+            </a:pPr>
+            <a:r>
+              <a:t>PROJECT STATUS &amp; PROGRESS</a:t>
+            </a:r>
+          </a:p>
+        </p:txBody>
+      </p:sp>
+      <p:sp>
+        <p:nvSpPr>
+          <p:cNvPr id="4" name="TextBox 3"/>
+          <p:cNvSpPr txBox="1"/>
+          <p:nvPr/>
+        </p:nvSpPr>
+        <p:spPr>
+          <a:xfrm>
+            <a:off x="731520" y="365760"/>
+            <a:ext cx="10698480" cy="502920"/>
+          </a:xfrm>
+          <a:prstGeom prst="rect">
+            <a:avLst/>
+          </a:prstGeom>
+          <a:noFill/>
+        </p:spPr>
+        <p:txBody>
+          <a:bodyPr wrap="none">
+            <a:spAutoFit/>
+          </a:bodyPr>
+          <a:lstStyle/>
+          <a:p>
+            <a:pPr>
+              <a:defRPr sz="2200" b="1">
+                <a:solidFill>
+                  <a:srgbClr val="FFFFFF"/>
+                </a:solidFill>
+              </a:defRPr>
+            </a:pPr>
+            <a:r>
+              <a:t>Mid-Semester Percentage Completion &amp; Phase 4 Roadmap</a:t>
+            </a:r>
+          </a:p>
+        </p:txBody>
+      </p:sp>
+      <p:sp>
+        <p:nvSpPr>
+          <p:cNvPr id="5" name="TextBox 4"/>
+          <p:cNvSpPr txBox="1"/>
+          <p:nvPr/>
+        </p:nvSpPr>
+        <p:spPr>
+          <a:xfrm>
+            <a:off x="731520" y="6492240"/>
+            <a:ext cx="10698480" cy="274320"/>
+          </a:xfrm>
+          <a:prstGeom prst="rect">
+            <a:avLst/>
+          </a:prstGeom>
+          <a:noFill/>
+        </p:spPr>
+        <p:txBody>
+          <a:bodyPr wrap="none">
+            <a:spAutoFit/>
+          </a:bodyPr>
+          <a:lstStyle/>
+          <a:p>
+            <a:pPr>
               <a:defRPr sz="900">
                 <a:solidFill>
                   <a:srgbClr val="475569"/>
@@ -3528,7 +3557,7 @@
               </a:defRPr>
             </a:pPr>
             <a:r>
-              <a:t>EDI Mid-Semester Assessment | Project ID: ERI 5 / TY_CSE_10 | Hybrid Quantum-Classical CNN for Retinal Disease</a:t>
+              <a:t>EDI Mid-Semester Assessment | Project ID: ERI 5 / TY_CSE_10 | HQNN for Retinal Disease Classification</a:t>
             </a:r>
           </a:p>
         </p:txBody>
@@ -3601,33 +3630,74 @@
           <a:lstStyle/>
           <a:p>
             <a:pPr>
-              <a:defRPr sz="1300" b="1">
-                <a:solidFill>
-                  <a:srgbClr val="1E3A8A"/>
-                </a:solidFill>
-              </a:defRPr>
-            </a:pPr>
-            <a:r>
-              <a:t>1. Computational Resource Optimization</a:t>
+              <a:defRPr sz="1200" b="1">
+                <a:solidFill>
+                  <a:srgbClr val="16A34A"/>
+                </a:solidFill>
+              </a:defRPr>
+            </a:pPr>
+            <a:r>
+              <a:t>Phase 1: Data &amp; Clinical Preprocessing [100% COMPLETE]</a:t>
             </a:r>
           </a:p>
           <a:p>
             <a:pPr>
               <a:spcBef>
-                <a:spcPts val="600"/>
+                <a:spcPts val="300"/>
               </a:spcBef>
-              <a:defRPr sz="1100">
+              <a:defRPr sz="1000">
                 <a:solidFill>
                   <a:srgbClr val="0F172A"/>
                 </a:solidFill>
               </a:defRPr>
             </a:pPr>
             <a:r>
-              <a:t>• Disk Feature Caching: Eliminated 98% of redundant CNN forward passes, dropping GPU memory consumption from 14.8 GB to &lt; 1.2 GB.</a:t>
-            </a:r>
-            <a:br/>
-            <a:r>
-              <a:t>• Training Latency Reduction: Reduced training time from 45 min/epoch to 12 sec/epoch (a 225x acceleration), drastically lowering compute power.</a:t>
+              <a:t>✔ Ingestion of 3,662 APTOS 2019 retinal fundus images.</a:t>
+            </a:r>
+          </a:p>
+          <a:p>
+            <a:pPr>
+              <a:spcBef>
+                <a:spcPts val="300"/>
+              </a:spcBef>
+              <a:defRPr sz="1000">
+                <a:solidFill>
+                  <a:srgbClr val="0F172A"/>
+                </a:solidFill>
+              </a:defRPr>
+            </a:pPr>
+            <a:r>
+              <a:t>✔ Stratified 70/15/15 train/val/test split generation.</a:t>
+            </a:r>
+          </a:p>
+          <a:p>
+            <a:pPr>
+              <a:spcBef>
+                <a:spcPts val="300"/>
+              </a:spcBef>
+              <a:defRPr sz="1000">
+                <a:solidFill>
+                  <a:srgbClr val="0F172A"/>
+                </a:solidFill>
+              </a:defRPr>
+            </a:pPr>
+            <a:r>
+              <a:t>✔ Ben Graham circular crop and green-channel CLAHE at 224x224.</a:t>
+            </a:r>
+          </a:p>
+          <a:p>
+            <a:pPr>
+              <a:spcBef>
+                <a:spcPts val="300"/>
+              </a:spcBef>
+              <a:defRPr sz="1000">
+                <a:solidFill>
+                  <a:srgbClr val="0F172A"/>
+                </a:solidFill>
+              </a:defRPr>
+            </a:pPr>
+            <a:r>
+              <a:t>✔ Visual verification artifacts generated in reports/preprocessing_samples/.</a:t>
             </a:r>
           </a:p>
         </p:txBody>
@@ -3700,33 +3770,74 @@
           <a:lstStyle/>
           <a:p>
             <a:pPr>
-              <a:defRPr sz="1300" b="1">
-                <a:solidFill>
-                  <a:srgbClr val="0D9488"/>
-                </a:solidFill>
-              </a:defRPr>
-            </a:pPr>
-            <a:r>
-              <a:t>2. Environmental &amp; Green AI Impact</a:t>
+              <a:defRPr sz="1200" b="1">
+                <a:solidFill>
+                  <a:srgbClr val="16A34A"/>
+                </a:solidFill>
+              </a:defRPr>
+            </a:pPr>
+            <a:r>
+              <a:t>Phase 2: Classical Baselines &amp; Loss [100% COMPLETE]</a:t>
             </a:r>
           </a:p>
           <a:p>
             <a:pPr>
               <a:spcBef>
-                <a:spcPts val="600"/>
+                <a:spcPts val="300"/>
               </a:spcBef>
-              <a:defRPr sz="1100">
+              <a:defRPr sz="1000">
                 <a:solidFill>
                   <a:srgbClr val="0F172A"/>
                 </a:solidFill>
               </a:defRPr>
             </a:pPr>
             <a:r>
-              <a:t>• Carbon Footprint Reduction: Minimizing active GPU training time directly reduces greenhouse gas emissions associated with cloud data centers.</a:t>
-            </a:r>
-            <a:br/>
-            <a:r>
-              <a:t>• Ultra-Low Parameter Footprint: The 12-parameter quantum circuit proves that specialized edge quantum processors could run lightweight medical triage.</a:t>
+              <a:t>✔ ResNet18 baseline trained (Accuracy: 81.27%, QWK: 0.8721).</a:t>
+            </a:r>
+          </a:p>
+          <a:p>
+            <a:pPr>
+              <a:spcBef>
+                <a:spcPts val="300"/>
+              </a:spcBef>
+              <a:defRPr sz="1000">
+                <a:solidFill>
+                  <a:srgbClr val="0F172A"/>
+                </a:solidFill>
+              </a:defRPr>
+            </a:pPr>
+            <a:r>
+              <a:t>✔ MobileNetV2 baseline trained (Accuracy: 77.27%, QWK: 0.8719).</a:t>
+            </a:r>
+          </a:p>
+          <a:p>
+            <a:pPr>
+              <a:spcBef>
+                <a:spcPts val="300"/>
+              </a:spcBef>
+              <a:defRPr sz="1000">
+                <a:solidFill>
+                  <a:srgbClr val="0F172A"/>
+                </a:solidFill>
+              </a:defRPr>
+            </a:pPr>
+            <a:r>
+              <a:t>✔ Class-weighted Focal Loss (gamma=2.0) implemented and verified.</a:t>
+            </a:r>
+          </a:p>
+          <a:p>
+            <a:pPr>
+              <a:spcBef>
+                <a:spcPts val="300"/>
+              </a:spcBef>
+              <a:defRPr sz="1000">
+                <a:solidFill>
+                  <a:srgbClr val="0F172A"/>
+                </a:solidFill>
+              </a:defRPr>
+            </a:pPr>
+            <a:r>
+              <a:t>✔ Feature extraction and disk caching pipeline operational.</a:t>
             </a:r>
           </a:p>
         </p:txBody>
@@ -3799,33 +3910,74 @@
           <a:lstStyle/>
           <a:p>
             <a:pPr>
-              <a:defRPr sz="1300" b="1">
-                <a:solidFill>
-                  <a:srgbClr val="1E3A8A"/>
-                </a:solidFill>
-              </a:defRPr>
-            </a:pPr>
-            <a:r>
-              <a:t>3. Financial &amp; Economic Viability</a:t>
+              <a:defRPr sz="1200" b="1">
+                <a:solidFill>
+                  <a:srgbClr val="16A34A"/>
+                </a:solidFill>
+              </a:defRPr>
+            </a:pPr>
+            <a:r>
+              <a:t>Phase 3: Quantum Circuits &amp; Hybrids [100% COMPLETE]</a:t>
             </a:r>
           </a:p>
           <a:p>
             <a:pPr>
               <a:spcBef>
-                <a:spcPts val="600"/>
+                <a:spcPts val="300"/>
               </a:spcBef>
-              <a:defRPr sz="1100">
+              <a:defRPr sz="1000">
                 <a:solidFill>
                   <a:srgbClr val="0F172A"/>
                 </a:solidFill>
               </a:defRPr>
             </a:pPr>
             <a:r>
-              <a:t>• Zero Infrastructure Cost: Developed entirely using open-source tools (PyTorch, PennyLane, Qiskit) and free-tier cloud resources (Google Colab T4, IBM Quantum).</a:t>
-            </a:r>
-            <a:br/>
-            <a:r>
-              <a:t>• Scalable Clinical Screening: Reduces the cost of specialist consultations by automating initial triage in rural, underserved healthcare clinics.</a:t>
+              <a:t>✔ PennyLane StronglyEntanglingLayers circuits (4 &amp; 8 qubits) built.</a:t>
+            </a:r>
+          </a:p>
+          <a:p>
+            <a:pPr>
+              <a:spcBef>
+                <a:spcPts val="300"/>
+              </a:spcBef>
+              <a:defRPr sz="1000">
+                <a:solidFill>
+                  <a:srgbClr val="0F172A"/>
+                </a:solidFill>
+              </a:defRPr>
+            </a:pPr>
+            <a:r>
+              <a:t>✔ 3 Compression modules (Linear, Autoencoder, PCA) implemented.</a:t>
+            </a:r>
+          </a:p>
+          <a:p>
+            <a:pPr>
+              <a:spcBef>
+                <a:spcPts val="300"/>
+              </a:spcBef>
+              <a:defRPr sz="1000">
+                <a:solidFill>
+                  <a:srgbClr val="0F172A"/>
+                </a:solidFill>
+              </a:defRPr>
+            </a:pPr>
+            <a:r>
+              <a:t>✔ All 4 hybrid models trained and evaluated on held-out test split.</a:t>
+            </a:r>
+          </a:p>
+          <a:p>
+            <a:pPr>
+              <a:spcBef>
+                <a:spcPts val="300"/>
+              </a:spcBef>
+              <a:defRPr sz="1000">
+                <a:solidFill>
+                  <a:srgbClr val="0F172A"/>
+                </a:solidFill>
+              </a:defRPr>
+            </a:pPr>
+            <a:r>
+              <a:t>✔ Head-to-head empirical benchmark matrix compiled in reports/.</a:t>
             </a:r>
           </a:p>
         </p:txBody>
@@ -3898,33 +4050,74 @@
           <a:lstStyle/>
           <a:p>
             <a:pPr>
-              <a:defRPr sz="1300" b="1">
-                <a:solidFill>
-                  <a:srgbClr val="0D9488"/>
-                </a:solidFill>
-              </a:defRPr>
-            </a:pPr>
-            <a:r>
-              <a:t>4. Lifecycle Sustainability &amp; Maintainability</a:t>
+              <a:defRPr sz="1200" b="1">
+                <a:solidFill>
+                  <a:srgbClr val="1E3A8A"/>
+                </a:solidFill>
+              </a:defRPr>
+            </a:pPr>
+            <a:r>
+              <a:t>Phase 4: Hardware Noise &amp; Deployment [PLANNED (0% -&gt; 100% by End-Sem)]</a:t>
             </a:r>
           </a:p>
           <a:p>
             <a:pPr>
               <a:spcBef>
-                <a:spcPts val="600"/>
+                <a:spcPts val="300"/>
               </a:spcBef>
-              <a:defRPr sz="1100">
+              <a:defRPr sz="1000">
                 <a:solidFill>
                   <a:srgbClr val="0F172A"/>
                 </a:solidFill>
               </a:defRPr>
             </a:pPr>
             <a:r>
-              <a:t>• Modular Architecture: Decoupled preprocessor, backbone, compressor, and quantum circuit allow seamless drop-in upgrades as physical QPUs improve.</a:t>
-            </a:r>
-            <a:br/>
-            <a:r>
-              <a:t>• Fully Reproducible: Config-driven YAML files and fixed seed splits ensure long-term auditability.</a:t>
+              <a:t>• Milestone 4.1: Qiskit Aer depolarizing and thermal relaxation noise sweeps.</a:t>
+            </a:r>
+          </a:p>
+          <a:p>
+            <a:pPr>
+              <a:spcBef>
+                <a:spcPts val="300"/>
+              </a:spcBef>
+              <a:defRPr sz="1000">
+                <a:solidFill>
+                  <a:srgbClr val="0F172A"/>
+                </a:solidFill>
+              </a:defRPr>
+            </a:pPr>
+            <a:r>
+              <a:t>• Milestone 4.2: Execution on real IBM Quantum hardware (ibm_brisbane).</a:t>
+            </a:r>
+          </a:p>
+          <a:p>
+            <a:pPr>
+              <a:spcBef>
+                <a:spcPts val="300"/>
+              </a:spcBef>
+              <a:defRPr sz="1000">
+                <a:solidFill>
+                  <a:srgbClr val="0F172A"/>
+                </a:solidFill>
+              </a:defRPr>
+            </a:pPr>
+            <a:r>
+              <a:t>• Milestone 4.3: Clinical Streamlit web application deployment.</a:t>
+            </a:r>
+          </a:p>
+          <a:p>
+            <a:pPr>
+              <a:spcBef>
+                <a:spcPts val="300"/>
+              </a:spcBef>
+              <a:defRPr sz="1000">
+                <a:solidFill>
+                  <a:srgbClr val="0F172A"/>
+                </a:solidFill>
+              </a:defRPr>
+            </a:pPr>
+            <a:r>
+              <a:t>• Milestone 4.4: Final IEEE conference manuscript and viva defense.</a:t>
             </a:r>
           </a:p>
         </p:txBody>
@@ -4009,82 +4202,82 @@
           <a:noFill/>
         </p:spPr>
         <p:txBody>
-          <a:bodyPr wrap="square">
-            <a:spAutoFit/>
-          </a:bodyPr>
-          <a:lstStyle/>
-          <a:p>
-            <a:pPr>
-              <a:defRPr sz="1100" b="1">
-                <a:solidFill>
-                  <a:srgbClr val="0D9488"/>
-                </a:solidFill>
-              </a:defRPr>
-            </a:pPr>
-            <a:r>
-              <a:t>EDI PARAMETER 8: KNOWLEDGE OF THE DOMAIN, TECHNOLOGY, AND TOOLS BEING USED</a:t>
-            </a:r>
-          </a:p>
-        </p:txBody>
-      </p:sp>
-      <p:sp>
-        <p:nvSpPr>
-          <p:cNvPr id="4" name="TextBox 3"/>
-          <p:cNvSpPr txBox="1"/>
-          <p:nvPr/>
-        </p:nvSpPr>
-        <p:spPr>
-          <a:xfrm>
-            <a:off x="731520" y="365760"/>
-            <a:ext cx="10698480" cy="502920"/>
-          </a:xfrm>
-          <a:prstGeom prst="rect">
-            <a:avLst/>
-          </a:prstGeom>
-          <a:noFill/>
-        </p:spPr>
-        <p:txBody>
-          <a:bodyPr wrap="square">
-            <a:spAutoFit/>
-          </a:bodyPr>
-          <a:lstStyle/>
-          <a:p>
-            <a:pPr>
-              <a:defRPr sz="2200" b="1">
-                <a:solidFill>
-                  <a:srgbClr val="FFFFFF"/>
-                </a:solidFill>
-              </a:defRPr>
-            </a:pPr>
-            <a:r>
-              <a:t>Domain Knowledge, Technology Stack, &amp; Tools Used</a:t>
-            </a:r>
-          </a:p>
-        </p:txBody>
-      </p:sp>
-      <p:sp>
-        <p:nvSpPr>
-          <p:cNvPr id="5" name="TextBox 4"/>
-          <p:cNvSpPr txBox="1"/>
-          <p:nvPr/>
-        </p:nvSpPr>
-        <p:spPr>
-          <a:xfrm>
-            <a:off x="731520" y="6492240"/>
-            <a:ext cx="10698480" cy="274320"/>
-          </a:xfrm>
-          <a:prstGeom prst="rect">
-            <a:avLst/>
-          </a:prstGeom>
-          <a:noFill/>
-        </p:spPr>
-        <p:txBody>
           <a:bodyPr wrap="none">
             <a:spAutoFit/>
           </a:bodyPr>
           <a:lstStyle/>
           <a:p>
             <a:pPr>
+              <a:defRPr sz="1100" b="1">
+                <a:solidFill>
+                  <a:srgbClr val="0D9488"/>
+                </a:solidFill>
+              </a:defRPr>
+            </a:pPr>
+            <a:r>
+              <a:t>SCHOLARLY REFERENCES</a:t>
+            </a:r>
+          </a:p>
+        </p:txBody>
+      </p:sp>
+      <p:sp>
+        <p:nvSpPr>
+          <p:cNvPr id="4" name="TextBox 3"/>
+          <p:cNvSpPr txBox="1"/>
+          <p:nvPr/>
+        </p:nvSpPr>
+        <p:spPr>
+          <a:xfrm>
+            <a:off x="731520" y="365760"/>
+            <a:ext cx="10698480" cy="502920"/>
+          </a:xfrm>
+          <a:prstGeom prst="rect">
+            <a:avLst/>
+          </a:prstGeom>
+          <a:noFill/>
+        </p:spPr>
+        <p:txBody>
+          <a:bodyPr wrap="none">
+            <a:spAutoFit/>
+          </a:bodyPr>
+          <a:lstStyle/>
+          <a:p>
+            <a:pPr>
+              <a:defRPr sz="2200" b="1">
+                <a:solidFill>
+                  <a:srgbClr val="FFFFFF"/>
+                </a:solidFill>
+              </a:defRPr>
+            </a:pPr>
+            <a:r>
+              <a:t>References &amp; Literature Citations</a:t>
+            </a:r>
+          </a:p>
+        </p:txBody>
+      </p:sp>
+      <p:sp>
+        <p:nvSpPr>
+          <p:cNvPr id="5" name="TextBox 4"/>
+          <p:cNvSpPr txBox="1"/>
+          <p:nvPr/>
+        </p:nvSpPr>
+        <p:spPr>
+          <a:xfrm>
+            <a:off x="731520" y="6492240"/>
+            <a:ext cx="10698480" cy="274320"/>
+          </a:xfrm>
+          <a:prstGeom prst="rect">
+            <a:avLst/>
+          </a:prstGeom>
+          <a:noFill/>
+        </p:spPr>
+        <p:txBody>
+          <a:bodyPr wrap="none">
+            <a:spAutoFit/>
+          </a:bodyPr>
+          <a:lstStyle/>
+          <a:p>
+            <a:pPr>
               <a:defRPr sz="900">
                 <a:solidFill>
                   <a:srgbClr val="475569"/>
@@ -4092,7 +4285,7 @@
               </a:defRPr>
             </a:pPr>
             <a:r>
-              <a:t>EDI Mid-Semester Assessment | Project ID: ERI 5 / TY_CSE_10 | Hybrid Quantum-Classical CNN for Retinal Disease</a:t>
+              <a:t>EDI Mid-Semester Assessment | Project ID: ERI 5 / TY_CSE_10 | HQNN for Retinal Disease Classification</a:t>
             </a:r>
           </a:p>
         </p:txBody>
@@ -4106,7 +4299,7 @@
         <p:spPr>
           <a:xfrm>
             <a:off x="731520" y="1280160"/>
-            <a:ext cx="3410712" cy="4937760"/>
+            <a:ext cx="10725912" cy="4937760"/>
           </a:xfrm>
           <a:prstGeom prst="roundRect">
             <a:avLst/>
@@ -4150,8 +4343,8 @@
         </p:nvSpPr>
         <p:spPr>
           <a:xfrm>
-            <a:off x="868680" y="1463040"/>
-            <a:ext cx="3136392" cy="4572000"/>
+            <a:off x="914400" y="1463040"/>
+            <a:ext cx="10360152" cy="4572000"/>
           </a:xfrm>
           <a:prstGeom prst="rect">
             <a:avLst/>
@@ -4167,18 +4360,18 @@
             <a:pPr>
               <a:defRPr sz="1400" b="1">
                 <a:solidFill>
-                  <a:srgbClr val="0D9488"/>
-                </a:solidFill>
-              </a:defRPr>
-            </a:pPr>
-            <a:r>
-              <a:t>Medical &amp; Preprocessing</a:t>
+                  <a:srgbClr val="1E3A8A"/>
+                </a:solidFill>
+              </a:defRPr>
+            </a:pPr>
+            <a:r>
+              <a:t>Academic &amp; Technical Citations:</a:t>
             </a:r>
           </a:p>
           <a:p>
             <a:pPr>
               <a:spcBef>
-                <a:spcPts val="800"/>
+                <a:spcPts val="600"/>
               </a:spcBef>
               <a:defRPr sz="1100">
                 <a:solidFill>
@@ -4187,13 +4380,13 @@
               </a:defRPr>
             </a:pPr>
             <a:r>
-              <a:t>• Clinical Fundus Photography: High-resolution retinal imaging capturing macula and optic disc.</a:t>
+              <a:t>1. Bali, R. et al. (2025). 'QuantumNet: Parameter-efficient hybrid quantum-classical transfer learning for diabetic retinopathy detection.' MethodsX (Elsevier), 14, 102980.</a:t>
             </a:r>
           </a:p>
           <a:p>
             <a:pPr>
               <a:spcBef>
-                <a:spcPts val="800"/>
+                <a:spcPts val="600"/>
               </a:spcBef>
               <a:defRPr sz="1100">
                 <a:solidFill>
@@ -4202,13 +4395,13 @@
               </a:defRPr>
             </a:pPr>
             <a:r>
-              <a:t>• Ben Graham Circular Masking: Removes background noise and dark margins.</a:t>
+              <a:t>2. Ara, S. et al. (2025). 'Multi-grade diabetic retinopathy classification using 8-qubit variational quantum circuits and stratified sampling.' MethodsX (Elsevier), 14, 103012.</a:t>
             </a:r>
           </a:p>
           <a:p>
             <a:pPr>
               <a:spcBef>
-                <a:spcPts val="800"/>
+                <a:spcPts val="600"/>
               </a:spcBef>
               <a:defRPr sz="1100">
                 <a:solidFill>
@@ -4217,13 +4410,13 @@
               </a:defRPr>
             </a:pPr>
             <a:r>
-              <a:t>• Green-Channel CLAHE: Isolates 540-575nm spectrum where hemoglobin absorbs light, maximizing lesion contrast.</a:t>
+              <a:t>3. Stalin Babu, C. et al. (2025). 'HQCNN: Hybrid quantum convolutional neural networks for retinal disease grading.' IEEE OTCON Proceedings, pp. 112–118.</a:t>
             </a:r>
           </a:p>
           <a:p>
             <a:pPr>
               <a:spcBef>
-                <a:spcPts val="800"/>
+                <a:spcPts val="600"/>
               </a:spcBef>
               <a:defRPr sz="1100">
                 <a:solidFill>
@@ -4232,93 +4425,13 @@
               </a:defRPr>
             </a:pPr>
             <a:r>
-              <a:t>• OpenCV &amp; Albumentations: High-throughput augmentation and standardization.</a:t>
-            </a:r>
-          </a:p>
-        </p:txBody>
-      </p:sp>
-      <p:sp>
-        <p:nvSpPr>
-          <p:cNvPr id="8" name="Rounded Rectangle 7"/>
-          <p:cNvSpPr/>
-          <p:nvPr/>
-        </p:nvSpPr>
-        <p:spPr>
-          <a:xfrm>
-            <a:off x="4389120" y="1280160"/>
-            <a:ext cx="3410712" cy="4937760"/>
-          </a:xfrm>
-          <a:prstGeom prst="roundRect">
-            <a:avLst/>
-          </a:prstGeom>
-          <a:solidFill>
-            <a:srgbClr val="FFFFFF"/>
-          </a:solidFill>
-          <a:ln w="12700">
-            <a:solidFill>
-              <a:srgbClr val="E2E8F0"/>
-            </a:solidFill>
-          </a:ln>
-        </p:spPr>
-        <p:style>
-          <a:lnRef idx="1">
-            <a:schemeClr val="accent1"/>
-          </a:lnRef>
-          <a:fillRef idx="3">
-            <a:schemeClr val="accent1"/>
-          </a:fillRef>
-          <a:effectRef idx="2">
-            <a:schemeClr val="accent1"/>
-          </a:effectRef>
-          <a:fontRef idx="minor">
-            <a:schemeClr val="lt1"/>
-          </a:fontRef>
-        </p:style>
-        <p:txBody>
-          <a:bodyPr rtlCol="0" anchor="ctr"/>
-          <a:lstStyle/>
-          <a:p>
-            <a:pPr algn="ctr"/>
-          </a:p>
-        </p:txBody>
-      </p:sp>
-      <p:sp>
-        <p:nvSpPr>
-          <p:cNvPr id="9" name="TextBox 8"/>
-          <p:cNvSpPr txBox="1"/>
-          <p:nvPr/>
-        </p:nvSpPr>
-        <p:spPr>
-          <a:xfrm>
-            <a:off x="4526280" y="1463040"/>
-            <a:ext cx="3136392" cy="4572000"/>
-          </a:xfrm>
-          <a:prstGeom prst="rect">
-            <a:avLst/>
-          </a:prstGeom>
-          <a:noFill/>
-        </p:spPr>
-        <p:txBody>
-          <a:bodyPr wrap="square">
-            <a:spAutoFit/>
-          </a:bodyPr>
-          <a:lstStyle/>
-          <a:p>
-            <a:pPr>
-              <a:defRPr sz="1400" b="1">
-                <a:solidFill>
-                  <a:srgbClr val="1E3A8A"/>
-                </a:solidFill>
-              </a:defRPr>
-            </a:pPr>
-            <a:r>
-              <a:t>Deep Learning &amp; Core AI</a:t>
+              <a:t>4. Sultana, M. &amp; Agrawal, P. (2026). 'Q-DRNet: Parameterized quantum circuits for low-power edge ophthalmic diagnostics.' IEEE Conference on Computational Intelligence, pp. 245–251.</a:t>
             </a:r>
           </a:p>
           <a:p>
             <a:pPr>
               <a:spcBef>
-                <a:spcPts val="800"/>
+                <a:spcPts val="600"/>
               </a:spcBef>
               <a:defRPr sz="1100">
                 <a:solidFill>
@@ -4327,13 +4440,13 @@
               </a:defRPr>
             </a:pPr>
             <a:r>
-              <a:t>• PyTorch 2.2+: GPU autograd engine, tensor abstractions, and modular training pipelines.</a:t>
+              <a:t>5. Alsubai, S. et al. (2023). 'Quantum-enhanced deep neural architectures for medical image representation.' Mathematics (MDPI), 11(14), 3120.</a:t>
             </a:r>
           </a:p>
           <a:p>
             <a:pPr>
               <a:spcBef>
-                <a:spcPts val="800"/>
+                <a:spcPts val="600"/>
               </a:spcBef>
               <a:defRPr sz="1100">
                 <a:solidFill>
@@ -4342,13 +4455,13 @@
               </a:defRPr>
             </a:pPr>
             <a:r>
-              <a:t>• ResNet18 &amp; MobileNetV2: Deep CNN backbones providing 512-d and 1280-d spatial embeddings.</a:t>
+              <a:t>6. Bergholm, V. et al. (2018). 'PennyLane: Automatic differentiation of hybrid quantum-classical computations.' arXiv:1811.04968.</a:t>
             </a:r>
           </a:p>
           <a:p>
             <a:pPr>
               <a:spcBef>
-                <a:spcPts val="800"/>
+                <a:spcPts val="600"/>
               </a:spcBef>
               <a:defRPr sz="1100">
                 <a:solidFill>
@@ -4357,13 +4470,13 @@
               </a:defRPr>
             </a:pPr>
             <a:r>
-              <a:t>• Class-Weighted Focal Loss: Custom PyTorch loss function combating severe medical class imbalance.</a:t>
+              <a:t>7. APTOS 2019 Blindness Detection Benchmark, Asia Pacific Tele-Ophthalmology Society, Kaggle Dataset (3,662 fundus images).</a:t>
             </a:r>
           </a:p>
           <a:p>
             <a:pPr>
               <a:spcBef>
-                <a:spcPts val="800"/>
+                <a:spcPts val="600"/>
               </a:spcBef>
               <a:defRPr sz="1100">
                 <a:solidFill>
@@ -4372,147 +4485,7 @@
               </a:defRPr>
             </a:pPr>
             <a:r>
-              <a:t>• Scikit-Learn: Stratified k-fold sampling, PCA projection, and multi-class ROC computation.</a:t>
-            </a:r>
-          </a:p>
-        </p:txBody>
-      </p:sp>
-      <p:sp>
-        <p:nvSpPr>
-          <p:cNvPr id="10" name="Rounded Rectangle 9"/>
-          <p:cNvSpPr/>
-          <p:nvPr/>
-        </p:nvSpPr>
-        <p:spPr>
-          <a:xfrm>
-            <a:off x="8046720" y="1280160"/>
-            <a:ext cx="3410712" cy="4937760"/>
-          </a:xfrm>
-          <a:prstGeom prst="roundRect">
-            <a:avLst/>
-          </a:prstGeom>
-          <a:solidFill>
-            <a:srgbClr val="FFFFFF"/>
-          </a:solidFill>
-          <a:ln w="12700">
-            <a:solidFill>
-              <a:srgbClr val="E2E8F0"/>
-            </a:solidFill>
-          </a:ln>
-        </p:spPr>
-        <p:style>
-          <a:lnRef idx="1">
-            <a:schemeClr val="accent1"/>
-          </a:lnRef>
-          <a:fillRef idx="3">
-            <a:schemeClr val="accent1"/>
-          </a:fillRef>
-          <a:effectRef idx="2">
-            <a:schemeClr val="accent1"/>
-          </a:effectRef>
-          <a:fontRef idx="minor">
-            <a:schemeClr val="lt1"/>
-          </a:fontRef>
-        </p:style>
-        <p:txBody>
-          <a:bodyPr rtlCol="0" anchor="ctr"/>
-          <a:lstStyle/>
-          <a:p>
-            <a:pPr algn="ctr"/>
-          </a:p>
-        </p:txBody>
-      </p:sp>
-      <p:sp>
-        <p:nvSpPr>
-          <p:cNvPr id="11" name="TextBox 10"/>
-          <p:cNvSpPr txBox="1"/>
-          <p:nvPr/>
-        </p:nvSpPr>
-        <p:spPr>
-          <a:xfrm>
-            <a:off x="8183880" y="1463040"/>
-            <a:ext cx="3136392" cy="4572000"/>
-          </a:xfrm>
-          <a:prstGeom prst="rect">
-            <a:avLst/>
-          </a:prstGeom>
-          <a:noFill/>
-        </p:spPr>
-        <p:txBody>
-          <a:bodyPr wrap="square">
-            <a:spAutoFit/>
-          </a:bodyPr>
-          <a:lstStyle/>
-          <a:p>
-            <a:pPr>
-              <a:defRPr sz="1400" b="1">
-                <a:solidFill>
-                  <a:srgbClr val="0D9488"/>
-                </a:solidFill>
-              </a:defRPr>
-            </a:pPr>
-            <a:r>
-              <a:t>Quantum Computing Frameworks</a:t>
-            </a:r>
-          </a:p>
-          <a:p>
-            <a:pPr>
-              <a:spcBef>
-                <a:spcPts val="800"/>
-              </a:spcBef>
-              <a:defRPr sz="1100">
-                <a:solidFill>
-                  <a:srgbClr val="0F172A"/>
-                </a:solidFill>
-              </a:defRPr>
-            </a:pPr>
-            <a:r>
-              <a:t>• PennyLane 0.35+: Differentiable quantum programming library connecting QNodes with PyTorch.</a:t>
-            </a:r>
-          </a:p>
-          <a:p>
-            <a:pPr>
-              <a:spcBef>
-                <a:spcPts val="800"/>
-              </a:spcBef>
-              <a:defRPr sz="1100">
-                <a:solidFill>
-                  <a:srgbClr val="0F172A"/>
-                </a:solidFill>
-              </a:defRPr>
-            </a:pPr>
-            <a:r>
-              <a:t>• StronglyEntanglingLayers: Variational ansatz with Euler rotations and circular CNOT entanglement.</a:t>
-            </a:r>
-          </a:p>
-          <a:p>
-            <a:pPr>
-              <a:spcBef>
-                <a:spcPts val="800"/>
-              </a:spcBef>
-              <a:defRPr sz="1100">
-                <a:solidFill>
-                  <a:srgbClr val="0F172A"/>
-                </a:solidFill>
-              </a:defRPr>
-            </a:pPr>
-            <a:r>
-              <a:t>• Parameter-Shift Rule: Exact quantum hardware differentiation.</a:t>
-            </a:r>
-          </a:p>
-          <a:p>
-            <a:pPr>
-              <a:spcBef>
-                <a:spcPts val="800"/>
-              </a:spcBef>
-              <a:defRPr sz="1100">
-                <a:solidFill>
-                  <a:srgbClr val="0F172A"/>
-                </a:solidFill>
-              </a:defRPr>
-            </a:pPr>
-            <a:r>
-              <a:t>• Qiskit 1.0 &amp; IBM Quantum: Depolarizing noise simulation and physical QPU execution (ibm_brisbane).</a:t>
+              <a:t>8. Lin, T.-Y. et al. (2017). 'Focal Loss for Dense Object Detection.' IEEE Transactions on Pattern Analysis and Machine Intelligence, 42(2), 318–327.</a:t>
             </a:r>
           </a:p>
         </p:txBody>
@@ -4544,7 +4517,7 @@
         <p:spPr>
           <a:xfrm>
             <a:off x="0" y="0"/>
-            <a:ext cx="12191695" cy="1005840"/>
+            <a:ext cx="12191695" cy="6858000"/>
           </a:xfrm>
           <a:prstGeom prst="rect">
             <a:avLst/>
@@ -4588,78 +4561,8 @@
         </p:nvSpPr>
         <p:spPr>
           <a:xfrm>
-            <a:off x="731520" y="109728"/>
-            <a:ext cx="10698480" cy="274320"/>
-          </a:xfrm>
-          <a:prstGeom prst="rect">
-            <a:avLst/>
-          </a:prstGeom>
-          <a:noFill/>
-        </p:spPr>
-        <p:txBody>
-          <a:bodyPr wrap="square">
-            <a:spAutoFit/>
-          </a:bodyPr>
-          <a:lstStyle/>
-          <a:p>
-            <a:pPr>
-              <a:defRPr sz="1100" b="1">
-                <a:solidFill>
-                  <a:srgbClr val="0D9488"/>
-                </a:solidFill>
-              </a:defRPr>
-            </a:pPr>
-            <a:r>
-              <a:t>EDI PARAMETER 4: GROUP FORMATION AND IDENTIFICATION OF INDIVIDUAL RESPONSIBILITIES</a:t>
-            </a:r>
-          </a:p>
-        </p:txBody>
-      </p:sp>
-      <p:sp>
-        <p:nvSpPr>
-          <p:cNvPr id="4" name="TextBox 3"/>
-          <p:cNvSpPr txBox="1"/>
-          <p:nvPr/>
-        </p:nvSpPr>
-        <p:spPr>
-          <a:xfrm>
-            <a:off x="731520" y="365760"/>
-            <a:ext cx="10698480" cy="502920"/>
-          </a:xfrm>
-          <a:prstGeom prst="rect">
-            <a:avLst/>
-          </a:prstGeom>
-          <a:noFill/>
-        </p:spPr>
-        <p:txBody>
-          <a:bodyPr wrap="square">
-            <a:spAutoFit/>
-          </a:bodyPr>
-          <a:lstStyle/>
-          <a:p>
-            <a:pPr>
-              <a:defRPr sz="2200" b="1">
-                <a:solidFill>
-                  <a:srgbClr val="FFFFFF"/>
-                </a:solidFill>
-              </a:defRPr>
-            </a:pPr>
-            <a:r>
-              <a:t>Group Formation &amp; Allocation of Individual Responsibilities</a:t>
-            </a:r>
-          </a:p>
-        </p:txBody>
-      </p:sp>
-      <p:sp>
-        <p:nvSpPr>
-          <p:cNvPr id="5" name="TextBox 4"/>
-          <p:cNvSpPr txBox="1"/>
-          <p:nvPr/>
-        </p:nvSpPr>
-        <p:spPr>
-          <a:xfrm>
-            <a:off x="731520" y="6492240"/>
-            <a:ext cx="10698480" cy="274320"/>
+            <a:off x="1097280" y="1645920"/>
+            <a:ext cx="9966960" cy="1371600"/>
           </a:xfrm>
           <a:prstGeom prst="rect">
             <a:avLst/>
@@ -4673,38 +4576,53 @@
           <a:lstStyle/>
           <a:p>
             <a:pPr>
-              <a:defRPr sz="900">
-                <a:solidFill>
-                  <a:srgbClr val="475569"/>
-                </a:solidFill>
-              </a:defRPr>
-            </a:pPr>
-            <a:r>
-              <a:t>EDI Mid-Semester Assessment | Project ID: ERI 5 / TY_CSE_10 | Hybrid Quantum-Classical CNN for Retinal Disease</a:t>
-            </a:r>
-          </a:p>
-        </p:txBody>
-      </p:sp>
-      <p:sp>
-        <p:nvSpPr>
-          <p:cNvPr id="6" name="Rounded Rectangle 5"/>
+              <a:defRPr sz="4400" b="1">
+                <a:solidFill>
+                  <a:srgbClr val="FFFFFF"/>
+                </a:solidFill>
+              </a:defRPr>
+            </a:pPr>
+            <a:r>
+              <a:t>Thank You!</a:t>
+            </a:r>
+          </a:p>
+          <a:p>
+            <a:pPr>
+              <a:spcBef>
+                <a:spcPts val="800"/>
+              </a:spcBef>
+              <a:defRPr sz="2000">
+                <a:solidFill>
+                  <a:srgbClr val="0D9488"/>
+                </a:solidFill>
+              </a:defRPr>
+            </a:pPr>
+            <a:r>
+              <a:t>Questions &amp; Answers | Defense Discussion</a:t>
+            </a:r>
+          </a:p>
+        </p:txBody>
+      </p:sp>
+      <p:sp>
+        <p:nvSpPr>
+          <p:cNvPr id="4" name="Rounded Rectangle 3"/>
           <p:cNvSpPr/>
           <p:nvPr/>
         </p:nvSpPr>
         <p:spPr>
           <a:xfrm>
-            <a:off x="731520" y="1280160"/>
-            <a:ext cx="5212080" cy="2286000"/>
+            <a:off x="1097280" y="3474720"/>
+            <a:ext cx="9966960" cy="2560320"/>
           </a:xfrm>
           <a:prstGeom prst="roundRect">
             <a:avLst/>
           </a:prstGeom>
           <a:solidFill>
-            <a:srgbClr val="FFFFFF"/>
+            <a:srgbClr val="1E293B"/>
           </a:solidFill>
           <a:ln w="12700">
             <a:solidFill>
-              <a:srgbClr val="E2E8F0"/>
+              <a:srgbClr val="334155"/>
             </a:solidFill>
           </a:ln>
         </p:spPr>
@@ -4732,14 +4650,14 @@
       </p:sp>
       <p:sp>
         <p:nvSpPr>
-          <p:cNvPr id="7" name="TextBox 6"/>
+          <p:cNvPr id="5" name="TextBox 4"/>
           <p:cNvSpPr txBox="1"/>
           <p:nvPr/>
         </p:nvSpPr>
         <p:spPr>
           <a:xfrm>
-            <a:off x="914400" y="1417319"/>
-            <a:ext cx="4846320" cy="2011680"/>
+            <a:off x="1371600" y="3657600"/>
+            <a:ext cx="9418320" cy="2194560"/>
           </a:xfrm>
           <a:prstGeom prst="rect">
             <a:avLst/>
@@ -4753,742 +4671,29 @@
           <a:lstStyle/>
           <a:p>
             <a:pPr>
-              <a:defRPr sz="1200" b="1">
+              <a:defRPr sz="1400" b="1">
                 <a:solidFill>
                   <a:srgbClr val="0D9488"/>
                 </a:solidFill>
               </a:defRPr>
             </a:pPr>
             <a:r>
-              <a:t>Harshwardhan Suryawanshi (Lead) - Overall System Architecture &amp; Quantum Integration</a:t>
+              <a:t>PROJECT REPOSITORY &amp; CONTACT DETAILS</a:t>
             </a:r>
           </a:p>
           <a:p>
             <a:pPr>
               <a:spcBef>
-                <a:spcPts val="300"/>
+                <a:spcPts val="600"/>
               </a:spcBef>
-              <a:defRPr sz="1000">
-                <a:solidFill>
-                  <a:srgbClr val="0F172A"/>
-                </a:solidFill>
-              </a:defRPr>
-            </a:pPr>
-            <a:r>
-              <a:t>• Formulated the end-to-end hybrid architecture and PennyLane-PyTorch bridge.</a:t>
-            </a:r>
-          </a:p>
-          <a:p>
-            <a:pPr>
-              <a:spcBef>
-                <a:spcPts val="300"/>
-              </a:spcBef>
-              <a:defRPr sz="1000">
-                <a:solidFill>
-                  <a:srgbClr val="0F172A"/>
-                </a:solidFill>
-              </a:defRPr>
-            </a:pPr>
-            <a:r>
-              <a:t>• Designed and implemented StronglyEntanglingLayers quantum circuits with TorchLayer.</a:t>
-            </a:r>
-          </a:p>
-          <a:p>
-            <a:pPr>
-              <a:spcBef>
-                <a:spcPts val="300"/>
-              </a:spcBef>
-              <a:defRPr sz="1000">
-                <a:solidFill>
-                  <a:srgbClr val="0F172A"/>
-                </a:solidFill>
-              </a:defRPr>
-            </a:pPr>
-            <a:r>
-              <a:t>• Engineered the GPU-CPU device bridging mechanism resolving default.qubit simulator mismatch.</a:t>
-            </a:r>
-          </a:p>
-          <a:p>
-            <a:pPr>
-              <a:spcBef>
-                <a:spcPts val="300"/>
-              </a:spcBef>
-              <a:defRPr sz="1000">
-                <a:solidFill>
-                  <a:srgbClr val="0F172A"/>
-                </a:solidFill>
-              </a:defRPr>
-            </a:pPr>
-            <a:r>
-              <a:t>• Conducted hyperparameter optimization and Weights &amp; Biases telemetry tracking.</a:t>
-            </a:r>
-          </a:p>
-        </p:txBody>
-      </p:sp>
-      <p:sp>
-        <p:nvSpPr>
-          <p:cNvPr id="8" name="Rounded Rectangle 7"/>
-          <p:cNvSpPr/>
-          <p:nvPr/>
-        </p:nvSpPr>
-        <p:spPr>
-          <a:xfrm>
-            <a:off x="6217920" y="1280160"/>
-            <a:ext cx="5212080" cy="2286000"/>
-          </a:xfrm>
-          <a:prstGeom prst="roundRect">
-            <a:avLst/>
-          </a:prstGeom>
-          <a:solidFill>
-            <a:srgbClr val="FFFFFF"/>
-          </a:solidFill>
-          <a:ln w="12700">
-            <a:solidFill>
-              <a:srgbClr val="E2E8F0"/>
-            </a:solidFill>
-          </a:ln>
-        </p:spPr>
-        <p:style>
-          <a:lnRef idx="1">
-            <a:schemeClr val="accent1"/>
-          </a:lnRef>
-          <a:fillRef idx="3">
-            <a:schemeClr val="accent1"/>
-          </a:fillRef>
-          <a:effectRef idx="2">
-            <a:schemeClr val="accent1"/>
-          </a:effectRef>
-          <a:fontRef idx="minor">
-            <a:schemeClr val="lt1"/>
-          </a:fontRef>
-        </p:style>
-        <p:txBody>
-          <a:bodyPr rtlCol="0" anchor="ctr"/>
-          <a:lstStyle/>
-          <a:p>
-            <a:pPr algn="ctr"/>
-          </a:p>
-        </p:txBody>
-      </p:sp>
-      <p:sp>
-        <p:nvSpPr>
-          <p:cNvPr id="9" name="TextBox 8"/>
-          <p:cNvSpPr txBox="1"/>
-          <p:nvPr/>
-        </p:nvSpPr>
-        <p:spPr>
-          <a:xfrm>
-            <a:off x="6400800" y="1417319"/>
-            <a:ext cx="4846320" cy="2011680"/>
-          </a:xfrm>
-          <a:prstGeom prst="rect">
-            <a:avLst/>
-          </a:prstGeom>
-          <a:noFill/>
-        </p:spPr>
-        <p:txBody>
-          <a:bodyPr wrap="square">
-            <a:spAutoFit/>
-          </a:bodyPr>
-          <a:lstStyle/>
-          <a:p>
-            <a:pPr>
-              <a:defRPr sz="1200" b="1">
-                <a:solidFill>
-                  <a:srgbClr val="1E3A8A"/>
-                </a:solidFill>
-              </a:defRPr>
-            </a:pPr>
-            <a:r>
-              <a:t>Team Member 2 - Classical CNN Baselines &amp; Loss Formulation</a:t>
-            </a:r>
-          </a:p>
-          <a:p>
-            <a:pPr>
-              <a:spcBef>
-                <a:spcPts val="300"/>
-              </a:spcBef>
-              <a:defRPr sz="1000">
-                <a:solidFill>
-                  <a:srgbClr val="0F172A"/>
-                </a:solidFill>
-              </a:defRPr>
-            </a:pPr>
-            <a:r>
-              <a:t>• Implemented and trained classical ResNet18 and MobileNetV2 baseline models.</a:t>
-            </a:r>
-          </a:p>
-          <a:p>
-            <a:pPr>
-              <a:spcBef>
-                <a:spcPts val="300"/>
-              </a:spcBef>
-              <a:defRPr sz="1000">
-                <a:solidFill>
-                  <a:srgbClr val="0F172A"/>
-                </a:solidFill>
-              </a:defRPr>
-            </a:pPr>
-            <a:r>
-              <a:t>• Engineered the class-weighted Focal Loss function (gamma=2.0) with dynamic inverse-frequency weighting.</a:t>
-            </a:r>
-          </a:p>
-          <a:p>
-            <a:pPr>
-              <a:spcBef>
-                <a:spcPts val="300"/>
-              </a:spcBef>
-              <a:defRPr sz="1000">
-                <a:solidFill>
-                  <a:srgbClr val="0F172A"/>
-                </a:solidFill>
-              </a:defRPr>
-            </a:pPr>
-            <a:r>
-              <a:t>• Created the automated feature extraction and disk caching pipeline in PyTorch.</a:t>
-            </a:r>
-          </a:p>
-          <a:p>
-            <a:pPr>
-              <a:spcBef>
-                <a:spcPts val="300"/>
-              </a:spcBef>
-              <a:defRPr sz="1000">
-                <a:solidFill>
-                  <a:srgbClr val="0F172A"/>
-                </a:solidFill>
-              </a:defRPr>
-            </a:pPr>
-            <a:r>
-              <a:t>• Compiled baseline evaluation checkpoints and latency metrics.</a:t>
-            </a:r>
-          </a:p>
-        </p:txBody>
-      </p:sp>
-      <p:sp>
-        <p:nvSpPr>
-          <p:cNvPr id="10" name="Rounded Rectangle 9"/>
-          <p:cNvSpPr/>
-          <p:nvPr/>
-        </p:nvSpPr>
-        <p:spPr>
-          <a:xfrm>
-            <a:off x="731520" y="3749039"/>
-            <a:ext cx="5212080" cy="2286000"/>
-          </a:xfrm>
-          <a:prstGeom prst="roundRect">
-            <a:avLst/>
-          </a:prstGeom>
-          <a:solidFill>
-            <a:srgbClr val="FFFFFF"/>
-          </a:solidFill>
-          <a:ln w="12700">
-            <a:solidFill>
-              <a:srgbClr val="E2E8F0"/>
-            </a:solidFill>
-          </a:ln>
-        </p:spPr>
-        <p:style>
-          <a:lnRef idx="1">
-            <a:schemeClr val="accent1"/>
-          </a:lnRef>
-          <a:fillRef idx="3">
-            <a:schemeClr val="accent1"/>
-          </a:fillRef>
-          <a:effectRef idx="2">
-            <a:schemeClr val="accent1"/>
-          </a:effectRef>
-          <a:fontRef idx="minor">
-            <a:schemeClr val="lt1"/>
-          </a:fontRef>
-        </p:style>
-        <p:txBody>
-          <a:bodyPr rtlCol="0" anchor="ctr"/>
-          <a:lstStyle/>
-          <a:p>
-            <a:pPr algn="ctr"/>
-          </a:p>
-        </p:txBody>
-      </p:sp>
-      <p:sp>
-        <p:nvSpPr>
-          <p:cNvPr id="11" name="TextBox 10"/>
-          <p:cNvSpPr txBox="1"/>
-          <p:nvPr/>
-        </p:nvSpPr>
-        <p:spPr>
-          <a:xfrm>
-            <a:off x="914400" y="3886200"/>
-            <a:ext cx="4846320" cy="2011680"/>
-          </a:xfrm>
-          <a:prstGeom prst="rect">
-            <a:avLst/>
-          </a:prstGeom>
-          <a:noFill/>
-        </p:spPr>
-        <p:txBody>
-          <a:bodyPr wrap="square">
-            <a:spAutoFit/>
-          </a:bodyPr>
-          <a:lstStyle/>
-          <a:p>
-            <a:pPr>
-              <a:defRPr sz="1200" b="1">
-                <a:solidFill>
-                  <a:srgbClr val="0D9488"/>
-                </a:solidFill>
-              </a:defRPr>
-            </a:pPr>
-            <a:r>
-              <a:t>Team Member 3 - Data Engineering &amp; Clinical Preprocessing</a:t>
-            </a:r>
-          </a:p>
-          <a:p>
-            <a:pPr>
-              <a:spcBef>
-                <a:spcPts val="300"/>
-              </a:spcBef>
-              <a:defRPr sz="1000">
-                <a:solidFill>
-                  <a:srgbClr val="0F172A"/>
-                </a:solidFill>
-              </a:defRPr>
-            </a:pPr>
-            <a:r>
-              <a:t>• Engineered the Ben Graham circular cropping and aspect-preserving resizing pipeline.</a:t>
-            </a:r>
-          </a:p>
-          <a:p>
-            <a:pPr>
-              <a:spcBef>
-                <a:spcPts val="300"/>
-              </a:spcBef>
-              <a:defRPr sz="1000">
-                <a:solidFill>
-                  <a:srgbClr val="0F172A"/>
-                </a:solidFill>
-              </a:defRPr>
-            </a:pPr>
-            <a:r>
-              <a:t>• Implemented green-channel isolation and Contrast Limited Adaptive Histogram Equalization (CLAHE).</a:t>
-            </a:r>
-          </a:p>
-          <a:p>
-            <a:pPr>
-              <a:spcBef>
-                <a:spcPts val="300"/>
-              </a:spcBef>
-              <a:defRPr sz="1000">
-                <a:solidFill>
-                  <a:srgbClr val="0F172A"/>
-                </a:solidFill>
-              </a:defRPr>
-            </a:pPr>
-            <a:r>
-              <a:t>• Generated fixed, reproducible stratified train/validation/test splits (70/15/15).</a:t>
-            </a:r>
-          </a:p>
-          <a:p>
-            <a:pPr>
-              <a:spcBef>
-                <a:spcPts val="300"/>
-              </a:spcBef>
-              <a:defRPr sz="1000">
-                <a:solidFill>
-                  <a:srgbClr val="0F172A"/>
-                </a:solidFill>
-              </a:defRPr>
-            </a:pPr>
-            <a:r>
-              <a:t>• Produced visual verification diagnostic panels across all five DR grades.</a:t>
-            </a:r>
-          </a:p>
-        </p:txBody>
-      </p:sp>
-      <p:sp>
-        <p:nvSpPr>
-          <p:cNvPr id="12" name="Rounded Rectangle 11"/>
-          <p:cNvSpPr/>
-          <p:nvPr/>
-        </p:nvSpPr>
-        <p:spPr>
-          <a:xfrm>
-            <a:off x="6217920" y="3749039"/>
-            <a:ext cx="5212080" cy="2286000"/>
-          </a:xfrm>
-          <a:prstGeom prst="roundRect">
-            <a:avLst/>
-          </a:prstGeom>
-          <a:solidFill>
-            <a:srgbClr val="FFFFFF"/>
-          </a:solidFill>
-          <a:ln w="12700">
-            <a:solidFill>
-              <a:srgbClr val="E2E8F0"/>
-            </a:solidFill>
-          </a:ln>
-        </p:spPr>
-        <p:style>
-          <a:lnRef idx="1">
-            <a:schemeClr val="accent1"/>
-          </a:lnRef>
-          <a:fillRef idx="3">
-            <a:schemeClr val="accent1"/>
-          </a:fillRef>
-          <a:effectRef idx="2">
-            <a:schemeClr val="accent1"/>
-          </a:effectRef>
-          <a:fontRef idx="minor">
-            <a:schemeClr val="lt1"/>
-          </a:fontRef>
-        </p:style>
-        <p:txBody>
-          <a:bodyPr rtlCol="0" anchor="ctr"/>
-          <a:lstStyle/>
-          <a:p>
-            <a:pPr algn="ctr"/>
-          </a:p>
-        </p:txBody>
-      </p:sp>
-      <p:sp>
-        <p:nvSpPr>
-          <p:cNvPr id="13" name="TextBox 12"/>
-          <p:cNvSpPr txBox="1"/>
-          <p:nvPr/>
-        </p:nvSpPr>
-        <p:spPr>
-          <a:xfrm>
-            <a:off x="6400800" y="3886200"/>
-            <a:ext cx="4846320" cy="2011680"/>
-          </a:xfrm>
-          <a:prstGeom prst="rect">
-            <a:avLst/>
-          </a:prstGeom>
-          <a:noFill/>
-        </p:spPr>
-        <p:txBody>
-          <a:bodyPr wrap="square">
-            <a:spAutoFit/>
-          </a:bodyPr>
-          <a:lstStyle/>
-          <a:p>
-            <a:pPr>
-              <a:defRPr sz="1200" b="1">
-                <a:solidFill>
-                  <a:srgbClr val="1E3A8A"/>
-                </a:solidFill>
-              </a:defRPr>
-            </a:pPr>
-            <a:r>
-              <a:t>Team Member 4 - Dimensionality Compression &amp; Phase 4 Lead</a:t>
-            </a:r>
-          </a:p>
-          <a:p>
-            <a:pPr>
-              <a:spcBef>
-                <a:spcPts val="300"/>
-              </a:spcBef>
-              <a:defRPr sz="1000">
-                <a:solidFill>
-                  <a:srgbClr val="0F172A"/>
-                </a:solidFill>
-              </a:defRPr>
-            </a:pPr>
-            <a:r>
-              <a:t>• Built and evaluated the 3 compression modules: Linear Bottleneck, Deep Autoencoder, and PCA.</a:t>
-            </a:r>
-          </a:p>
-          <a:p>
-            <a:pPr>
-              <a:spcBef>
-                <a:spcPts val="300"/>
-              </a:spcBef>
-              <a:defRPr sz="1000">
-                <a:solidFill>
-                  <a:srgbClr val="0F172A"/>
-                </a:solidFill>
-              </a:defRPr>
-            </a:pPr>
-            <a:r>
-              <a:t>• Trained the 3-layer Feature Autoencoder with MSE reconstruction loss.</a:t>
-            </a:r>
-          </a:p>
-          <a:p>
-            <a:pPr>
-              <a:spcBef>
-                <a:spcPts val="300"/>
-              </a:spcBef>
-              <a:defRPr sz="1000">
-                <a:solidFill>
-                  <a:srgbClr val="0F172A"/>
-                </a:solidFill>
-              </a:defRPr>
-            </a:pPr>
-            <a:r>
-              <a:t>• Leading Phase 4: Implementing Qiskit Aer depolarizing noise sweeps and IBM Quantum cloud execution.</a:t>
-            </a:r>
-          </a:p>
-          <a:p>
-            <a:pPr>
-              <a:spcBef>
-                <a:spcPts val="300"/>
-              </a:spcBef>
-              <a:defRPr sz="1000">
-                <a:solidFill>
-                  <a:srgbClr val="0F172A"/>
-                </a:solidFill>
-              </a:defRPr>
-            </a:pPr>
-            <a:r>
-              <a:t>• Developing the interactive Streamlit clinical dashboard for deployment.</a:t>
-            </a:r>
-          </a:p>
-        </p:txBody>
-      </p:sp>
-    </p:spTree>
-  </p:cSld>
-  <p:clrMapOvr>
-    <a:masterClrMapping/>
-  </p:clrMapOvr>
-</p:sld>
-</file>
-
-<file path=ppt/slides/slide13.xml><?xml version="1.0" encoding="utf-8"?>
-<p:sld xmlns:a="http://schemas.openxmlformats.org/drawingml/2006/main" xmlns:p="http://schemas.openxmlformats.org/presentationml/2006/main" xmlns:r="http://schemas.openxmlformats.org/officeDocument/2006/relationships">
-  <p:cSld>
-    <p:spTree>
-      <p:nvGrpSpPr>
-        <p:cNvPr id="1" name=""/>
-        <p:cNvGrpSpPr/>
-        <p:nvPr/>
-      </p:nvGrpSpPr>
-      <p:grpSpPr/>
-      <p:sp>
-        <p:nvSpPr>
-          <p:cNvPr id="2" name="Rectangle 1"/>
-          <p:cNvSpPr/>
-          <p:nvPr/>
-        </p:nvSpPr>
-        <p:spPr>
-          <a:xfrm>
-            <a:off x="0" y="0"/>
-            <a:ext cx="12191695" cy="1005840"/>
-          </a:xfrm>
-          <a:prstGeom prst="rect">
-            <a:avLst/>
-          </a:prstGeom>
-          <a:solidFill>
-            <a:srgbClr val="0F172A"/>
-          </a:solidFill>
-          <a:ln>
-            <a:solidFill>
-              <a:srgbClr val="0F172A"/>
-            </a:solidFill>
-          </a:ln>
-        </p:spPr>
-        <p:style>
-          <a:lnRef idx="1">
-            <a:schemeClr val="accent1"/>
-          </a:lnRef>
-          <a:fillRef idx="3">
-            <a:schemeClr val="accent1"/>
-          </a:fillRef>
-          <a:effectRef idx="2">
-            <a:schemeClr val="accent1"/>
-          </a:effectRef>
-          <a:fontRef idx="minor">
-            <a:schemeClr val="lt1"/>
-          </a:fontRef>
-        </p:style>
-        <p:txBody>
-          <a:bodyPr rtlCol="0" anchor="ctr"/>
-          <a:lstStyle/>
-          <a:p>
-            <a:pPr algn="ctr"/>
-          </a:p>
-        </p:txBody>
-      </p:sp>
-      <p:sp>
-        <p:nvSpPr>
-          <p:cNvPr id="3" name="TextBox 2"/>
-          <p:cNvSpPr txBox="1"/>
-          <p:nvPr/>
-        </p:nvSpPr>
-        <p:spPr>
-          <a:xfrm>
-            <a:off x="731520" y="109728"/>
-            <a:ext cx="10698480" cy="274320"/>
-          </a:xfrm>
-          <a:prstGeom prst="rect">
-            <a:avLst/>
-          </a:prstGeom>
-          <a:noFill/>
-        </p:spPr>
-        <p:txBody>
-          <a:bodyPr wrap="square">
-            <a:spAutoFit/>
-          </a:bodyPr>
-          <a:lstStyle/>
-          <a:p>
-            <a:pPr>
-              <a:defRPr sz="1100" b="1">
-                <a:solidFill>
-                  <a:srgbClr val="0D9488"/>
-                </a:solidFill>
-              </a:defRPr>
-            </a:pPr>
-            <a:r>
-              <a:t>EDI ASSESSMENT CONCLUSION &amp; TIMELINE</a:t>
-            </a:r>
-          </a:p>
-        </p:txBody>
-      </p:sp>
-      <p:sp>
-        <p:nvSpPr>
-          <p:cNvPr id="4" name="TextBox 3"/>
-          <p:cNvSpPr txBox="1"/>
-          <p:nvPr/>
-        </p:nvSpPr>
-        <p:spPr>
-          <a:xfrm>
-            <a:off x="731520" y="365760"/>
-            <a:ext cx="10698480" cy="502920"/>
-          </a:xfrm>
-          <a:prstGeom prst="rect">
-            <a:avLst/>
-          </a:prstGeom>
-          <a:noFill/>
-        </p:spPr>
-        <p:txBody>
-          <a:bodyPr wrap="square">
-            <a:spAutoFit/>
-          </a:bodyPr>
-          <a:lstStyle/>
-          <a:p>
-            <a:pPr>
-              <a:defRPr sz="2200" b="1">
+              <a:defRPr sz="1300">
                 <a:solidFill>
                   <a:srgbClr val="FFFFFF"/>
                 </a:solidFill>
               </a:defRPr>
             </a:pPr>
             <a:r>
-              <a:t>Phase 4 Execution Roadmap &amp; Mid-Semester Conclusion</a:t>
-            </a:r>
-          </a:p>
-        </p:txBody>
-      </p:sp>
-      <p:sp>
-        <p:nvSpPr>
-          <p:cNvPr id="5" name="TextBox 4"/>
-          <p:cNvSpPr txBox="1"/>
-          <p:nvPr/>
-        </p:nvSpPr>
-        <p:spPr>
-          <a:xfrm>
-            <a:off x="731520" y="6492240"/>
-            <a:ext cx="10698480" cy="274320"/>
-          </a:xfrm>
-          <a:prstGeom prst="rect">
-            <a:avLst/>
-          </a:prstGeom>
-          <a:noFill/>
-        </p:spPr>
-        <p:txBody>
-          <a:bodyPr wrap="none">
-            <a:spAutoFit/>
-          </a:bodyPr>
-          <a:lstStyle/>
-          <a:p>
-            <a:pPr>
-              <a:defRPr sz="900">
-                <a:solidFill>
-                  <a:srgbClr val="475569"/>
-                </a:solidFill>
-              </a:defRPr>
-            </a:pPr>
-            <a:r>
-              <a:t>EDI Mid-Semester Assessment | Project ID: ERI 5 / TY_CSE_10 | Hybrid Quantum-Classical CNN for Retinal Disease</a:t>
-            </a:r>
-          </a:p>
-        </p:txBody>
-      </p:sp>
-      <p:sp>
-        <p:nvSpPr>
-          <p:cNvPr id="6" name="Rounded Rectangle 5"/>
-          <p:cNvSpPr/>
-          <p:nvPr/>
-        </p:nvSpPr>
-        <p:spPr>
-          <a:xfrm>
-            <a:off x="731520" y="1280160"/>
-            <a:ext cx="10725912" cy="2377440"/>
-          </a:xfrm>
-          <a:prstGeom prst="roundRect">
-            <a:avLst/>
-          </a:prstGeom>
-          <a:solidFill>
-            <a:srgbClr val="FFFFFF"/>
-          </a:solidFill>
-          <a:ln w="12700">
-            <a:solidFill>
-              <a:srgbClr val="E2E8F0"/>
-            </a:solidFill>
-          </a:ln>
-        </p:spPr>
-        <p:style>
-          <a:lnRef idx="1">
-            <a:schemeClr val="accent1"/>
-          </a:lnRef>
-          <a:fillRef idx="3">
-            <a:schemeClr val="accent1"/>
-          </a:fillRef>
-          <a:effectRef idx="2">
-            <a:schemeClr val="accent1"/>
-          </a:effectRef>
-          <a:fontRef idx="minor">
-            <a:schemeClr val="lt1"/>
-          </a:fontRef>
-        </p:style>
-        <p:txBody>
-          <a:bodyPr rtlCol="0" anchor="ctr"/>
-          <a:lstStyle/>
-          <a:p>
-            <a:pPr algn="ctr"/>
-          </a:p>
-        </p:txBody>
-      </p:sp>
-      <p:sp>
-        <p:nvSpPr>
-          <p:cNvPr id="7" name="TextBox 6"/>
-          <p:cNvSpPr txBox="1"/>
-          <p:nvPr/>
-        </p:nvSpPr>
-        <p:spPr>
-          <a:xfrm>
-            <a:off x="914400" y="1371600"/>
-            <a:ext cx="10360152" cy="2194560"/>
-          </a:xfrm>
-          <a:prstGeom prst="rect">
-            <a:avLst/>
-          </a:prstGeom>
-          <a:noFill/>
-        </p:spPr>
-        <p:txBody>
-          <a:bodyPr wrap="square">
-            <a:spAutoFit/>
-          </a:bodyPr>
-          <a:lstStyle/>
-          <a:p>
-            <a:pPr>
-              <a:defRPr sz="1400" b="1">
-                <a:solidFill>
-                  <a:srgbClr val="1E3A8A"/>
-                </a:solidFill>
-              </a:defRPr>
-            </a:pPr>
-            <a:r>
-              <a:t>Phase 4 Execution Milestones (End-Semester Plan):</a:t>
+              <a:t>• GitHub Repository: https://github.com/hswaym/RFMid-Retinal-Classification</a:t>
             </a:r>
           </a:p>
           <a:p>
@@ -5496,14 +4701,14 @@
               <a:spcBef>
                 <a:spcPts val="400"/>
               </a:spcBef>
-              <a:defRPr sz="1100">
-                <a:solidFill>
-                  <a:srgbClr val="0F172A"/>
-                </a:solidFill>
-              </a:defRPr>
-            </a:pPr>
-            <a:r>
-              <a:t>Milestone 4.1 (Oct 1 – Oct 15): Simulated NISQ Noise Modeling — Implement Qiskit Aer depolarizing noise sweeps (p in {0.001, 0.01, 0.05, 0.10}) and thermal relaxation (T1, T2) to chart circuit degradation curves.</a:t>
+              <a:defRPr sz="1300">
+                <a:solidFill>
+                  <a:srgbClr val="E2E8F0"/>
+                </a:solidFill>
+              </a:defRPr>
+            </a:pPr>
+            <a:r>
+              <a:t>• Project Tracking ID: ERI 5 / TY_CSE_10  |  Academic Year: 2026–2027</a:t>
             </a:r>
           </a:p>
           <a:p>
@@ -5511,184 +4716,29 @@
               <a:spcBef>
                 <a:spcPts val="400"/>
               </a:spcBef>
-              <a:defRPr sz="1100">
-                <a:solidFill>
-                  <a:srgbClr val="0F172A"/>
-                </a:solidFill>
-              </a:defRPr>
-            </a:pPr>
-            <a:r>
-              <a:t>Milestone 4.2 (Oct 16 – Oct 31): IBM Quantum Hardware Execution — Transpile 4-qubit circuit onto ibm_brisbane using qiskit-ibm-runtime with Zero-Noise Extrapolation (ZNE) and M3 readout error mitigation.</a:t>
+              <a:defRPr sz="1300">
+                <a:solidFill>
+                  <a:srgbClr val="E2E8F0"/>
+                </a:solidFill>
+              </a:defRPr>
+            </a:pPr>
+            <a:r>
+              <a:t>• Verified Model Checkpoint: HQNN 4-Qubit Autoencoder (QWK: 0.7693, AUC-ROC: 0.8716)</a:t>
             </a:r>
           </a:p>
           <a:p>
             <a:pPr>
               <a:spcBef>
-                <a:spcPts val="400"/>
+                <a:spcPts val="800"/>
               </a:spcBef>
-              <a:defRPr sz="1100">
-                <a:solidFill>
-                  <a:srgbClr val="0F172A"/>
-                </a:solidFill>
-              </a:defRPr>
-            </a:pPr>
-            <a:r>
-              <a:t>Milestone 4.3 (Nov 1 – Nov 15): Clinical Streamlit Web App — Deploy dashboard/app.py with image upload, Ben Graham crop preview, quantum angle visualization, and instant severity triage.</a:t>
-            </a:r>
-          </a:p>
-          <a:p>
-            <a:pPr>
-              <a:spcBef>
-                <a:spcPts val="400"/>
-              </a:spcBef>
-              <a:defRPr sz="1100">
-                <a:solidFill>
-                  <a:srgbClr val="0F172A"/>
-                </a:solidFill>
-              </a:defRPr>
-            </a:pPr>
-            <a:r>
-              <a:t>Milestone 4.4 (Nov 16 – Nov 30): Final Thesis &amp; IEEE Paper — Final code freeze, publication manuscript compilation, and final project defense.</a:t>
-            </a:r>
-          </a:p>
-        </p:txBody>
-      </p:sp>
-      <p:sp>
-        <p:nvSpPr>
-          <p:cNvPr id="8" name="Rounded Rectangle 7"/>
-          <p:cNvSpPr/>
-          <p:nvPr/>
-        </p:nvSpPr>
-        <p:spPr>
-          <a:xfrm>
-            <a:off x="731520" y="3931920"/>
-            <a:ext cx="10725912" cy="2286000"/>
-          </a:xfrm>
-          <a:prstGeom prst="roundRect">
-            <a:avLst/>
-          </a:prstGeom>
-          <a:solidFill>
-            <a:srgbClr val="0F172A"/>
-          </a:solidFill>
-          <a:ln w="12700">
-            <a:solidFill>
-              <a:srgbClr val="0F172A"/>
-            </a:solidFill>
-          </a:ln>
-        </p:spPr>
-        <p:style>
-          <a:lnRef idx="1">
-            <a:schemeClr val="accent1"/>
-          </a:lnRef>
-          <a:fillRef idx="3">
-            <a:schemeClr val="accent1"/>
-          </a:fillRef>
-          <a:effectRef idx="2">
-            <a:schemeClr val="accent1"/>
-          </a:effectRef>
-          <a:fontRef idx="minor">
-            <a:schemeClr val="lt1"/>
-          </a:fontRef>
-        </p:style>
-        <p:txBody>
-          <a:bodyPr rtlCol="0" anchor="ctr"/>
-          <a:lstStyle/>
-          <a:p>
-            <a:pPr algn="ctr"/>
-          </a:p>
-        </p:txBody>
-      </p:sp>
-      <p:sp>
-        <p:nvSpPr>
-          <p:cNvPr id="9" name="TextBox 8"/>
-          <p:cNvSpPr txBox="1"/>
-          <p:nvPr/>
-        </p:nvSpPr>
-        <p:spPr>
-          <a:xfrm>
-            <a:off x="914400" y="4114800"/>
-            <a:ext cx="10360152" cy="1920240"/>
-          </a:xfrm>
-          <a:prstGeom prst="rect">
-            <a:avLst/>
-          </a:prstGeom>
-          <a:noFill/>
-        </p:spPr>
-        <p:txBody>
-          <a:bodyPr wrap="square">
-            <a:spAutoFit/>
-          </a:bodyPr>
-          <a:lstStyle/>
-          <a:p>
-            <a:pPr>
-              <a:defRPr sz="1500" b="1">
-                <a:solidFill>
-                  <a:srgbClr val="FFFFFF"/>
-                </a:solidFill>
-              </a:defRPr>
-            </a:pPr>
-            <a:r>
-              <a:t>Mid-Semester Assessment Summary &amp; Verdict:</a:t>
-            </a:r>
-          </a:p>
-          <a:p>
-            <a:pPr>
-              <a:spcBef>
-                <a:spcPts val="400"/>
-              </a:spcBef>
-              <a:defRPr sz="1150">
-                <a:solidFill>
-                  <a:srgbClr val="E2E8F0"/>
-                </a:solidFill>
-              </a:defRPr>
-            </a:pPr>
-            <a:r>
-              <a:t>✔ 100% Phase 1 to Phase 3 Completion: All preprocessing, classical baselines, quantum circuits, and hybrid models are implemented, trained, and verified on the full APTOS 2019 test set.</a:t>
-            </a:r>
-          </a:p>
-          <a:p>
-            <a:pPr>
-              <a:spcBef>
-                <a:spcPts val="400"/>
-              </a:spcBef>
-              <a:defRPr sz="1150">
-                <a:solidFill>
-                  <a:srgbClr val="E2E8F0"/>
-                </a:solidFill>
-              </a:defRPr>
-            </a:pPr>
-            <a:r>
-              <a:t>✔ Empirical Validation: The 4-Qubit Autoencoder hybrid achieved QWK 0.7693 and AUC-ROC 0.8716 using only 12 variational quantum parameters, proving extreme parameter efficiency.</a:t>
-            </a:r>
-          </a:p>
-          <a:p>
-            <a:pPr>
-              <a:spcBef>
-                <a:spcPts val="400"/>
-              </a:spcBef>
-              <a:defRPr sz="1150">
-                <a:solidFill>
-                  <a:srgbClr val="E2E8F0"/>
-                </a:solidFill>
-              </a:defRPr>
-            </a:pPr>
-            <a:r>
-              <a:t>✔ Full Academic Rigor: Solved GPU-CPU device mismatches, addressed severe class imbalance with Focal Loss, and eliminated research gaps identified in published literature.</a:t>
-            </a:r>
-          </a:p>
-          <a:p>
-            <a:pPr>
-              <a:spcBef>
-                <a:spcPts val="400"/>
-              </a:spcBef>
-              <a:defRPr sz="1150">
-                <a:solidFill>
-                  <a:srgbClr val="E2E8F0"/>
-                </a:solidFill>
-              </a:defRPr>
-            </a:pPr>
-            <a:r>
-              <a:t>✔ Repository &amp; Artifacts: All code, configs, weights, and documentation are committed and tracked at github.com/hswaym/RFMid-Retinal-Classification.</a:t>
+              <a:defRPr sz="1200" b="1">
+                <a:solidFill>
+                  <a:srgbClr val="0D9488"/>
+                </a:solidFill>
+              </a:defRPr>
+            </a:pPr>
+            <a:r>
+              <a:t>• We now invite questions and feedback from the review committee.</a:t>
             </a:r>
           </a:p>
         </p:txBody>
@@ -5773,82 +4823,82 @@
           <a:noFill/>
         </p:spPr>
         <p:txBody>
-          <a:bodyPr wrap="square">
-            <a:spAutoFit/>
-          </a:bodyPr>
-          <a:lstStyle/>
-          <a:p>
-            <a:pPr>
-              <a:defRPr sz="1100" b="1">
-                <a:solidFill>
-                  <a:srgbClr val="0D9488"/>
-                </a:solidFill>
-              </a:defRPr>
-            </a:pPr>
-            <a:r>
-              <a:t>EDI PARAMETER 1: PROBLEM DEFINITION, RELATED WORK, AND COMPLEXITY</a:t>
-            </a:r>
-          </a:p>
-        </p:txBody>
-      </p:sp>
-      <p:sp>
-        <p:nvSpPr>
-          <p:cNvPr id="4" name="TextBox 3"/>
-          <p:cNvSpPr txBox="1"/>
-          <p:nvPr/>
-        </p:nvSpPr>
-        <p:spPr>
-          <a:xfrm>
-            <a:off x="731520" y="365760"/>
-            <a:ext cx="10698480" cy="502920"/>
-          </a:xfrm>
-          <a:prstGeom prst="rect">
-            <a:avLst/>
-          </a:prstGeom>
-          <a:noFill/>
-        </p:spPr>
-        <p:txBody>
-          <a:bodyPr wrap="square">
-            <a:spAutoFit/>
-          </a:bodyPr>
-          <a:lstStyle/>
-          <a:p>
-            <a:pPr>
-              <a:defRPr sz="2200" b="1">
-                <a:solidFill>
-                  <a:srgbClr val="FFFFFF"/>
-                </a:solidFill>
-              </a:defRPr>
-            </a:pPr>
-            <a:r>
-              <a:t>Clinical Problem Definition &amp; Diagnostic Complexity</a:t>
-            </a:r>
-          </a:p>
-        </p:txBody>
-      </p:sp>
-      <p:sp>
-        <p:nvSpPr>
-          <p:cNvPr id="5" name="TextBox 4"/>
-          <p:cNvSpPr txBox="1"/>
-          <p:nvPr/>
-        </p:nvSpPr>
-        <p:spPr>
-          <a:xfrm>
-            <a:off x="731520" y="6492240"/>
-            <a:ext cx="10698480" cy="274320"/>
-          </a:xfrm>
-          <a:prstGeom prst="rect">
-            <a:avLst/>
-          </a:prstGeom>
-          <a:noFill/>
-        </p:spPr>
-        <p:txBody>
           <a:bodyPr wrap="none">
             <a:spAutoFit/>
           </a:bodyPr>
           <a:lstStyle/>
           <a:p>
             <a:pPr>
+              <a:defRPr sz="1100" b="1">
+                <a:solidFill>
+                  <a:srgbClr val="0D9488"/>
+                </a:solidFill>
+              </a:defRPr>
+            </a:pPr>
+            <a:r>
+              <a:t>PROJECT BACKGROUND</a:t>
+            </a:r>
+          </a:p>
+        </p:txBody>
+      </p:sp>
+      <p:sp>
+        <p:nvSpPr>
+          <p:cNvPr id="4" name="TextBox 3"/>
+          <p:cNvSpPr txBox="1"/>
+          <p:nvPr/>
+        </p:nvSpPr>
+        <p:spPr>
+          <a:xfrm>
+            <a:off x="731520" y="365760"/>
+            <a:ext cx="10698480" cy="502920"/>
+          </a:xfrm>
+          <a:prstGeom prst="rect">
+            <a:avLst/>
+          </a:prstGeom>
+          <a:noFill/>
+        </p:spPr>
+        <p:txBody>
+          <a:bodyPr wrap="none">
+            <a:spAutoFit/>
+          </a:bodyPr>
+          <a:lstStyle/>
+          <a:p>
+            <a:pPr>
+              <a:defRPr sz="2200" b="1">
+                <a:solidFill>
+                  <a:srgbClr val="FFFFFF"/>
+                </a:solidFill>
+              </a:defRPr>
+            </a:pPr>
+            <a:r>
+              <a:t>Introduction: Diabetic Retinopathy &amp; Clinical Screening</a:t>
+            </a:r>
+          </a:p>
+        </p:txBody>
+      </p:sp>
+      <p:sp>
+        <p:nvSpPr>
+          <p:cNvPr id="5" name="TextBox 4"/>
+          <p:cNvSpPr txBox="1"/>
+          <p:nvPr/>
+        </p:nvSpPr>
+        <p:spPr>
+          <a:xfrm>
+            <a:off x="731520" y="6492240"/>
+            <a:ext cx="10698480" cy="274320"/>
+          </a:xfrm>
+          <a:prstGeom prst="rect">
+            <a:avLst/>
+          </a:prstGeom>
+          <a:noFill/>
+        </p:spPr>
+        <p:txBody>
+          <a:bodyPr wrap="none">
+            <a:spAutoFit/>
+          </a:bodyPr>
+          <a:lstStyle/>
+          <a:p>
+            <a:pPr>
               <a:defRPr sz="900">
                 <a:solidFill>
                   <a:srgbClr val="475569"/>
@@ -5856,7 +4906,7 @@
               </a:defRPr>
             </a:pPr>
             <a:r>
-              <a:t>EDI Mid-Semester Assessment | Project ID: ERI 5 / TY_CSE_10 | Hybrid Quantum-Classical CNN for Retinal Disease</a:t>
+              <a:t>EDI Mid-Semester Assessment | Project ID: ERI 5 / TY_CSE_10 | HQNN for Retinal Disease Classification</a:t>
             </a:r>
           </a:p>
         </p:txBody>
@@ -5942,7 +4992,7 @@
           <a:p>
             <a:pPr>
               <a:spcBef>
-                <a:spcPts val="800"/>
+                <a:spcPts val="1000"/>
               </a:spcBef>
               <a:defRPr sz="1200">
                 <a:solidFill>
@@ -5951,13 +5001,13 @@
               </a:defRPr>
             </a:pPr>
             <a:r>
-              <a:t>• Diabetic Retinopathy (DR): Microvascular complication of diabetes and leading cause of preventable blindness worldwide.</a:t>
+              <a:t>• Diabetic Retinopathy (DR): Microvascular complication of diabetes and the leading cause of preventable blindness in working-age adults.</a:t>
             </a:r>
           </a:p>
           <a:p>
             <a:pPr>
               <a:spcBef>
-                <a:spcPts val="800"/>
+                <a:spcPts val="1000"/>
               </a:spcBef>
               <a:defRPr sz="1200">
                 <a:solidFill>
@@ -5966,13 +5016,13 @@
               </a:defRPr>
             </a:pPr>
             <a:r>
-              <a:t>• 5 Ordinal Severity Stages: Grade 0 (No DR), Grade 1 (Mild - Microaneurysms), Grade 2 (Moderate - Hemorrhages/Exudates), Grade 3 (Severe - Cotton wool spots), Grade 4 (Proliferative - Neovascularization).</a:t>
+              <a:t>• Pathophysiological Progression: Chronic hyperglycemia damages retinal capillary pericytes, causing microaneurysms, fluid leakage (hard exudates), capillary occlusion (cotton wool spots), and abnormal vessel proliferation.</a:t>
             </a:r>
           </a:p>
           <a:p>
             <a:pPr>
               <a:spcBef>
-                <a:spcPts val="800"/>
+                <a:spcPts val="1000"/>
               </a:spcBef>
               <a:defRPr sz="1200">
                 <a:solidFill>
@@ -5981,7 +5031,7 @@
               </a:defRPr>
             </a:pPr>
             <a:r>
-              <a:t>• Clinical Urgency: Early detection prevents 95% of severe vision loss, but manual screening is constrained by a global shortage of retina specialists.</a:t>
+              <a:t>• Clinical Urgency: Early detection and timely laser/anti-VEGF intervention prevents 95% of severe vision loss, but manual screening is constrained by a global shortage of retina specialists.</a:t>
             </a:r>
           </a:p>
         </p:txBody>
@@ -6061,7 +5111,7 @@
               </a:defRPr>
             </a:pPr>
             <a:r>
-              <a:t>2. Computational &amp; Algorithmic Complexity</a:t>
+              <a:t>2. The ICDR 5-Grade Staging System</a:t>
             </a:r>
           </a:p>
           <a:p>
@@ -6069,14 +5119,14 @@
               <a:spcBef>
                 <a:spcPts val="800"/>
               </a:spcBef>
-              <a:defRPr sz="1200">
+              <a:defRPr sz="1150">
                 <a:solidFill>
                   <a:srgbClr val="0F172A"/>
                 </a:solidFill>
               </a:defRPr>
             </a:pPr>
             <a:r>
-              <a:t>• Severe Real-World Class Imbalance: In APTOS 2019 (N=3,662), Grade 0 constitutes 49.3% while Grade 3 is only 5.3%. Standard Cross-Entropy collapses into predicting Grade 0.</a:t>
+              <a:t>• Grade 0 (No DR): Normal healthy retina; no vascular abnormalities (49.3% in APTOS).</a:t>
             </a:r>
           </a:p>
           <a:p>
@@ -6084,14 +5134,14 @@
               <a:spcBef>
                 <a:spcPts val="800"/>
               </a:spcBef>
-              <a:defRPr sz="1200">
+              <a:defRPr sz="1150">
                 <a:solidFill>
                   <a:srgbClr val="0F172A"/>
                 </a:solidFill>
               </a:defRPr>
             </a:pPr>
             <a:r>
-              <a:t>• Asymmetric Ordinal Distance Penalty: Confusing Grade 0 with Grade 1 is a minor follow-up error; confusing Grade 0 with Grade 4 causes irreversible blindness. Standard accuracy treats both equally.</a:t>
+              <a:t>• Grade 1 (Mild NPDR): Microaneurysms only; annual monitoring recommended (10.1% in APTOS).</a:t>
             </a:r>
           </a:p>
           <a:p>
@@ -6099,14 +5149,14 @@
               <a:spcBef>
                 <a:spcPts val="800"/>
               </a:spcBef>
-              <a:defRPr sz="1200">
+              <a:defRPr sz="1150">
                 <a:solidFill>
                   <a:srgbClr val="0F172A"/>
                 </a:solidFill>
               </a:defRPr>
             </a:pPr>
             <a:r>
-              <a:t>• Classical Overparameterization: Modern CNNs require 11M to 25M parameters, consuming massive compute and overfitting on small, rare medical datasets.</a:t>
+              <a:t>• Grade 2 (Moderate NPDR): More than microaneurysms; dot-blot hemorrhages, hard exudates, cotton wool spots (27.3% in APTOS).</a:t>
             </a:r>
           </a:p>
           <a:p>
@@ -6114,14 +5164,29 @@
               <a:spcBef>
                 <a:spcPts val="800"/>
               </a:spcBef>
-              <a:defRPr sz="1200">
+              <a:defRPr sz="1150">
                 <a:solidFill>
                   <a:srgbClr val="0F172A"/>
                 </a:solidFill>
               </a:defRPr>
             </a:pPr>
             <a:r>
-              <a:t>• Quantum Hypothesis: Parameterized Quantum Circuits (PQCs) can explore exponential Hilbert spaces with &gt;99% fewer parameters, regularizing the decision boundary.</a:t>
+              <a:t>• Grade 3 (Severe NPDR): Meets the '4-2-1 Rule': severe hemorrhages in 4 quadrants or venous beading in 2+ quadrants (5.3% in APTOS).</a:t>
+            </a:r>
+          </a:p>
+          <a:p>
+            <a:pPr>
+              <a:spcBef>
+                <a:spcPts val="800"/>
+              </a:spcBef>
+              <a:defRPr sz="1150">
+                <a:solidFill>
+                  <a:srgbClr val="0F172A"/>
+                </a:solidFill>
+              </a:defRPr>
+            </a:pPr>
+            <a:r>
+              <a:t>• Grade 4 (Proliferative DR): Neovascularization and vitreous hemorrhage; high risk of imminent blindness (8.1% in APTOS).</a:t>
             </a:r>
           </a:p>
         </p:txBody>
@@ -6206,34 +5271,244 @@
           <a:noFill/>
         </p:spPr>
         <p:txBody>
+          <a:bodyPr wrap="none">
+            <a:spAutoFit/>
+          </a:bodyPr>
+          <a:lstStyle/>
+          <a:p>
+            <a:pPr>
+              <a:defRPr sz="1100" b="1">
+                <a:solidFill>
+                  <a:srgbClr val="0D9488"/>
+                </a:solidFill>
+              </a:defRPr>
+            </a:pPr>
+            <a:r>
+              <a:t>CORE PROBLEM DEFINITION</a:t>
+            </a:r>
+          </a:p>
+        </p:txBody>
+      </p:sp>
+      <p:sp>
+        <p:nvSpPr>
+          <p:cNvPr id="4" name="TextBox 3"/>
+          <p:cNvSpPr txBox="1"/>
+          <p:nvPr/>
+        </p:nvSpPr>
+        <p:spPr>
+          <a:xfrm>
+            <a:off x="731520" y="365760"/>
+            <a:ext cx="10698480" cy="502920"/>
+          </a:xfrm>
+          <a:prstGeom prst="rect">
+            <a:avLst/>
+          </a:prstGeom>
+          <a:noFill/>
+        </p:spPr>
+        <p:txBody>
+          <a:bodyPr wrap="none">
+            <a:spAutoFit/>
+          </a:bodyPr>
+          <a:lstStyle/>
+          <a:p>
+            <a:pPr>
+              <a:defRPr sz="2200" b="1">
+                <a:solidFill>
+                  <a:srgbClr val="FFFFFF"/>
+                </a:solidFill>
+              </a:defRPr>
+            </a:pPr>
+            <a:r>
+              <a:t>Problem Statement: Clinical &amp; Computational Challenges</a:t>
+            </a:r>
+          </a:p>
+        </p:txBody>
+      </p:sp>
+      <p:sp>
+        <p:nvSpPr>
+          <p:cNvPr id="5" name="TextBox 4"/>
+          <p:cNvSpPr txBox="1"/>
+          <p:nvPr/>
+        </p:nvSpPr>
+        <p:spPr>
+          <a:xfrm>
+            <a:off x="731520" y="6492240"/>
+            <a:ext cx="10698480" cy="274320"/>
+          </a:xfrm>
+          <a:prstGeom prst="rect">
+            <a:avLst/>
+          </a:prstGeom>
+          <a:noFill/>
+        </p:spPr>
+        <p:txBody>
+          <a:bodyPr wrap="none">
+            <a:spAutoFit/>
+          </a:bodyPr>
+          <a:lstStyle/>
+          <a:p>
+            <a:pPr>
+              <a:defRPr sz="900">
+                <a:solidFill>
+                  <a:srgbClr val="475569"/>
+                </a:solidFill>
+              </a:defRPr>
+            </a:pPr>
+            <a:r>
+              <a:t>EDI Mid-Semester Assessment | Project ID: ERI 5 / TY_CSE_10 | HQNN for Retinal Disease Classification</a:t>
+            </a:r>
+          </a:p>
+        </p:txBody>
+      </p:sp>
+      <p:sp>
+        <p:nvSpPr>
+          <p:cNvPr id="6" name="Rounded Rectangle 5"/>
+          <p:cNvSpPr/>
+          <p:nvPr/>
+        </p:nvSpPr>
+        <p:spPr>
+          <a:xfrm>
+            <a:off x="731520" y="1280160"/>
+            <a:ext cx="5212080" cy="2286000"/>
+          </a:xfrm>
+          <a:prstGeom prst="roundRect">
+            <a:avLst/>
+          </a:prstGeom>
+          <a:solidFill>
+            <a:srgbClr val="FFFFFF"/>
+          </a:solidFill>
+          <a:ln w="12700">
+            <a:solidFill>
+              <a:srgbClr val="E2E8F0"/>
+            </a:solidFill>
+          </a:ln>
+        </p:spPr>
+        <p:style>
+          <a:lnRef idx="1">
+            <a:schemeClr val="accent1"/>
+          </a:lnRef>
+          <a:fillRef idx="3">
+            <a:schemeClr val="accent1"/>
+          </a:fillRef>
+          <a:effectRef idx="2">
+            <a:schemeClr val="accent1"/>
+          </a:effectRef>
+          <a:fontRef idx="minor">
+            <a:schemeClr val="lt1"/>
+          </a:fontRef>
+        </p:style>
+        <p:txBody>
+          <a:bodyPr rtlCol="0" anchor="ctr"/>
+          <a:lstStyle/>
+          <a:p>
+            <a:pPr algn="ctr"/>
+          </a:p>
+        </p:txBody>
+      </p:sp>
+      <p:sp>
+        <p:nvSpPr>
+          <p:cNvPr id="7" name="TextBox 6"/>
+          <p:cNvSpPr txBox="1"/>
+          <p:nvPr/>
+        </p:nvSpPr>
+        <p:spPr>
+          <a:xfrm>
+            <a:off x="914400" y="1417319"/>
+            <a:ext cx="4846320" cy="2011680"/>
+          </a:xfrm>
+          <a:prstGeom prst="rect">
+            <a:avLst/>
+          </a:prstGeom>
+          <a:noFill/>
+        </p:spPr>
+        <p:txBody>
           <a:bodyPr wrap="square">
             <a:spAutoFit/>
           </a:bodyPr>
           <a:lstStyle/>
           <a:p>
             <a:pPr>
-              <a:defRPr sz="1100" b="1">
-                <a:solidFill>
-                  <a:srgbClr val="0D9488"/>
-                </a:solidFill>
-              </a:defRPr>
-            </a:pPr>
-            <a:r>
-              <a:t>EDI PARAMETER 1 &amp; 2: LITERATURE REVIEW AND COMPLEXITY</a:t>
-            </a:r>
-          </a:p>
-        </p:txBody>
-      </p:sp>
-      <p:sp>
-        <p:nvSpPr>
-          <p:cNvPr id="4" name="TextBox 3"/>
+              <a:defRPr sz="1300" b="1">
+                <a:solidFill>
+                  <a:srgbClr val="1E3A8A"/>
+                </a:solidFill>
+              </a:defRPr>
+            </a:pPr>
+            <a:r>
+              <a:t>1. Severe Real-World Class Imbalance</a:t>
+            </a:r>
+          </a:p>
+          <a:p>
+            <a:pPr>
+              <a:spcBef>
+                <a:spcPts val="600"/>
+              </a:spcBef>
+              <a:defRPr sz="1100">
+                <a:solidFill>
+                  <a:srgbClr val="0F172A"/>
+                </a:solidFill>
+              </a:defRPr>
+            </a:pPr>
+            <a:r>
+              <a:t>In the benchmark APTOS 2019 dataset (3,662 images), Grade 0 constitutes 49.3% while Grade 3 represents only 5.3%. Standard cross-entropy optimization collapses by predicting only the majority class, missing severe sight-threatening lesions.</a:t>
+            </a:r>
+          </a:p>
+        </p:txBody>
+      </p:sp>
+      <p:sp>
+        <p:nvSpPr>
+          <p:cNvPr id="8" name="Rounded Rectangle 7"/>
+          <p:cNvSpPr/>
+          <p:nvPr/>
+        </p:nvSpPr>
+        <p:spPr>
+          <a:xfrm>
+            <a:off x="6217920" y="1280160"/>
+            <a:ext cx="5212080" cy="2286000"/>
+          </a:xfrm>
+          <a:prstGeom prst="roundRect">
+            <a:avLst/>
+          </a:prstGeom>
+          <a:solidFill>
+            <a:srgbClr val="FFFFFF"/>
+          </a:solidFill>
+          <a:ln w="12700">
+            <a:solidFill>
+              <a:srgbClr val="E2E8F0"/>
+            </a:solidFill>
+          </a:ln>
+        </p:spPr>
+        <p:style>
+          <a:lnRef idx="1">
+            <a:schemeClr val="accent1"/>
+          </a:lnRef>
+          <a:fillRef idx="3">
+            <a:schemeClr val="accent1"/>
+          </a:fillRef>
+          <a:effectRef idx="2">
+            <a:schemeClr val="accent1"/>
+          </a:effectRef>
+          <a:fontRef idx="minor">
+            <a:schemeClr val="lt1"/>
+          </a:fontRef>
+        </p:style>
+        <p:txBody>
+          <a:bodyPr rtlCol="0" anchor="ctr"/>
+          <a:lstStyle/>
+          <a:p>
+            <a:pPr algn="ctr"/>
+          </a:p>
+        </p:txBody>
+      </p:sp>
+      <p:sp>
+        <p:nvSpPr>
+          <p:cNvPr id="9" name="TextBox 8"/>
           <p:cNvSpPr txBox="1"/>
           <p:nvPr/>
         </p:nvSpPr>
         <p:spPr>
           <a:xfrm>
-            <a:off x="731520" y="365760"/>
-            <a:ext cx="10698480" cy="502920"/>
+            <a:off x="6400800" y="1417319"/>
+            <a:ext cx="4846320" cy="2011680"/>
           </a:xfrm>
           <a:prstGeom prst="rect">
             <a:avLst/>
@@ -6247,27 +5522,295 @@
           <a:lstStyle/>
           <a:p>
             <a:pPr>
-              <a:defRPr sz="2200" b="1">
-                <a:solidFill>
-                  <a:srgbClr val="FFFFFF"/>
-                </a:solidFill>
-              </a:defRPr>
-            </a:pPr>
-            <a:r>
-              <a:t>Literature Review: Related Work &amp; Identified Research Gaps</a:t>
-            </a:r>
-          </a:p>
-        </p:txBody>
-      </p:sp>
-      <p:sp>
-        <p:nvSpPr>
-          <p:cNvPr id="5" name="TextBox 4"/>
+              <a:defRPr sz="1300" b="1">
+                <a:solidFill>
+                  <a:srgbClr val="1E3A8A"/>
+                </a:solidFill>
+              </a:defRPr>
+            </a:pPr>
+            <a:r>
+              <a:t>2. Asymmetric Ordinal Distance Penalties</a:t>
+            </a:r>
+          </a:p>
+          <a:p>
+            <a:pPr>
+              <a:spcBef>
+                <a:spcPts val="600"/>
+              </a:spcBef>
+              <a:defRPr sz="1100">
+                <a:solidFill>
+                  <a:srgbClr val="0F172A"/>
+                </a:solidFill>
+              </a:defRPr>
+            </a:pPr>
+            <a:r>
+              <a:t>DR severity is an ordinal clinical continuum. Misclassifying Grade 0 as Grade 1 is a harmless follow-up delay; misclassifying Grade 0 as Grade 4 causes irreversible blindness. Standard multi-class accuracy treats all classification mistakes equally.</a:t>
+            </a:r>
+          </a:p>
+        </p:txBody>
+      </p:sp>
+      <p:sp>
+        <p:nvSpPr>
+          <p:cNvPr id="10" name="Rounded Rectangle 9"/>
+          <p:cNvSpPr/>
+          <p:nvPr/>
+        </p:nvSpPr>
+        <p:spPr>
+          <a:xfrm>
+            <a:off x="731520" y="3749039"/>
+            <a:ext cx="5212080" cy="2286000"/>
+          </a:xfrm>
+          <a:prstGeom prst="roundRect">
+            <a:avLst/>
+          </a:prstGeom>
+          <a:solidFill>
+            <a:srgbClr val="FFFFFF"/>
+          </a:solidFill>
+          <a:ln w="12700">
+            <a:solidFill>
+              <a:srgbClr val="E2E8F0"/>
+            </a:solidFill>
+          </a:ln>
+        </p:spPr>
+        <p:style>
+          <a:lnRef idx="1">
+            <a:schemeClr val="accent1"/>
+          </a:lnRef>
+          <a:fillRef idx="3">
+            <a:schemeClr val="accent1"/>
+          </a:fillRef>
+          <a:effectRef idx="2">
+            <a:schemeClr val="accent1"/>
+          </a:effectRef>
+          <a:fontRef idx="minor">
+            <a:schemeClr val="lt1"/>
+          </a:fontRef>
+        </p:style>
+        <p:txBody>
+          <a:bodyPr rtlCol="0" anchor="ctr"/>
+          <a:lstStyle/>
+          <a:p>
+            <a:pPr algn="ctr"/>
+          </a:p>
+        </p:txBody>
+      </p:sp>
+      <p:sp>
+        <p:nvSpPr>
+          <p:cNvPr id="11" name="TextBox 10"/>
           <p:cNvSpPr txBox="1"/>
           <p:nvPr/>
         </p:nvSpPr>
         <p:spPr>
           <a:xfrm>
-            <a:off x="731520" y="6492240"/>
+            <a:off x="914400" y="3886200"/>
+            <a:ext cx="4846320" cy="2011680"/>
+          </a:xfrm>
+          <a:prstGeom prst="rect">
+            <a:avLst/>
+          </a:prstGeom>
+          <a:noFill/>
+        </p:spPr>
+        <p:txBody>
+          <a:bodyPr wrap="square">
+            <a:spAutoFit/>
+          </a:bodyPr>
+          <a:lstStyle/>
+          <a:p>
+            <a:pPr>
+              <a:defRPr sz="1300" b="1">
+                <a:solidFill>
+                  <a:srgbClr val="1E3A8A"/>
+                </a:solidFill>
+              </a:defRPr>
+            </a:pPr>
+            <a:r>
+              <a:t>3. Classical Overparameterization &amp; Compute</a:t>
+            </a:r>
+          </a:p>
+          <a:p>
+            <a:pPr>
+              <a:spcBef>
+                <a:spcPts val="600"/>
+              </a:spcBef>
+              <a:defRPr sz="1100">
+                <a:solidFill>
+                  <a:srgbClr val="0F172A"/>
+                </a:solidFill>
+              </a:defRPr>
+            </a:pPr>
+            <a:r>
+              <a:t>Deep CNNs (ResNet-50: 25.6M params, ResNet18: 11.2M params) require massive computational resources and risk severe overfitting on rare minority disease grades in medical datasets.</a:t>
+            </a:r>
+          </a:p>
+        </p:txBody>
+      </p:sp>
+      <p:sp>
+        <p:nvSpPr>
+          <p:cNvPr id="12" name="Rounded Rectangle 11"/>
+          <p:cNvSpPr/>
+          <p:nvPr/>
+        </p:nvSpPr>
+        <p:spPr>
+          <a:xfrm>
+            <a:off x="6217920" y="3749039"/>
+            <a:ext cx="5212080" cy="2286000"/>
+          </a:xfrm>
+          <a:prstGeom prst="roundRect">
+            <a:avLst/>
+          </a:prstGeom>
+          <a:solidFill>
+            <a:srgbClr val="FFFFFF"/>
+          </a:solidFill>
+          <a:ln w="12700">
+            <a:solidFill>
+              <a:srgbClr val="E2E8F0"/>
+            </a:solidFill>
+          </a:ln>
+        </p:spPr>
+        <p:style>
+          <a:lnRef idx="1">
+            <a:schemeClr val="accent1"/>
+          </a:lnRef>
+          <a:fillRef idx="3">
+            <a:schemeClr val="accent1"/>
+          </a:fillRef>
+          <a:effectRef idx="2">
+            <a:schemeClr val="accent1"/>
+          </a:effectRef>
+          <a:fontRef idx="minor">
+            <a:schemeClr val="lt1"/>
+          </a:fontRef>
+        </p:style>
+        <p:txBody>
+          <a:bodyPr rtlCol="0" anchor="ctr"/>
+          <a:lstStyle/>
+          <a:p>
+            <a:pPr algn="ctr"/>
+          </a:p>
+        </p:txBody>
+      </p:sp>
+      <p:sp>
+        <p:nvSpPr>
+          <p:cNvPr id="13" name="TextBox 12"/>
+          <p:cNvSpPr txBox="1"/>
+          <p:nvPr/>
+        </p:nvSpPr>
+        <p:spPr>
+          <a:xfrm>
+            <a:off x="6400800" y="3886200"/>
+            <a:ext cx="4846320" cy="2011680"/>
+          </a:xfrm>
+          <a:prstGeom prst="rect">
+            <a:avLst/>
+          </a:prstGeom>
+          <a:noFill/>
+        </p:spPr>
+        <p:txBody>
+          <a:bodyPr wrap="square">
+            <a:spAutoFit/>
+          </a:bodyPr>
+          <a:lstStyle/>
+          <a:p>
+            <a:pPr>
+              <a:defRPr sz="1300" b="1">
+                <a:solidFill>
+                  <a:srgbClr val="0D9488"/>
+                </a:solidFill>
+              </a:defRPr>
+            </a:pPr>
+            <a:r>
+              <a:t>4. The Quantum Opportunity</a:t>
+            </a:r>
+          </a:p>
+          <a:p>
+            <a:pPr>
+              <a:spcBef>
+                <a:spcPts val="600"/>
+              </a:spcBef>
+              <a:defRPr sz="1100">
+                <a:solidFill>
+                  <a:srgbClr val="0F172A"/>
+                </a:solidFill>
+              </a:defRPr>
+            </a:pPr>
+            <a:r>
+              <a:t>Can shallow Parameterized Quantum Circuits (PQCs) operating in exponential Hilbert space formulate effective decision boundaries with &gt;99% fewer parameters, achieving high clinical agreement (QWK)?</a:t>
+            </a:r>
+          </a:p>
+        </p:txBody>
+      </p:sp>
+    </p:spTree>
+  </p:cSld>
+  <p:clrMapOvr>
+    <a:masterClrMapping/>
+  </p:clrMapOvr>
+</p:sld>
+</file>
+
+<file path=ppt/slides/slide4.xml><?xml version="1.0" encoding="utf-8"?>
+<p:sld xmlns:a="http://schemas.openxmlformats.org/drawingml/2006/main" xmlns:p="http://schemas.openxmlformats.org/presentationml/2006/main" xmlns:r="http://schemas.openxmlformats.org/officeDocument/2006/relationships">
+  <p:cSld>
+    <p:spTree>
+      <p:nvGrpSpPr>
+        <p:cNvPr id="1" name=""/>
+        <p:cNvGrpSpPr/>
+        <p:nvPr/>
+      </p:nvGrpSpPr>
+      <p:grpSpPr/>
+      <p:sp>
+        <p:nvSpPr>
+          <p:cNvPr id="2" name="Rectangle 1"/>
+          <p:cNvSpPr/>
+          <p:nvPr/>
+        </p:nvSpPr>
+        <p:spPr>
+          <a:xfrm>
+            <a:off x="0" y="0"/>
+            <a:ext cx="12191695" cy="1005840"/>
+          </a:xfrm>
+          <a:prstGeom prst="rect">
+            <a:avLst/>
+          </a:prstGeom>
+          <a:solidFill>
+            <a:srgbClr val="0F172A"/>
+          </a:solidFill>
+          <a:ln>
+            <a:solidFill>
+              <a:srgbClr val="0F172A"/>
+            </a:solidFill>
+          </a:ln>
+        </p:spPr>
+        <p:style>
+          <a:lnRef idx="1">
+            <a:schemeClr val="accent1"/>
+          </a:lnRef>
+          <a:fillRef idx="3">
+            <a:schemeClr val="accent1"/>
+          </a:fillRef>
+          <a:effectRef idx="2">
+            <a:schemeClr val="accent1"/>
+          </a:effectRef>
+          <a:fontRef idx="minor">
+            <a:schemeClr val="lt1"/>
+          </a:fontRef>
+        </p:style>
+        <p:txBody>
+          <a:bodyPr rtlCol="0" anchor="ctr"/>
+          <a:lstStyle/>
+          <a:p>
+            <a:pPr algn="ctr"/>
+          </a:p>
+        </p:txBody>
+      </p:sp>
+      <p:sp>
+        <p:nvSpPr>
+          <p:cNvPr id="3" name="TextBox 2"/>
+          <p:cNvSpPr txBox="1"/>
+          <p:nvPr/>
+        </p:nvSpPr>
+        <p:spPr>
+          <a:xfrm>
+            <a:off x="731520" y="109728"/>
             <a:ext cx="10698480" cy="274320"/>
           </a:xfrm>
           <a:prstGeom prst="rect">
@@ -6282,6 +5825,76 @@
           <a:lstStyle/>
           <a:p>
             <a:pPr>
+              <a:defRPr sz="1100" b="1">
+                <a:solidFill>
+                  <a:srgbClr val="0D9488"/>
+                </a:solidFill>
+              </a:defRPr>
+            </a:pPr>
+            <a:r>
+              <a:t>PROJECT OBJECTIVES</a:t>
+            </a:r>
+          </a:p>
+        </p:txBody>
+      </p:sp>
+      <p:sp>
+        <p:nvSpPr>
+          <p:cNvPr id="4" name="TextBox 3"/>
+          <p:cNvSpPr txBox="1"/>
+          <p:nvPr/>
+        </p:nvSpPr>
+        <p:spPr>
+          <a:xfrm>
+            <a:off x="731520" y="365760"/>
+            <a:ext cx="10698480" cy="502920"/>
+          </a:xfrm>
+          <a:prstGeom prst="rect">
+            <a:avLst/>
+          </a:prstGeom>
+          <a:noFill/>
+        </p:spPr>
+        <p:txBody>
+          <a:bodyPr wrap="none">
+            <a:spAutoFit/>
+          </a:bodyPr>
+          <a:lstStyle/>
+          <a:p>
+            <a:pPr>
+              <a:defRPr sz="2200" b="1">
+                <a:solidFill>
+                  <a:srgbClr val="FFFFFF"/>
+                </a:solidFill>
+              </a:defRPr>
+            </a:pPr>
+            <a:r>
+              <a:t>Objectives: Project Goals &amp; Scope</a:t>
+            </a:r>
+          </a:p>
+        </p:txBody>
+      </p:sp>
+      <p:sp>
+        <p:nvSpPr>
+          <p:cNvPr id="5" name="TextBox 4"/>
+          <p:cNvSpPr txBox="1"/>
+          <p:nvPr/>
+        </p:nvSpPr>
+        <p:spPr>
+          <a:xfrm>
+            <a:off x="731520" y="6492240"/>
+            <a:ext cx="10698480" cy="274320"/>
+          </a:xfrm>
+          <a:prstGeom prst="rect">
+            <a:avLst/>
+          </a:prstGeom>
+          <a:noFill/>
+        </p:spPr>
+        <p:txBody>
+          <a:bodyPr wrap="none">
+            <a:spAutoFit/>
+          </a:bodyPr>
+          <a:lstStyle/>
+          <a:p>
+            <a:pPr>
               <a:defRPr sz="900">
                 <a:solidFill>
                   <a:srgbClr val="475569"/>
@@ -6289,7 +5902,745 @@
               </a:defRPr>
             </a:pPr>
             <a:r>
-              <a:t>EDI Mid-Semester Assessment | Project ID: ERI 5 / TY_CSE_10 | Hybrid Quantum-Classical CNN for Retinal Disease</a:t>
+              <a:t>EDI Mid-Semester Assessment | Project ID: ERI 5 / TY_CSE_10 | HQNN for Retinal Disease Classification</a:t>
+            </a:r>
+          </a:p>
+        </p:txBody>
+      </p:sp>
+      <p:sp>
+        <p:nvSpPr>
+          <p:cNvPr id="6" name="Rounded Rectangle 5"/>
+          <p:cNvSpPr/>
+          <p:nvPr/>
+        </p:nvSpPr>
+        <p:spPr>
+          <a:xfrm>
+            <a:off x="731520" y="1280160"/>
+            <a:ext cx="5212080" cy="1463040"/>
+          </a:xfrm>
+          <a:prstGeom prst="roundRect">
+            <a:avLst/>
+          </a:prstGeom>
+          <a:solidFill>
+            <a:srgbClr val="FFFFFF"/>
+          </a:solidFill>
+          <a:ln w="12700">
+            <a:solidFill>
+              <a:srgbClr val="E2E8F0"/>
+            </a:solidFill>
+          </a:ln>
+        </p:spPr>
+        <p:style>
+          <a:lnRef idx="1">
+            <a:schemeClr val="accent1"/>
+          </a:lnRef>
+          <a:fillRef idx="3">
+            <a:schemeClr val="accent1"/>
+          </a:fillRef>
+          <a:effectRef idx="2">
+            <a:schemeClr val="accent1"/>
+          </a:effectRef>
+          <a:fontRef idx="minor">
+            <a:schemeClr val="lt1"/>
+          </a:fontRef>
+        </p:style>
+        <p:txBody>
+          <a:bodyPr rtlCol="0" anchor="ctr"/>
+          <a:lstStyle/>
+          <a:p>
+            <a:pPr algn="ctr"/>
+          </a:p>
+        </p:txBody>
+      </p:sp>
+      <p:sp>
+        <p:nvSpPr>
+          <p:cNvPr id="7" name="TextBox 6"/>
+          <p:cNvSpPr txBox="1"/>
+          <p:nvPr/>
+        </p:nvSpPr>
+        <p:spPr>
+          <a:xfrm>
+            <a:off x="914400" y="1417319"/>
+            <a:ext cx="4846320" cy="1188720"/>
+          </a:xfrm>
+          <a:prstGeom prst="rect">
+            <a:avLst/>
+          </a:prstGeom>
+          <a:noFill/>
+        </p:spPr>
+        <p:txBody>
+          <a:bodyPr wrap="square">
+            <a:spAutoFit/>
+          </a:bodyPr>
+          <a:lstStyle/>
+          <a:p>
+            <a:pPr>
+              <a:defRPr sz="1300" b="1">
+                <a:solidFill>
+                  <a:srgbClr val="0D9488"/>
+                </a:solidFill>
+              </a:defRPr>
+            </a:pPr>
+            <a:r>
+              <a:t>Objective 1: Clinical Preprocessing Engine</a:t>
+            </a:r>
+          </a:p>
+          <a:p>
+            <a:pPr>
+              <a:spcBef>
+                <a:spcPts val="400"/>
+              </a:spcBef>
+              <a:defRPr sz="1100">
+                <a:solidFill>
+                  <a:srgbClr val="0F172A"/>
+                </a:solidFill>
+              </a:defRPr>
+            </a:pPr>
+            <a:r>
+              <a:t>Implement automated, standardized fundus preprocessing via Ben Graham circular masking and green-channel CLAHE at 224x224 to enhance lesion contrast.</a:t>
+            </a:r>
+          </a:p>
+        </p:txBody>
+      </p:sp>
+      <p:sp>
+        <p:nvSpPr>
+          <p:cNvPr id="8" name="Rounded Rectangle 7"/>
+          <p:cNvSpPr/>
+          <p:nvPr/>
+        </p:nvSpPr>
+        <p:spPr>
+          <a:xfrm>
+            <a:off x="6217920" y="1280160"/>
+            <a:ext cx="5212080" cy="1463040"/>
+          </a:xfrm>
+          <a:prstGeom prst="roundRect">
+            <a:avLst/>
+          </a:prstGeom>
+          <a:solidFill>
+            <a:srgbClr val="FFFFFF"/>
+          </a:solidFill>
+          <a:ln w="12700">
+            <a:solidFill>
+              <a:srgbClr val="E2E8F0"/>
+            </a:solidFill>
+          </a:ln>
+        </p:spPr>
+        <p:style>
+          <a:lnRef idx="1">
+            <a:schemeClr val="accent1"/>
+          </a:lnRef>
+          <a:fillRef idx="3">
+            <a:schemeClr val="accent1"/>
+          </a:fillRef>
+          <a:effectRef idx="2">
+            <a:schemeClr val="accent1"/>
+          </a:effectRef>
+          <a:fontRef idx="minor">
+            <a:schemeClr val="lt1"/>
+          </a:fontRef>
+        </p:style>
+        <p:txBody>
+          <a:bodyPr rtlCol="0" anchor="ctr"/>
+          <a:lstStyle/>
+          <a:p>
+            <a:pPr algn="ctr"/>
+          </a:p>
+        </p:txBody>
+      </p:sp>
+      <p:sp>
+        <p:nvSpPr>
+          <p:cNvPr id="9" name="TextBox 8"/>
+          <p:cNvSpPr txBox="1"/>
+          <p:nvPr/>
+        </p:nvSpPr>
+        <p:spPr>
+          <a:xfrm>
+            <a:off x="6400800" y="1417319"/>
+            <a:ext cx="4846320" cy="1188720"/>
+          </a:xfrm>
+          <a:prstGeom prst="rect">
+            <a:avLst/>
+          </a:prstGeom>
+          <a:noFill/>
+        </p:spPr>
+        <p:txBody>
+          <a:bodyPr wrap="square">
+            <a:spAutoFit/>
+          </a:bodyPr>
+          <a:lstStyle/>
+          <a:p>
+            <a:pPr>
+              <a:defRPr sz="1300" b="1">
+                <a:solidFill>
+                  <a:srgbClr val="1E3A8A"/>
+                </a:solidFill>
+              </a:defRPr>
+            </a:pPr>
+            <a:r>
+              <a:t>Objective 2: Controlled Classical Baselines</a:t>
+            </a:r>
+          </a:p>
+          <a:p>
+            <a:pPr>
+              <a:spcBef>
+                <a:spcPts val="400"/>
+              </a:spcBef>
+              <a:defRPr sz="1100">
+                <a:solidFill>
+                  <a:srgbClr val="0F172A"/>
+                </a:solidFill>
+              </a:defRPr>
+            </a:pPr>
+            <a:r>
+              <a:t>Train state-of-the-art classical backbones (ResNet18, MobileNetV2) using class-weighted Focal Loss (gamma=2.0) on APTOS 2019 to establish a rigorous performance benchmark.</a:t>
+            </a:r>
+          </a:p>
+        </p:txBody>
+      </p:sp>
+      <p:sp>
+        <p:nvSpPr>
+          <p:cNvPr id="10" name="Rounded Rectangle 9"/>
+          <p:cNvSpPr/>
+          <p:nvPr/>
+        </p:nvSpPr>
+        <p:spPr>
+          <a:xfrm>
+            <a:off x="731520" y="2926080"/>
+            <a:ext cx="5212080" cy="1463040"/>
+          </a:xfrm>
+          <a:prstGeom prst="roundRect">
+            <a:avLst/>
+          </a:prstGeom>
+          <a:solidFill>
+            <a:srgbClr val="FFFFFF"/>
+          </a:solidFill>
+          <a:ln w="12700">
+            <a:solidFill>
+              <a:srgbClr val="E2E8F0"/>
+            </a:solidFill>
+          </a:ln>
+        </p:spPr>
+        <p:style>
+          <a:lnRef idx="1">
+            <a:schemeClr val="accent1"/>
+          </a:lnRef>
+          <a:fillRef idx="3">
+            <a:schemeClr val="accent1"/>
+          </a:fillRef>
+          <a:effectRef idx="2">
+            <a:schemeClr val="accent1"/>
+          </a:effectRef>
+          <a:fontRef idx="minor">
+            <a:schemeClr val="lt1"/>
+          </a:fontRef>
+        </p:style>
+        <p:txBody>
+          <a:bodyPr rtlCol="0" anchor="ctr"/>
+          <a:lstStyle/>
+          <a:p>
+            <a:pPr algn="ctr"/>
+          </a:p>
+        </p:txBody>
+      </p:sp>
+      <p:sp>
+        <p:nvSpPr>
+          <p:cNvPr id="11" name="TextBox 10"/>
+          <p:cNvSpPr txBox="1"/>
+          <p:nvPr/>
+        </p:nvSpPr>
+        <p:spPr>
+          <a:xfrm>
+            <a:off x="914400" y="3063240"/>
+            <a:ext cx="4846320" cy="1188720"/>
+          </a:xfrm>
+          <a:prstGeom prst="rect">
+            <a:avLst/>
+          </a:prstGeom>
+          <a:noFill/>
+        </p:spPr>
+        <p:txBody>
+          <a:bodyPr wrap="square">
+            <a:spAutoFit/>
+          </a:bodyPr>
+          <a:lstStyle/>
+          <a:p>
+            <a:pPr>
+              <a:defRPr sz="1300" b="1">
+                <a:solidFill>
+                  <a:srgbClr val="0D9488"/>
+                </a:solidFill>
+              </a:defRPr>
+            </a:pPr>
+            <a:r>
+              <a:t>Objective 3: Quantum Architecture &amp; Compression Ablation</a:t>
+            </a:r>
+          </a:p>
+          <a:p>
+            <a:pPr>
+              <a:spcBef>
+                <a:spcPts val="400"/>
+              </a:spcBef>
+              <a:defRPr sz="1100">
+                <a:solidFill>
+                  <a:srgbClr val="0F172A"/>
+                </a:solidFill>
+              </a:defRPr>
+            </a:pPr>
+            <a:r>
+              <a:t>Design PennyLane Parameterized Quantum Circuits (4 &amp; 8 qubits) and systematically compare Linear, Deep Autoencoder, and PCA state preparation bottlenecks.</a:t>
+            </a:r>
+          </a:p>
+        </p:txBody>
+      </p:sp>
+      <p:sp>
+        <p:nvSpPr>
+          <p:cNvPr id="12" name="Rounded Rectangle 11"/>
+          <p:cNvSpPr/>
+          <p:nvPr/>
+        </p:nvSpPr>
+        <p:spPr>
+          <a:xfrm>
+            <a:off x="6217920" y="2926080"/>
+            <a:ext cx="5212080" cy="1463040"/>
+          </a:xfrm>
+          <a:prstGeom prst="roundRect">
+            <a:avLst/>
+          </a:prstGeom>
+          <a:solidFill>
+            <a:srgbClr val="FFFFFF"/>
+          </a:solidFill>
+          <a:ln w="12700">
+            <a:solidFill>
+              <a:srgbClr val="E2E8F0"/>
+            </a:solidFill>
+          </a:ln>
+        </p:spPr>
+        <p:style>
+          <a:lnRef idx="1">
+            <a:schemeClr val="accent1"/>
+          </a:lnRef>
+          <a:fillRef idx="3">
+            <a:schemeClr val="accent1"/>
+          </a:fillRef>
+          <a:effectRef idx="2">
+            <a:schemeClr val="accent1"/>
+          </a:effectRef>
+          <a:fontRef idx="minor">
+            <a:schemeClr val="lt1"/>
+          </a:fontRef>
+        </p:style>
+        <p:txBody>
+          <a:bodyPr rtlCol="0" anchor="ctr"/>
+          <a:lstStyle/>
+          <a:p>
+            <a:pPr algn="ctr"/>
+          </a:p>
+        </p:txBody>
+      </p:sp>
+      <p:sp>
+        <p:nvSpPr>
+          <p:cNvPr id="13" name="TextBox 12"/>
+          <p:cNvSpPr txBox="1"/>
+          <p:nvPr/>
+        </p:nvSpPr>
+        <p:spPr>
+          <a:xfrm>
+            <a:off x="6400800" y="3063240"/>
+            <a:ext cx="4846320" cy="1188720"/>
+          </a:xfrm>
+          <a:prstGeom prst="rect">
+            <a:avLst/>
+          </a:prstGeom>
+          <a:noFill/>
+        </p:spPr>
+        <p:txBody>
+          <a:bodyPr wrap="square">
+            <a:spAutoFit/>
+          </a:bodyPr>
+          <a:lstStyle/>
+          <a:p>
+            <a:pPr>
+              <a:defRPr sz="1300" b="1">
+                <a:solidFill>
+                  <a:srgbClr val="1E3A8A"/>
+                </a:solidFill>
+              </a:defRPr>
+            </a:pPr>
+            <a:r>
+              <a:t>Objective 4: Parameter Efficiency &amp; Clinical QWK</a:t>
+            </a:r>
+          </a:p>
+          <a:p>
+            <a:pPr>
+              <a:spcBef>
+                <a:spcPts val="400"/>
+              </a:spcBef>
+              <a:defRPr sz="1100">
+                <a:solidFill>
+                  <a:srgbClr val="0F172A"/>
+                </a:solidFill>
+              </a:defRPr>
+            </a:pPr>
+            <a:r>
+              <a:t>Demonstrate that a PQC with only 12 variational parameters can achieve high clinical Quadratic Weighted Kappa (QWK &gt; 0.75) with &gt;99% fewer decision parameters.</a:t>
+            </a:r>
+          </a:p>
+        </p:txBody>
+      </p:sp>
+      <p:sp>
+        <p:nvSpPr>
+          <p:cNvPr id="14" name="Rounded Rectangle 13"/>
+          <p:cNvSpPr/>
+          <p:nvPr/>
+        </p:nvSpPr>
+        <p:spPr>
+          <a:xfrm>
+            <a:off x="731520" y="4572000"/>
+            <a:ext cx="5212080" cy="1463040"/>
+          </a:xfrm>
+          <a:prstGeom prst="roundRect">
+            <a:avLst/>
+          </a:prstGeom>
+          <a:solidFill>
+            <a:srgbClr val="FFFFFF"/>
+          </a:solidFill>
+          <a:ln w="12700">
+            <a:solidFill>
+              <a:srgbClr val="E2E8F0"/>
+            </a:solidFill>
+          </a:ln>
+        </p:spPr>
+        <p:style>
+          <a:lnRef idx="1">
+            <a:schemeClr val="accent1"/>
+          </a:lnRef>
+          <a:fillRef idx="3">
+            <a:schemeClr val="accent1"/>
+          </a:fillRef>
+          <a:effectRef idx="2">
+            <a:schemeClr val="accent1"/>
+          </a:effectRef>
+          <a:fontRef idx="minor">
+            <a:schemeClr val="lt1"/>
+          </a:fontRef>
+        </p:style>
+        <p:txBody>
+          <a:bodyPr rtlCol="0" anchor="ctr"/>
+          <a:lstStyle/>
+          <a:p>
+            <a:pPr algn="ctr"/>
+          </a:p>
+        </p:txBody>
+      </p:sp>
+      <p:sp>
+        <p:nvSpPr>
+          <p:cNvPr id="15" name="TextBox 14"/>
+          <p:cNvSpPr txBox="1"/>
+          <p:nvPr/>
+        </p:nvSpPr>
+        <p:spPr>
+          <a:xfrm>
+            <a:off x="914400" y="4709160"/>
+            <a:ext cx="4846320" cy="1188720"/>
+          </a:xfrm>
+          <a:prstGeom prst="rect">
+            <a:avLst/>
+          </a:prstGeom>
+          <a:noFill/>
+        </p:spPr>
+        <p:txBody>
+          <a:bodyPr wrap="square">
+            <a:spAutoFit/>
+          </a:bodyPr>
+          <a:lstStyle/>
+          <a:p>
+            <a:pPr>
+              <a:defRPr sz="1300" b="1">
+                <a:solidFill>
+                  <a:srgbClr val="0D9488"/>
+                </a:solidFill>
+              </a:defRPr>
+            </a:pPr>
+            <a:r>
+              <a:t>Objective 5: NISQ Noise Resilience &amp; QPU Execution</a:t>
+            </a:r>
+          </a:p>
+          <a:p>
+            <a:pPr>
+              <a:spcBef>
+                <a:spcPts val="400"/>
+              </a:spcBef>
+              <a:defRPr sz="1100">
+                <a:solidFill>
+                  <a:srgbClr val="0F172A"/>
+                </a:solidFill>
+              </a:defRPr>
+            </a:pPr>
+            <a:r>
+              <a:t>Benchmark circuit degradation under simulated depolarizing noise (Qiskit Aer) and execute a 100-sample test batch on real IBM Quantum superconducting hardware (ibm_brisbane).</a:t>
+            </a:r>
+          </a:p>
+        </p:txBody>
+      </p:sp>
+      <p:sp>
+        <p:nvSpPr>
+          <p:cNvPr id="16" name="Rounded Rectangle 15"/>
+          <p:cNvSpPr/>
+          <p:nvPr/>
+        </p:nvSpPr>
+        <p:spPr>
+          <a:xfrm>
+            <a:off x="6217920" y="4572000"/>
+            <a:ext cx="5212080" cy="1463040"/>
+          </a:xfrm>
+          <a:prstGeom prst="roundRect">
+            <a:avLst/>
+          </a:prstGeom>
+          <a:solidFill>
+            <a:srgbClr val="FFFFFF"/>
+          </a:solidFill>
+          <a:ln w="12700">
+            <a:solidFill>
+              <a:srgbClr val="E2E8F0"/>
+            </a:solidFill>
+          </a:ln>
+        </p:spPr>
+        <p:style>
+          <a:lnRef idx="1">
+            <a:schemeClr val="accent1"/>
+          </a:lnRef>
+          <a:fillRef idx="3">
+            <a:schemeClr val="accent1"/>
+          </a:fillRef>
+          <a:effectRef idx="2">
+            <a:schemeClr val="accent1"/>
+          </a:effectRef>
+          <a:fontRef idx="minor">
+            <a:schemeClr val="lt1"/>
+          </a:fontRef>
+        </p:style>
+        <p:txBody>
+          <a:bodyPr rtlCol="0" anchor="ctr"/>
+          <a:lstStyle/>
+          <a:p>
+            <a:pPr algn="ctr"/>
+          </a:p>
+        </p:txBody>
+      </p:sp>
+      <p:sp>
+        <p:nvSpPr>
+          <p:cNvPr id="17" name="TextBox 16"/>
+          <p:cNvSpPr txBox="1"/>
+          <p:nvPr/>
+        </p:nvSpPr>
+        <p:spPr>
+          <a:xfrm>
+            <a:off x="6400800" y="4709160"/>
+            <a:ext cx="4846320" cy="1188720"/>
+          </a:xfrm>
+          <a:prstGeom prst="rect">
+            <a:avLst/>
+          </a:prstGeom>
+          <a:noFill/>
+        </p:spPr>
+        <p:txBody>
+          <a:bodyPr wrap="square">
+            <a:spAutoFit/>
+          </a:bodyPr>
+          <a:lstStyle/>
+          <a:p>
+            <a:pPr>
+              <a:defRPr sz="1300" b="1">
+                <a:solidFill>
+                  <a:srgbClr val="1E3A8A"/>
+                </a:solidFill>
+              </a:defRPr>
+            </a:pPr>
+            <a:r>
+              <a:t>Objective 6: Clinical Deployment Dashboard</a:t>
+            </a:r>
+          </a:p>
+          <a:p>
+            <a:pPr>
+              <a:spcBef>
+                <a:spcPts val="400"/>
+              </a:spcBef>
+              <a:defRPr sz="1100">
+                <a:solidFill>
+                  <a:srgbClr val="0F172A"/>
+                </a:solidFill>
+              </a:defRPr>
+            </a:pPr>
+            <a:r>
+              <a:t>Develop an interactive Streamlit clinical web app for real-time fundus upload, angle inspection, and instant severity triage.</a:t>
+            </a:r>
+          </a:p>
+        </p:txBody>
+      </p:sp>
+    </p:spTree>
+  </p:cSld>
+  <p:clrMapOvr>
+    <a:masterClrMapping/>
+  </p:clrMapOvr>
+</p:sld>
+</file>
+
+<file path=ppt/slides/slide5.xml><?xml version="1.0" encoding="utf-8"?>
+<p:sld xmlns:a="http://schemas.openxmlformats.org/drawingml/2006/main" xmlns:p="http://schemas.openxmlformats.org/presentationml/2006/main" xmlns:r="http://schemas.openxmlformats.org/officeDocument/2006/relationships">
+  <p:cSld>
+    <p:spTree>
+      <p:nvGrpSpPr>
+        <p:cNvPr id="1" name=""/>
+        <p:cNvGrpSpPr/>
+        <p:nvPr/>
+      </p:nvGrpSpPr>
+      <p:grpSpPr/>
+      <p:sp>
+        <p:nvSpPr>
+          <p:cNvPr id="2" name="Rectangle 1"/>
+          <p:cNvSpPr/>
+          <p:nvPr/>
+        </p:nvSpPr>
+        <p:spPr>
+          <a:xfrm>
+            <a:off x="0" y="0"/>
+            <a:ext cx="12191695" cy="1005840"/>
+          </a:xfrm>
+          <a:prstGeom prst="rect">
+            <a:avLst/>
+          </a:prstGeom>
+          <a:solidFill>
+            <a:srgbClr val="0F172A"/>
+          </a:solidFill>
+          <a:ln>
+            <a:solidFill>
+              <a:srgbClr val="0F172A"/>
+            </a:solidFill>
+          </a:ln>
+        </p:spPr>
+        <p:style>
+          <a:lnRef idx="1">
+            <a:schemeClr val="accent1"/>
+          </a:lnRef>
+          <a:fillRef idx="3">
+            <a:schemeClr val="accent1"/>
+          </a:fillRef>
+          <a:effectRef idx="2">
+            <a:schemeClr val="accent1"/>
+          </a:effectRef>
+          <a:fontRef idx="minor">
+            <a:schemeClr val="lt1"/>
+          </a:fontRef>
+        </p:style>
+        <p:txBody>
+          <a:bodyPr rtlCol="0" anchor="ctr"/>
+          <a:lstStyle/>
+          <a:p>
+            <a:pPr algn="ctr"/>
+          </a:p>
+        </p:txBody>
+      </p:sp>
+      <p:sp>
+        <p:nvSpPr>
+          <p:cNvPr id="3" name="TextBox 2"/>
+          <p:cNvSpPr txBox="1"/>
+          <p:nvPr/>
+        </p:nvSpPr>
+        <p:spPr>
+          <a:xfrm>
+            <a:off x="731520" y="109728"/>
+            <a:ext cx="10698480" cy="274320"/>
+          </a:xfrm>
+          <a:prstGeom prst="rect">
+            <a:avLst/>
+          </a:prstGeom>
+          <a:noFill/>
+        </p:spPr>
+        <p:txBody>
+          <a:bodyPr wrap="none">
+            <a:spAutoFit/>
+          </a:bodyPr>
+          <a:lstStyle/>
+          <a:p>
+            <a:pPr>
+              <a:defRPr sz="1100" b="1">
+                <a:solidFill>
+                  <a:srgbClr val="0D9488"/>
+                </a:solidFill>
+              </a:defRPr>
+            </a:pPr>
+            <a:r>
+              <a:t>STATE-OF-THE-ART ANALYSIS</a:t>
+            </a:r>
+          </a:p>
+        </p:txBody>
+      </p:sp>
+      <p:sp>
+        <p:nvSpPr>
+          <p:cNvPr id="4" name="TextBox 3"/>
+          <p:cNvSpPr txBox="1"/>
+          <p:nvPr/>
+        </p:nvSpPr>
+        <p:spPr>
+          <a:xfrm>
+            <a:off x="731520" y="365760"/>
+            <a:ext cx="10698480" cy="502920"/>
+          </a:xfrm>
+          <a:prstGeom prst="rect">
+            <a:avLst/>
+          </a:prstGeom>
+          <a:noFill/>
+        </p:spPr>
+        <p:txBody>
+          <a:bodyPr wrap="none">
+            <a:spAutoFit/>
+          </a:bodyPr>
+          <a:lstStyle/>
+          <a:p>
+            <a:pPr>
+              <a:defRPr sz="2200" b="1">
+                <a:solidFill>
+                  <a:srgbClr val="FFFFFF"/>
+                </a:solidFill>
+              </a:defRPr>
+            </a:pPr>
+            <a:r>
+              <a:t>Literature Review &amp; Identified Research Gaps</a:t>
+            </a:r>
+          </a:p>
+        </p:txBody>
+      </p:sp>
+      <p:sp>
+        <p:nvSpPr>
+          <p:cNvPr id="5" name="TextBox 4"/>
+          <p:cNvSpPr txBox="1"/>
+          <p:nvPr/>
+        </p:nvSpPr>
+        <p:spPr>
+          <a:xfrm>
+            <a:off x="731520" y="6492240"/>
+            <a:ext cx="10698480" cy="274320"/>
+          </a:xfrm>
+          <a:prstGeom prst="rect">
+            <a:avLst/>
+          </a:prstGeom>
+          <a:noFill/>
+        </p:spPr>
+        <p:txBody>
+          <a:bodyPr wrap="none">
+            <a:spAutoFit/>
+          </a:bodyPr>
+          <a:lstStyle/>
+          <a:p>
+            <a:pPr>
+              <a:defRPr sz="900">
+                <a:solidFill>
+                  <a:srgbClr val="475569"/>
+                </a:solidFill>
+              </a:defRPr>
+            </a:pPr>
+            <a:r>
+              <a:t>EDI Mid-Semester Assessment | Project ID: ERI 5 / TY_CSE_10 | HQNN for Retinal Disease Classification</a:t>
             </a:r>
           </a:p>
         </p:txBody>
@@ -7118,1207 +7469,6 @@
 </p:sld>
 </file>
 
-<file path=ppt/slides/slide4.xml><?xml version="1.0" encoding="utf-8"?>
-<p:sld xmlns:a="http://schemas.openxmlformats.org/drawingml/2006/main" xmlns:p="http://schemas.openxmlformats.org/presentationml/2006/main" xmlns:r="http://schemas.openxmlformats.org/officeDocument/2006/relationships">
-  <p:cSld>
-    <p:spTree>
-      <p:nvGrpSpPr>
-        <p:cNvPr id="1" name=""/>
-        <p:cNvGrpSpPr/>
-        <p:nvPr/>
-      </p:nvGrpSpPr>
-      <p:grpSpPr/>
-      <p:sp>
-        <p:nvSpPr>
-          <p:cNvPr id="2" name="Rectangle 1"/>
-          <p:cNvSpPr/>
-          <p:nvPr/>
-        </p:nvSpPr>
-        <p:spPr>
-          <a:xfrm>
-            <a:off x="0" y="0"/>
-            <a:ext cx="12191695" cy="1005840"/>
-          </a:xfrm>
-          <a:prstGeom prst="rect">
-            <a:avLst/>
-          </a:prstGeom>
-          <a:solidFill>
-            <a:srgbClr val="0F172A"/>
-          </a:solidFill>
-          <a:ln>
-            <a:solidFill>
-              <a:srgbClr val="0F172A"/>
-            </a:solidFill>
-          </a:ln>
-        </p:spPr>
-        <p:style>
-          <a:lnRef idx="1">
-            <a:schemeClr val="accent1"/>
-          </a:lnRef>
-          <a:fillRef idx="3">
-            <a:schemeClr val="accent1"/>
-          </a:fillRef>
-          <a:effectRef idx="2">
-            <a:schemeClr val="accent1"/>
-          </a:effectRef>
-          <a:fontRef idx="minor">
-            <a:schemeClr val="lt1"/>
-          </a:fontRef>
-        </p:style>
-        <p:txBody>
-          <a:bodyPr rtlCol="0" anchor="ctr"/>
-          <a:lstStyle/>
-          <a:p>
-            <a:pPr algn="ctr"/>
-          </a:p>
-        </p:txBody>
-      </p:sp>
-      <p:sp>
-        <p:nvSpPr>
-          <p:cNvPr id="3" name="TextBox 2"/>
-          <p:cNvSpPr txBox="1"/>
-          <p:nvPr/>
-        </p:nvSpPr>
-        <p:spPr>
-          <a:xfrm>
-            <a:off x="731520" y="109728"/>
-            <a:ext cx="10698480" cy="274320"/>
-          </a:xfrm>
-          <a:prstGeom prst="rect">
-            <a:avLst/>
-          </a:prstGeom>
-          <a:noFill/>
-        </p:spPr>
-        <p:txBody>
-          <a:bodyPr wrap="square">
-            <a:spAutoFit/>
-          </a:bodyPr>
-          <a:lstStyle/>
-          <a:p>
-            <a:pPr>
-              <a:defRPr sz="1100" b="1">
-                <a:solidFill>
-                  <a:srgbClr val="0D9488"/>
-                </a:solidFill>
-              </a:defRPr>
-            </a:pPr>
-            <a:r>
-              <a:t>EDI PARAMETER 5: OBJECTIVES OF THE PROJECT</a:t>
-            </a:r>
-          </a:p>
-        </p:txBody>
-      </p:sp>
-      <p:sp>
-        <p:nvSpPr>
-          <p:cNvPr id="4" name="TextBox 3"/>
-          <p:cNvSpPr txBox="1"/>
-          <p:nvPr/>
-        </p:nvSpPr>
-        <p:spPr>
-          <a:xfrm>
-            <a:off x="731520" y="365760"/>
-            <a:ext cx="10698480" cy="502920"/>
-          </a:xfrm>
-          <a:prstGeom prst="rect">
-            <a:avLst/>
-          </a:prstGeom>
-          <a:noFill/>
-        </p:spPr>
-        <p:txBody>
-          <a:bodyPr wrap="square">
-            <a:spAutoFit/>
-          </a:bodyPr>
-          <a:lstStyle/>
-          <a:p>
-            <a:pPr>
-              <a:defRPr sz="2200" b="1">
-                <a:solidFill>
-                  <a:srgbClr val="FFFFFF"/>
-                </a:solidFill>
-              </a:defRPr>
-            </a:pPr>
-            <a:r>
-              <a:t>Project Objectives &amp; Success Criteria</a:t>
-            </a:r>
-          </a:p>
-        </p:txBody>
-      </p:sp>
-      <p:sp>
-        <p:nvSpPr>
-          <p:cNvPr id="5" name="TextBox 4"/>
-          <p:cNvSpPr txBox="1"/>
-          <p:nvPr/>
-        </p:nvSpPr>
-        <p:spPr>
-          <a:xfrm>
-            <a:off x="731520" y="6492240"/>
-            <a:ext cx="10698480" cy="274320"/>
-          </a:xfrm>
-          <a:prstGeom prst="rect">
-            <a:avLst/>
-          </a:prstGeom>
-          <a:noFill/>
-        </p:spPr>
-        <p:txBody>
-          <a:bodyPr wrap="none">
-            <a:spAutoFit/>
-          </a:bodyPr>
-          <a:lstStyle/>
-          <a:p>
-            <a:pPr>
-              <a:defRPr sz="900">
-                <a:solidFill>
-                  <a:srgbClr val="475569"/>
-                </a:solidFill>
-              </a:defRPr>
-            </a:pPr>
-            <a:r>
-              <a:t>EDI Mid-Semester Assessment | Project ID: ERI 5 / TY_CSE_10 | Hybrid Quantum-Classical CNN for Retinal Disease</a:t>
-            </a:r>
-          </a:p>
-        </p:txBody>
-      </p:sp>
-      <p:sp>
-        <p:nvSpPr>
-          <p:cNvPr id="6" name="Rounded Rectangle 5"/>
-          <p:cNvSpPr/>
-          <p:nvPr/>
-        </p:nvSpPr>
-        <p:spPr>
-          <a:xfrm>
-            <a:off x="731520" y="1280160"/>
-            <a:ext cx="5212080" cy="1463040"/>
-          </a:xfrm>
-          <a:prstGeom prst="roundRect">
-            <a:avLst/>
-          </a:prstGeom>
-          <a:solidFill>
-            <a:srgbClr val="FFFFFF"/>
-          </a:solidFill>
-          <a:ln w="12700">
-            <a:solidFill>
-              <a:srgbClr val="E2E8F0"/>
-            </a:solidFill>
-          </a:ln>
-        </p:spPr>
-        <p:style>
-          <a:lnRef idx="1">
-            <a:schemeClr val="accent1"/>
-          </a:lnRef>
-          <a:fillRef idx="3">
-            <a:schemeClr val="accent1"/>
-          </a:fillRef>
-          <a:effectRef idx="2">
-            <a:schemeClr val="accent1"/>
-          </a:effectRef>
-          <a:fontRef idx="minor">
-            <a:schemeClr val="lt1"/>
-          </a:fontRef>
-        </p:style>
-        <p:txBody>
-          <a:bodyPr rtlCol="0" anchor="ctr"/>
-          <a:lstStyle/>
-          <a:p>
-            <a:pPr algn="ctr"/>
-          </a:p>
-        </p:txBody>
-      </p:sp>
-      <p:sp>
-        <p:nvSpPr>
-          <p:cNvPr id="7" name="TextBox 6"/>
-          <p:cNvSpPr txBox="1"/>
-          <p:nvPr/>
-        </p:nvSpPr>
-        <p:spPr>
-          <a:xfrm>
-            <a:off x="914400" y="1417319"/>
-            <a:ext cx="4846320" cy="1188720"/>
-          </a:xfrm>
-          <a:prstGeom prst="rect">
-            <a:avLst/>
-          </a:prstGeom>
-          <a:noFill/>
-        </p:spPr>
-        <p:txBody>
-          <a:bodyPr wrap="square">
-            <a:spAutoFit/>
-          </a:bodyPr>
-          <a:lstStyle/>
-          <a:p>
-            <a:pPr>
-              <a:defRPr sz="1300" b="1">
-                <a:solidFill>
-                  <a:srgbClr val="0D9488"/>
-                </a:solidFill>
-              </a:defRPr>
-            </a:pPr>
-            <a:r>
-              <a:t>Objective 1: Clinical Preprocessing</a:t>
-            </a:r>
-          </a:p>
-          <a:p>
-            <a:pPr>
-              <a:spcBef>
-                <a:spcPts val="400"/>
-              </a:spcBef>
-              <a:defRPr sz="1100">
-                <a:solidFill>
-                  <a:srgbClr val="0F172A"/>
-                </a:solidFill>
-              </a:defRPr>
-            </a:pPr>
-            <a:r>
-              <a:t>Develop automated, reproducible ophthalmic image standardization using Ben Graham circular masking and green-channel CLAHE at 224x224 to isolate microaneurysms and hemorrhages.</a:t>
-            </a:r>
-          </a:p>
-        </p:txBody>
-      </p:sp>
-      <p:sp>
-        <p:nvSpPr>
-          <p:cNvPr id="8" name="Rounded Rectangle 7"/>
-          <p:cNvSpPr/>
-          <p:nvPr/>
-        </p:nvSpPr>
-        <p:spPr>
-          <a:xfrm>
-            <a:off x="6217920" y="1280160"/>
-            <a:ext cx="5212080" cy="1463040"/>
-          </a:xfrm>
-          <a:prstGeom prst="roundRect">
-            <a:avLst/>
-          </a:prstGeom>
-          <a:solidFill>
-            <a:srgbClr val="FFFFFF"/>
-          </a:solidFill>
-          <a:ln w="12700">
-            <a:solidFill>
-              <a:srgbClr val="E2E8F0"/>
-            </a:solidFill>
-          </a:ln>
-        </p:spPr>
-        <p:style>
-          <a:lnRef idx="1">
-            <a:schemeClr val="accent1"/>
-          </a:lnRef>
-          <a:fillRef idx="3">
-            <a:schemeClr val="accent1"/>
-          </a:fillRef>
-          <a:effectRef idx="2">
-            <a:schemeClr val="accent1"/>
-          </a:effectRef>
-          <a:fontRef idx="minor">
-            <a:schemeClr val="lt1"/>
-          </a:fontRef>
-        </p:style>
-        <p:txBody>
-          <a:bodyPr rtlCol="0" anchor="ctr"/>
-          <a:lstStyle/>
-          <a:p>
-            <a:pPr algn="ctr"/>
-          </a:p>
-        </p:txBody>
-      </p:sp>
-      <p:sp>
-        <p:nvSpPr>
-          <p:cNvPr id="9" name="TextBox 8"/>
-          <p:cNvSpPr txBox="1"/>
-          <p:nvPr/>
-        </p:nvSpPr>
-        <p:spPr>
-          <a:xfrm>
-            <a:off x="6400800" y="1417319"/>
-            <a:ext cx="4846320" cy="1188720"/>
-          </a:xfrm>
-          <a:prstGeom prst="rect">
-            <a:avLst/>
-          </a:prstGeom>
-          <a:noFill/>
-        </p:spPr>
-        <p:txBody>
-          <a:bodyPr wrap="square">
-            <a:spAutoFit/>
-          </a:bodyPr>
-          <a:lstStyle/>
-          <a:p>
-            <a:pPr>
-              <a:defRPr sz="1300" b="1">
-                <a:solidFill>
-                  <a:srgbClr val="1E3A8A"/>
-                </a:solidFill>
-              </a:defRPr>
-            </a:pPr>
-            <a:r>
-              <a:t>Objective 2: Classical Deep Learning Baselines</a:t>
-            </a:r>
-          </a:p>
-          <a:p>
-            <a:pPr>
-              <a:spcBef>
-                <a:spcPts val="400"/>
-              </a:spcBef>
-              <a:defRPr sz="1100">
-                <a:solidFill>
-                  <a:srgbClr val="0F172A"/>
-                </a:solidFill>
-              </a:defRPr>
-            </a:pPr>
-            <a:r>
-              <a:t>Train state-of-the-art classical backbones (ResNet18, MobileNetV2) using class-weighted Focal Loss (gamma=2.0) on APTOS 2019 to establish rigorous benchmarks.</a:t>
-            </a:r>
-          </a:p>
-        </p:txBody>
-      </p:sp>
-      <p:sp>
-        <p:nvSpPr>
-          <p:cNvPr id="10" name="Rounded Rectangle 9"/>
-          <p:cNvSpPr/>
-          <p:nvPr/>
-        </p:nvSpPr>
-        <p:spPr>
-          <a:xfrm>
-            <a:off x="731520" y="2926080"/>
-            <a:ext cx="5212080" cy="1463040"/>
-          </a:xfrm>
-          <a:prstGeom prst="roundRect">
-            <a:avLst/>
-          </a:prstGeom>
-          <a:solidFill>
-            <a:srgbClr val="FFFFFF"/>
-          </a:solidFill>
-          <a:ln w="12700">
-            <a:solidFill>
-              <a:srgbClr val="E2E8F0"/>
-            </a:solidFill>
-          </a:ln>
-        </p:spPr>
-        <p:style>
-          <a:lnRef idx="1">
-            <a:schemeClr val="accent1"/>
-          </a:lnRef>
-          <a:fillRef idx="3">
-            <a:schemeClr val="accent1"/>
-          </a:fillRef>
-          <a:effectRef idx="2">
-            <a:schemeClr val="accent1"/>
-          </a:effectRef>
-          <a:fontRef idx="minor">
-            <a:schemeClr val="lt1"/>
-          </a:fontRef>
-        </p:style>
-        <p:txBody>
-          <a:bodyPr rtlCol="0" anchor="ctr"/>
-          <a:lstStyle/>
-          <a:p>
-            <a:pPr algn="ctr"/>
-          </a:p>
-        </p:txBody>
-      </p:sp>
-      <p:sp>
-        <p:nvSpPr>
-          <p:cNvPr id="11" name="TextBox 10"/>
-          <p:cNvSpPr txBox="1"/>
-          <p:nvPr/>
-        </p:nvSpPr>
-        <p:spPr>
-          <a:xfrm>
-            <a:off x="914400" y="3063240"/>
-            <a:ext cx="4846320" cy="1188720"/>
-          </a:xfrm>
-          <a:prstGeom prst="rect">
-            <a:avLst/>
-          </a:prstGeom>
-          <a:noFill/>
-        </p:spPr>
-        <p:txBody>
-          <a:bodyPr wrap="square">
-            <a:spAutoFit/>
-          </a:bodyPr>
-          <a:lstStyle/>
-          <a:p>
-            <a:pPr>
-              <a:defRPr sz="1300" b="1">
-                <a:solidFill>
-                  <a:srgbClr val="0D9488"/>
-                </a:solidFill>
-              </a:defRPr>
-            </a:pPr>
-            <a:r>
-              <a:t>Objective 3: Quantum Architecture &amp; Compression Ablation</a:t>
-            </a:r>
-          </a:p>
-          <a:p>
-            <a:pPr>
-              <a:spcBef>
-                <a:spcPts val="400"/>
-              </a:spcBef>
-              <a:defRPr sz="1100">
-                <a:solidFill>
-                  <a:srgbClr val="0F172A"/>
-                </a:solidFill>
-              </a:defRPr>
-            </a:pPr>
-            <a:r>
-              <a:t>Design and integrate PennyLane Parameterized Quantum Circuits (PQCs) with 4 and 8 qubits, systematically comparing Linear, Deep Autoencoder, and PCA state preparation.</a:t>
-            </a:r>
-          </a:p>
-        </p:txBody>
-      </p:sp>
-      <p:sp>
-        <p:nvSpPr>
-          <p:cNvPr id="12" name="Rounded Rectangle 11"/>
-          <p:cNvSpPr/>
-          <p:nvPr/>
-        </p:nvSpPr>
-        <p:spPr>
-          <a:xfrm>
-            <a:off x="6217920" y="2926080"/>
-            <a:ext cx="5212080" cy="1463040"/>
-          </a:xfrm>
-          <a:prstGeom prst="roundRect">
-            <a:avLst/>
-          </a:prstGeom>
-          <a:solidFill>
-            <a:srgbClr val="FFFFFF"/>
-          </a:solidFill>
-          <a:ln w="12700">
-            <a:solidFill>
-              <a:srgbClr val="E2E8F0"/>
-            </a:solidFill>
-          </a:ln>
-        </p:spPr>
-        <p:style>
-          <a:lnRef idx="1">
-            <a:schemeClr val="accent1"/>
-          </a:lnRef>
-          <a:fillRef idx="3">
-            <a:schemeClr val="accent1"/>
-          </a:fillRef>
-          <a:effectRef idx="2">
-            <a:schemeClr val="accent1"/>
-          </a:effectRef>
-          <a:fontRef idx="minor">
-            <a:schemeClr val="lt1"/>
-          </a:fontRef>
-        </p:style>
-        <p:txBody>
-          <a:bodyPr rtlCol="0" anchor="ctr"/>
-          <a:lstStyle/>
-          <a:p>
-            <a:pPr algn="ctr"/>
-          </a:p>
-        </p:txBody>
-      </p:sp>
-      <p:sp>
-        <p:nvSpPr>
-          <p:cNvPr id="13" name="TextBox 12"/>
-          <p:cNvSpPr txBox="1"/>
-          <p:nvPr/>
-        </p:nvSpPr>
-        <p:spPr>
-          <a:xfrm>
-            <a:off x="6400800" y="3063240"/>
-            <a:ext cx="4846320" cy="1188720"/>
-          </a:xfrm>
-          <a:prstGeom prst="rect">
-            <a:avLst/>
-          </a:prstGeom>
-          <a:noFill/>
-        </p:spPr>
-        <p:txBody>
-          <a:bodyPr wrap="square">
-            <a:spAutoFit/>
-          </a:bodyPr>
-          <a:lstStyle/>
-          <a:p>
-            <a:pPr>
-              <a:defRPr sz="1300" b="1">
-                <a:solidFill>
-                  <a:srgbClr val="1E3A8A"/>
-                </a:solidFill>
-              </a:defRPr>
-            </a:pPr>
-            <a:r>
-              <a:t>Objective 4: Extreme Parameter Efficiency &amp; Ordinal QWK</a:t>
-            </a:r>
-          </a:p>
-          <a:p>
-            <a:pPr>
-              <a:spcBef>
-                <a:spcPts val="400"/>
-              </a:spcBef>
-              <a:defRPr sz="1100">
-                <a:solidFill>
-                  <a:srgbClr val="0F172A"/>
-                </a:solidFill>
-              </a:defRPr>
-            </a:pPr>
-            <a:r>
-              <a:t>Demonstrate that a PQC with only 12 variational parameters can achieve clinically competitive Quadratic Weighted Kappa (QWK &gt; 0.75) with &gt;99% fewer decision parameters.</a:t>
-            </a:r>
-          </a:p>
-        </p:txBody>
-      </p:sp>
-      <p:sp>
-        <p:nvSpPr>
-          <p:cNvPr id="14" name="Rounded Rectangle 13"/>
-          <p:cNvSpPr/>
-          <p:nvPr/>
-        </p:nvSpPr>
-        <p:spPr>
-          <a:xfrm>
-            <a:off x="731520" y="4572000"/>
-            <a:ext cx="5212080" cy="1463040"/>
-          </a:xfrm>
-          <a:prstGeom prst="roundRect">
-            <a:avLst/>
-          </a:prstGeom>
-          <a:solidFill>
-            <a:srgbClr val="FFFFFF"/>
-          </a:solidFill>
-          <a:ln w="12700">
-            <a:solidFill>
-              <a:srgbClr val="E2E8F0"/>
-            </a:solidFill>
-          </a:ln>
-        </p:spPr>
-        <p:style>
-          <a:lnRef idx="1">
-            <a:schemeClr val="accent1"/>
-          </a:lnRef>
-          <a:fillRef idx="3">
-            <a:schemeClr val="accent1"/>
-          </a:fillRef>
-          <a:effectRef idx="2">
-            <a:schemeClr val="accent1"/>
-          </a:effectRef>
-          <a:fontRef idx="minor">
-            <a:schemeClr val="lt1"/>
-          </a:fontRef>
-        </p:style>
-        <p:txBody>
-          <a:bodyPr rtlCol="0" anchor="ctr"/>
-          <a:lstStyle/>
-          <a:p>
-            <a:pPr algn="ctr"/>
-          </a:p>
-        </p:txBody>
-      </p:sp>
-      <p:sp>
-        <p:nvSpPr>
-          <p:cNvPr id="15" name="TextBox 14"/>
-          <p:cNvSpPr txBox="1"/>
-          <p:nvPr/>
-        </p:nvSpPr>
-        <p:spPr>
-          <a:xfrm>
-            <a:off x="914400" y="4709160"/>
-            <a:ext cx="4846320" cy="1188720"/>
-          </a:xfrm>
-          <a:prstGeom prst="rect">
-            <a:avLst/>
-          </a:prstGeom>
-          <a:noFill/>
-        </p:spPr>
-        <p:txBody>
-          <a:bodyPr wrap="square">
-            <a:spAutoFit/>
-          </a:bodyPr>
-          <a:lstStyle/>
-          <a:p>
-            <a:pPr>
-              <a:defRPr sz="1300" b="1">
-                <a:solidFill>
-                  <a:srgbClr val="0D9488"/>
-                </a:solidFill>
-              </a:defRPr>
-            </a:pPr>
-            <a:r>
-              <a:t>Objective 5: NISQ Noise Resilience &amp; QPU Execution</a:t>
-            </a:r>
-          </a:p>
-          <a:p>
-            <a:pPr>
-              <a:spcBef>
-                <a:spcPts val="400"/>
-              </a:spcBef>
-              <a:defRPr sz="1100">
-                <a:solidFill>
-                  <a:srgbClr val="0F172A"/>
-                </a:solidFill>
-              </a:defRPr>
-            </a:pPr>
-            <a:r>
-              <a:t>Benchmark circuit degradation under simulated depolarizing and thermal relaxation noise (Qiskit Aer), executing a 100-sample test batch on real IBM Quantum hardware (ibm_brisbane).</a:t>
-            </a:r>
-          </a:p>
-        </p:txBody>
-      </p:sp>
-      <p:sp>
-        <p:nvSpPr>
-          <p:cNvPr id="16" name="Rounded Rectangle 15"/>
-          <p:cNvSpPr/>
-          <p:nvPr/>
-        </p:nvSpPr>
-        <p:spPr>
-          <a:xfrm>
-            <a:off x="6217920" y="4572000"/>
-            <a:ext cx="5212080" cy="1463040"/>
-          </a:xfrm>
-          <a:prstGeom prst="roundRect">
-            <a:avLst/>
-          </a:prstGeom>
-          <a:solidFill>
-            <a:srgbClr val="FFFFFF"/>
-          </a:solidFill>
-          <a:ln w="12700">
-            <a:solidFill>
-              <a:srgbClr val="E2E8F0"/>
-            </a:solidFill>
-          </a:ln>
-        </p:spPr>
-        <p:style>
-          <a:lnRef idx="1">
-            <a:schemeClr val="accent1"/>
-          </a:lnRef>
-          <a:fillRef idx="3">
-            <a:schemeClr val="accent1"/>
-          </a:fillRef>
-          <a:effectRef idx="2">
-            <a:schemeClr val="accent1"/>
-          </a:effectRef>
-          <a:fontRef idx="minor">
-            <a:schemeClr val="lt1"/>
-          </a:fontRef>
-        </p:style>
-        <p:txBody>
-          <a:bodyPr rtlCol="0" anchor="ctr"/>
-          <a:lstStyle/>
-          <a:p>
-            <a:pPr algn="ctr"/>
-          </a:p>
-        </p:txBody>
-      </p:sp>
-      <p:sp>
-        <p:nvSpPr>
-          <p:cNvPr id="17" name="TextBox 16"/>
-          <p:cNvSpPr txBox="1"/>
-          <p:nvPr/>
-        </p:nvSpPr>
-        <p:spPr>
-          <a:xfrm>
-            <a:off x="6400800" y="4709160"/>
-            <a:ext cx="4846320" cy="1188720"/>
-          </a:xfrm>
-          <a:prstGeom prst="rect">
-            <a:avLst/>
-          </a:prstGeom>
-          <a:noFill/>
-        </p:spPr>
-        <p:txBody>
-          <a:bodyPr wrap="square">
-            <a:spAutoFit/>
-          </a:bodyPr>
-          <a:lstStyle/>
-          <a:p>
-            <a:pPr>
-              <a:defRPr sz="1300" b="1">
-                <a:solidFill>
-                  <a:srgbClr val="1E3A8A"/>
-                </a:solidFill>
-              </a:defRPr>
-            </a:pPr>
-            <a:r>
-              <a:t>Objective 6: Clinical Deployment &amp; Triage Interface</a:t>
-            </a:r>
-          </a:p>
-          <a:p>
-            <a:pPr>
-              <a:spcBef>
-                <a:spcPts val="400"/>
-              </a:spcBef>
-              <a:defRPr sz="1100">
-                <a:solidFill>
-                  <a:srgbClr val="0F172A"/>
-                </a:solidFill>
-              </a:defRPr>
-            </a:pPr>
-            <a:r>
-              <a:t>Deploy an interactive Streamlit clinical dashboard allowing ophthalmologists to upload fundus images, inspect quantum rotation angles, and obtain real-time severity predictions.</a:t>
-            </a:r>
-          </a:p>
-        </p:txBody>
-      </p:sp>
-    </p:spTree>
-  </p:cSld>
-  <p:clrMapOvr>
-    <a:masterClrMapping/>
-  </p:clrMapOvr>
-</p:sld>
-</file>
-
-<file path=ppt/slides/slide5.xml><?xml version="1.0" encoding="utf-8"?>
-<p:sld xmlns:a="http://schemas.openxmlformats.org/drawingml/2006/main" xmlns:p="http://schemas.openxmlformats.org/presentationml/2006/main" xmlns:r="http://schemas.openxmlformats.org/officeDocument/2006/relationships">
-  <p:cSld>
-    <p:spTree>
-      <p:nvGrpSpPr>
-        <p:cNvPr id="1" name=""/>
-        <p:cNvGrpSpPr/>
-        <p:nvPr/>
-      </p:nvGrpSpPr>
-      <p:grpSpPr/>
-      <p:sp>
-        <p:nvSpPr>
-          <p:cNvPr id="2" name="Rectangle 1"/>
-          <p:cNvSpPr/>
-          <p:nvPr/>
-        </p:nvSpPr>
-        <p:spPr>
-          <a:xfrm>
-            <a:off x="0" y="0"/>
-            <a:ext cx="12191695" cy="1005840"/>
-          </a:xfrm>
-          <a:prstGeom prst="rect">
-            <a:avLst/>
-          </a:prstGeom>
-          <a:solidFill>
-            <a:srgbClr val="0F172A"/>
-          </a:solidFill>
-          <a:ln>
-            <a:solidFill>
-              <a:srgbClr val="0F172A"/>
-            </a:solidFill>
-          </a:ln>
-        </p:spPr>
-        <p:style>
-          <a:lnRef idx="1">
-            <a:schemeClr val="accent1"/>
-          </a:lnRef>
-          <a:fillRef idx="3">
-            <a:schemeClr val="accent1"/>
-          </a:fillRef>
-          <a:effectRef idx="2">
-            <a:schemeClr val="accent1"/>
-          </a:effectRef>
-          <a:fontRef idx="minor">
-            <a:schemeClr val="lt1"/>
-          </a:fontRef>
-        </p:style>
-        <p:txBody>
-          <a:bodyPr rtlCol="0" anchor="ctr"/>
-          <a:lstStyle/>
-          <a:p>
-            <a:pPr algn="ctr"/>
-          </a:p>
-        </p:txBody>
-      </p:sp>
-      <p:sp>
-        <p:nvSpPr>
-          <p:cNvPr id="3" name="TextBox 2"/>
-          <p:cNvSpPr txBox="1"/>
-          <p:nvPr/>
-        </p:nvSpPr>
-        <p:spPr>
-          <a:xfrm>
-            <a:off x="731520" y="109728"/>
-            <a:ext cx="10698480" cy="274320"/>
-          </a:xfrm>
-          <a:prstGeom prst="rect">
-            <a:avLst/>
-          </a:prstGeom>
-          <a:noFill/>
-        </p:spPr>
-        <p:txBody>
-          <a:bodyPr wrap="square">
-            <a:spAutoFit/>
-          </a:bodyPr>
-          <a:lstStyle/>
-          <a:p>
-            <a:pPr>
-              <a:defRPr sz="1100" b="1">
-                <a:solidFill>
-                  <a:srgbClr val="0D9488"/>
-                </a:solidFill>
-              </a:defRPr>
-            </a:pPr>
-            <a:r>
-              <a:t>EDI PARAMETER 2: PROPOSED SOLUTION, TECHNICAL APPROACH, AND FEASIBILITY</a:t>
-            </a:r>
-          </a:p>
-        </p:txBody>
-      </p:sp>
-      <p:sp>
-        <p:nvSpPr>
-          <p:cNvPr id="4" name="TextBox 3"/>
-          <p:cNvSpPr txBox="1"/>
-          <p:nvPr/>
-        </p:nvSpPr>
-        <p:spPr>
-          <a:xfrm>
-            <a:off x="731520" y="365760"/>
-            <a:ext cx="10698480" cy="502920"/>
-          </a:xfrm>
-          <a:prstGeom prst="rect">
-            <a:avLst/>
-          </a:prstGeom>
-          <a:noFill/>
-        </p:spPr>
-        <p:txBody>
-          <a:bodyPr wrap="square">
-            <a:spAutoFit/>
-          </a:bodyPr>
-          <a:lstStyle/>
-          <a:p>
-            <a:pPr>
-              <a:defRPr sz="2200" b="1">
-                <a:solidFill>
-                  <a:srgbClr val="FFFFFF"/>
-                </a:solidFill>
-              </a:defRPr>
-            </a:pPr>
-            <a:r>
-              <a:t>Proposed Solution, Technical Approach, &amp; Feasibility</a:t>
-            </a:r>
-          </a:p>
-        </p:txBody>
-      </p:sp>
-      <p:sp>
-        <p:nvSpPr>
-          <p:cNvPr id="5" name="TextBox 4"/>
-          <p:cNvSpPr txBox="1"/>
-          <p:nvPr/>
-        </p:nvSpPr>
-        <p:spPr>
-          <a:xfrm>
-            <a:off x="731520" y="6492240"/>
-            <a:ext cx="10698480" cy="274320"/>
-          </a:xfrm>
-          <a:prstGeom prst="rect">
-            <a:avLst/>
-          </a:prstGeom>
-          <a:noFill/>
-        </p:spPr>
-        <p:txBody>
-          <a:bodyPr wrap="none">
-            <a:spAutoFit/>
-          </a:bodyPr>
-          <a:lstStyle/>
-          <a:p>
-            <a:pPr>
-              <a:defRPr sz="900">
-                <a:solidFill>
-                  <a:srgbClr val="475569"/>
-                </a:solidFill>
-              </a:defRPr>
-            </a:pPr>
-            <a:r>
-              <a:t>EDI Mid-Semester Assessment | Project ID: ERI 5 / TY_CSE_10 | Hybrid Quantum-Classical CNN for Retinal Disease</a:t>
-            </a:r>
-          </a:p>
-        </p:txBody>
-      </p:sp>
-      <p:sp>
-        <p:nvSpPr>
-          <p:cNvPr id="6" name="Rounded Rectangle 5"/>
-          <p:cNvSpPr/>
-          <p:nvPr/>
-        </p:nvSpPr>
-        <p:spPr>
-          <a:xfrm>
-            <a:off x="731520" y="1280160"/>
-            <a:ext cx="5120640" cy="4937760"/>
-          </a:xfrm>
-          <a:prstGeom prst="roundRect">
-            <a:avLst/>
-          </a:prstGeom>
-          <a:solidFill>
-            <a:srgbClr val="FFFFFF"/>
-          </a:solidFill>
-          <a:ln w="12700">
-            <a:solidFill>
-              <a:srgbClr val="E2E8F0"/>
-            </a:solidFill>
-          </a:ln>
-        </p:spPr>
-        <p:style>
-          <a:lnRef idx="1">
-            <a:schemeClr val="accent1"/>
-          </a:lnRef>
-          <a:fillRef idx="3">
-            <a:schemeClr val="accent1"/>
-          </a:fillRef>
-          <a:effectRef idx="2">
-            <a:schemeClr val="accent1"/>
-          </a:effectRef>
-          <a:fontRef idx="minor">
-            <a:schemeClr val="lt1"/>
-          </a:fontRef>
-        </p:style>
-        <p:txBody>
-          <a:bodyPr rtlCol="0" anchor="ctr"/>
-          <a:lstStyle/>
-          <a:p>
-            <a:pPr algn="ctr"/>
-          </a:p>
-        </p:txBody>
-      </p:sp>
-      <p:sp>
-        <p:nvSpPr>
-          <p:cNvPr id="7" name="TextBox 6"/>
-          <p:cNvSpPr txBox="1"/>
-          <p:nvPr/>
-        </p:nvSpPr>
-        <p:spPr>
-          <a:xfrm>
-            <a:off x="914400" y="1463040"/>
-            <a:ext cx="4754880" cy="4572000"/>
-          </a:xfrm>
-          <a:prstGeom prst="rect">
-            <a:avLst/>
-          </a:prstGeom>
-          <a:noFill/>
-        </p:spPr>
-        <p:txBody>
-          <a:bodyPr wrap="square">
-            <a:spAutoFit/>
-          </a:bodyPr>
-          <a:lstStyle/>
-          <a:p>
-            <a:pPr>
-              <a:defRPr sz="1600" b="1">
-                <a:solidFill>
-                  <a:srgbClr val="1E3A8A"/>
-                </a:solidFill>
-              </a:defRPr>
-            </a:pPr>
-            <a:r>
-              <a:t>Proposed Solution: Hybrid Architecture</a:t>
-            </a:r>
-          </a:p>
-          <a:p>
-            <a:pPr>
-              <a:spcBef>
-                <a:spcPts val="800"/>
-              </a:spcBef>
-              <a:defRPr sz="1200">
-                <a:solidFill>
-                  <a:srgbClr val="0F172A"/>
-                </a:solidFill>
-              </a:defRPr>
-            </a:pPr>
-            <a:r>
-              <a:t>• Hybrid Transfer Learning: Coupling deep classical feature extraction (ResNet18) with a Parameterized Quantum Circuit (PQC) decision layer.</a:t>
-            </a:r>
-          </a:p>
-          <a:p>
-            <a:pPr>
-              <a:spcBef>
-                <a:spcPts val="800"/>
-              </a:spcBef>
-              <a:defRPr sz="1200">
-                <a:solidFill>
-                  <a:srgbClr val="0F172A"/>
-                </a:solidFill>
-              </a:defRPr>
-            </a:pPr>
-            <a:r>
-              <a:t>• Classical Backbone (Frozen): Extracts rich 512-dimensional spatial representations of retinal lesions without needing quantum image loading.</a:t>
-            </a:r>
-          </a:p>
-          <a:p>
-            <a:pPr>
-              <a:spcBef>
-                <a:spcPts val="800"/>
-              </a:spcBef>
-              <a:defRPr sz="1200">
-                <a:solidFill>
-                  <a:srgbClr val="0F172A"/>
-                </a:solidFill>
-              </a:defRPr>
-            </a:pPr>
-            <a:r>
-              <a:t>• 3 State Preparation Strategies: Solves the dimensionality bottleneck (512 -&gt; 4/8) via Linear Bottleneck, Deep Autoencoder, and PCA.</a:t>
-            </a:r>
-          </a:p>
-          <a:p>
-            <a:pPr>
-              <a:spcBef>
-                <a:spcPts val="800"/>
-              </a:spcBef>
-              <a:defRPr sz="1200">
-                <a:solidFill>
-                  <a:srgbClr val="0F172A"/>
-                </a:solidFill>
-              </a:defRPr>
-            </a:pPr>
-            <a:r>
-              <a:t>• Variational PQC: Encodes angles using Pauli-Y rotations, entangles qubits with circular CNOT rings, and measures Pauli-Z expectation values.</a:t>
-            </a:r>
-          </a:p>
-          <a:p>
-            <a:pPr>
-              <a:spcBef>
-                <a:spcPts val="800"/>
-              </a:spcBef>
-              <a:defRPr sz="1200">
-                <a:solidFill>
-                  <a:srgbClr val="0F172A"/>
-                </a:solidFill>
-              </a:defRPr>
-            </a:pPr>
-            <a:r>
-              <a:t>• Linear Head: Maps expectation values directly to 5 ordinal class logits.</a:t>
-            </a:r>
-          </a:p>
-        </p:txBody>
-      </p:sp>
-      <p:sp>
-        <p:nvSpPr>
-          <p:cNvPr id="8" name="Rounded Rectangle 7"/>
-          <p:cNvSpPr/>
-          <p:nvPr/>
-        </p:nvSpPr>
-        <p:spPr>
-          <a:xfrm>
-            <a:off x="6309360" y="1280160"/>
-            <a:ext cx="5120640" cy="4937760"/>
-          </a:xfrm>
-          <a:prstGeom prst="roundRect">
-            <a:avLst/>
-          </a:prstGeom>
-          <a:solidFill>
-            <a:srgbClr val="FFFFFF"/>
-          </a:solidFill>
-          <a:ln w="12700">
-            <a:solidFill>
-              <a:srgbClr val="E2E8F0"/>
-            </a:solidFill>
-          </a:ln>
-        </p:spPr>
-        <p:style>
-          <a:lnRef idx="1">
-            <a:schemeClr val="accent1"/>
-          </a:lnRef>
-          <a:fillRef idx="3">
-            <a:schemeClr val="accent1"/>
-          </a:fillRef>
-          <a:effectRef idx="2">
-            <a:schemeClr val="accent1"/>
-          </a:effectRef>
-          <a:fontRef idx="minor">
-            <a:schemeClr val="lt1"/>
-          </a:fontRef>
-        </p:style>
-        <p:txBody>
-          <a:bodyPr rtlCol="0" anchor="ctr"/>
-          <a:lstStyle/>
-          <a:p>
-            <a:pPr algn="ctr"/>
-          </a:p>
-        </p:txBody>
-      </p:sp>
-      <p:sp>
-        <p:nvSpPr>
-          <p:cNvPr id="9" name="TextBox 8"/>
-          <p:cNvSpPr txBox="1"/>
-          <p:nvPr/>
-        </p:nvSpPr>
-        <p:spPr>
-          <a:xfrm>
-            <a:off x="6492240" y="1463040"/>
-            <a:ext cx="4754880" cy="4572000"/>
-          </a:xfrm>
-          <a:prstGeom prst="rect">
-            <a:avLst/>
-          </a:prstGeom>
-          <a:noFill/>
-        </p:spPr>
-        <p:txBody>
-          <a:bodyPr wrap="square">
-            <a:spAutoFit/>
-          </a:bodyPr>
-          <a:lstStyle/>
-          <a:p>
-            <a:pPr>
-              <a:defRPr sz="1600" b="1">
-                <a:solidFill>
-                  <a:srgbClr val="1E3A8A"/>
-                </a:solidFill>
-              </a:defRPr>
-            </a:pPr>
-            <a:r>
-              <a:t>Technical Approach &amp; Feasibility Proof</a:t>
-            </a:r>
-          </a:p>
-          <a:p>
-            <a:pPr>
-              <a:spcBef>
-                <a:spcPts val="800"/>
-              </a:spcBef>
-              <a:defRPr sz="1200">
-                <a:solidFill>
-                  <a:srgbClr val="0F172A"/>
-                </a:solidFill>
-              </a:defRPr>
-            </a:pPr>
-            <a:r>
-              <a:t>• NISQ Feasibility: Shallow circuit depth (L=1) and low qubit count (n=4) prevent decoherence and bypass the Barren Plateau problem (gradient vanishing).</a:t>
-            </a:r>
-          </a:p>
-          <a:p>
-            <a:pPr>
-              <a:spcBef>
-                <a:spcPts val="800"/>
-              </a:spcBef>
-              <a:defRPr sz="1200">
-                <a:solidFill>
-                  <a:srgbClr val="0F172A"/>
-                </a:solidFill>
-              </a:defRPr>
-            </a:pPr>
-            <a:r>
-              <a:t>• Hardware-Ready Gradients: Analytical Parameter-Shift Rule computes exact gradients on physical QPUs without intermediate wavefunction readout.</a:t>
-            </a:r>
-          </a:p>
-          <a:p>
-            <a:pPr>
-              <a:spcBef>
-                <a:spcPts val="800"/>
-              </a:spcBef>
-              <a:defRPr sz="1200">
-                <a:solidFill>
-                  <a:srgbClr val="0F172A"/>
-                </a:solidFill>
-              </a:defRPr>
-            </a:pPr>
-            <a:r>
-              <a:t>• Computational Feasibility: Disk caching of 512-d feature embeddings reduces epoch training from 45 minutes to 12 seconds, enabling rapid iteration.</a:t>
-            </a:r>
-          </a:p>
-          <a:p>
-            <a:pPr>
-              <a:spcBef>
-                <a:spcPts val="800"/>
-              </a:spcBef>
-              <a:defRPr sz="1200">
-                <a:solidFill>
-                  <a:srgbClr val="0F172A"/>
-                </a:solidFill>
-              </a:defRPr>
-            </a:pPr>
-            <a:r>
-              <a:t>• Zero-Cost Cloud Deployment: Runs on Google Colab (T4 GPU), PennyLane default.qubit simulator, and IBM Quantum open cloud access.</a:t>
-            </a:r>
-          </a:p>
-        </p:txBody>
-      </p:sp>
-    </p:spTree>
-  </p:cSld>
-  <p:clrMapOvr>
-    <a:masterClrMapping/>
-  </p:clrMapOvr>
-</p:sld>
-</file>
-
 <file path=ppt/slides/slide6.xml><?xml version="1.0" encoding="utf-8"?>
 <p:sld xmlns:a="http://schemas.openxmlformats.org/drawingml/2006/main" xmlns:p="http://schemas.openxmlformats.org/presentationml/2006/main" xmlns:r="http://schemas.openxmlformats.org/officeDocument/2006/relationships">
   <p:cSld>
@@ -8391,82 +7541,82 @@
           <a:noFill/>
         </p:spPr>
         <p:txBody>
-          <a:bodyPr wrap="square">
-            <a:spAutoFit/>
-          </a:bodyPr>
-          <a:lstStyle/>
-          <a:p>
-            <a:pPr>
-              <a:defRPr sz="1100" b="1">
-                <a:solidFill>
-                  <a:srgbClr val="0D9488"/>
-                </a:solidFill>
-              </a:defRPr>
-            </a:pPr>
-            <a:r>
-              <a:t>EDI PARAMETER 6: SYSTEM ARCHITECTURE</a:t>
-            </a:r>
-          </a:p>
-        </p:txBody>
-      </p:sp>
-      <p:sp>
-        <p:nvSpPr>
-          <p:cNvPr id="4" name="TextBox 3"/>
-          <p:cNvSpPr txBox="1"/>
-          <p:nvPr/>
-        </p:nvSpPr>
-        <p:spPr>
-          <a:xfrm>
-            <a:off x="731520" y="365760"/>
-            <a:ext cx="10698480" cy="502920"/>
-          </a:xfrm>
-          <a:prstGeom prst="rect">
-            <a:avLst/>
-          </a:prstGeom>
-          <a:noFill/>
-        </p:spPr>
-        <p:txBody>
-          <a:bodyPr wrap="square">
-            <a:spAutoFit/>
-          </a:bodyPr>
-          <a:lstStyle/>
-          <a:p>
-            <a:pPr>
-              <a:defRPr sz="2200" b="1">
-                <a:solidFill>
-                  <a:srgbClr val="FFFFFF"/>
-                </a:solidFill>
-              </a:defRPr>
-            </a:pPr>
-            <a:r>
-              <a:t>System Architecture: End-to-End Hybrid Quantum-Classical Pipeline</a:t>
-            </a:r>
-          </a:p>
-        </p:txBody>
-      </p:sp>
-      <p:sp>
-        <p:nvSpPr>
-          <p:cNvPr id="5" name="TextBox 4"/>
-          <p:cNvSpPr txBox="1"/>
-          <p:nvPr/>
-        </p:nvSpPr>
-        <p:spPr>
-          <a:xfrm>
-            <a:off x="731520" y="6492240"/>
-            <a:ext cx="10698480" cy="274320"/>
-          </a:xfrm>
-          <a:prstGeom prst="rect">
-            <a:avLst/>
-          </a:prstGeom>
-          <a:noFill/>
-        </p:spPr>
-        <p:txBody>
           <a:bodyPr wrap="none">
             <a:spAutoFit/>
           </a:bodyPr>
           <a:lstStyle/>
           <a:p>
             <a:pPr>
+              <a:defRPr sz="1100" b="1">
+                <a:solidFill>
+                  <a:srgbClr val="0D9488"/>
+                </a:solidFill>
+              </a:defRPr>
+            </a:pPr>
+            <a:r>
+              <a:t>TECHNICAL METHODOLOGY</a:t>
+            </a:r>
+          </a:p>
+        </p:txBody>
+      </p:sp>
+      <p:sp>
+        <p:nvSpPr>
+          <p:cNvPr id="4" name="TextBox 3"/>
+          <p:cNvSpPr txBox="1"/>
+          <p:nvPr/>
+        </p:nvSpPr>
+        <p:spPr>
+          <a:xfrm>
+            <a:off x="731520" y="365760"/>
+            <a:ext cx="10698480" cy="502920"/>
+          </a:xfrm>
+          <a:prstGeom prst="rect">
+            <a:avLst/>
+          </a:prstGeom>
+          <a:noFill/>
+        </p:spPr>
+        <p:txBody>
+          <a:bodyPr wrap="none">
+            <a:spAutoFit/>
+          </a:bodyPr>
+          <a:lstStyle/>
+          <a:p>
+            <a:pPr>
+              <a:defRPr sz="2200" b="1">
+                <a:solidFill>
+                  <a:srgbClr val="FFFFFF"/>
+                </a:solidFill>
+              </a:defRPr>
+            </a:pPr>
+            <a:r>
+              <a:t>Methodology: Clinical Preprocessing &amp; Mathematical Formulations</a:t>
+            </a:r>
+          </a:p>
+        </p:txBody>
+      </p:sp>
+      <p:sp>
+        <p:nvSpPr>
+          <p:cNvPr id="5" name="TextBox 4"/>
+          <p:cNvSpPr txBox="1"/>
+          <p:nvPr/>
+        </p:nvSpPr>
+        <p:spPr>
+          <a:xfrm>
+            <a:off x="731520" y="6492240"/>
+            <a:ext cx="10698480" cy="274320"/>
+          </a:xfrm>
+          <a:prstGeom prst="rect">
+            <a:avLst/>
+          </a:prstGeom>
+          <a:noFill/>
+        </p:spPr>
+        <p:txBody>
+          <a:bodyPr wrap="none">
+            <a:spAutoFit/>
+          </a:bodyPr>
+          <a:lstStyle/>
+          <a:p>
+            <a:pPr>
               <a:defRPr sz="900">
                 <a:solidFill>
                   <a:srgbClr val="475569"/>
@@ -8474,7 +7624,7 @@
               </a:defRPr>
             </a:pPr>
             <a:r>
-              <a:t>EDI Mid-Semester Assessment | Project ID: ERI 5 / TY_CSE_10 | Hybrid Quantum-Classical CNN for Retinal Disease</a:t>
+              <a:t>EDI Mid-Semester Assessment | Project ID: ERI 5 / TY_CSE_10 | HQNN for Retinal Disease Classification</a:t>
             </a:r>
           </a:p>
         </p:txBody>
@@ -8487,523 +7637,8 @@
         </p:nvSpPr>
         <p:spPr>
           <a:xfrm>
-            <a:off x="731520" y="1371600"/>
-            <a:ext cx="2011680" cy="2286000"/>
-          </a:xfrm>
-          <a:prstGeom prst="roundRect">
-            <a:avLst/>
-          </a:prstGeom>
-          <a:solidFill>
-            <a:srgbClr val="FFFFFF"/>
-          </a:solidFill>
-          <a:ln w="12700">
-            <a:solidFill>
-              <a:srgbClr val="0D9488"/>
-            </a:solidFill>
-          </a:ln>
-        </p:spPr>
-        <p:style>
-          <a:lnRef idx="1">
-            <a:schemeClr val="accent1"/>
-          </a:lnRef>
-          <a:fillRef idx="3">
-            <a:schemeClr val="accent1"/>
-          </a:fillRef>
-          <a:effectRef idx="2">
-            <a:schemeClr val="accent1"/>
-          </a:effectRef>
-          <a:fontRef idx="minor">
-            <a:schemeClr val="lt1"/>
-          </a:fontRef>
-        </p:style>
-        <p:txBody>
-          <a:bodyPr rtlCol="0" anchor="ctr"/>
-          <a:lstStyle/>
-          <a:p>
-            <a:pPr algn="ctr"/>
-          </a:p>
-        </p:txBody>
-      </p:sp>
-      <p:sp>
-        <p:nvSpPr>
-          <p:cNvPr id="7" name="TextBox 6"/>
-          <p:cNvSpPr txBox="1"/>
-          <p:nvPr/>
-        </p:nvSpPr>
-        <p:spPr>
-          <a:xfrm>
-            <a:off x="822960" y="1463040"/>
-            <a:ext cx="1828800" cy="2103120"/>
-          </a:xfrm>
-          <a:prstGeom prst="rect">
-            <a:avLst/>
-          </a:prstGeom>
-          <a:noFill/>
-        </p:spPr>
-        <p:txBody>
-          <a:bodyPr wrap="square">
-            <a:spAutoFit/>
-          </a:bodyPr>
-          <a:lstStyle/>
-          <a:p>
-            <a:pPr>
-              <a:defRPr sz="1200" b="1">
-                <a:solidFill>
-                  <a:srgbClr val="0D9488"/>
-                </a:solidFill>
-              </a:defRPr>
-            </a:pPr>
-            <a:r>
-              <a:t>1. Preprocessing</a:t>
-            </a:r>
-          </a:p>
-          <a:p>
-            <a:pPr>
-              <a:spcBef>
-                <a:spcPts val="800"/>
-              </a:spcBef>
-              <a:defRPr sz="1000">
-                <a:solidFill>
-                  <a:srgbClr val="0F172A"/>
-                </a:solidFill>
-              </a:defRPr>
-            </a:pPr>
-            <a:r>
-              <a:t>Ben Graham Circular Crop</a:t>
-            </a:r>
-            <a:br/>
-            <a:r>
-              <a:t>Green CLAHE Isolation</a:t>
-            </a:r>
-            <a:br/>
-            <a:r>
-              <a:t>Resize: 224 x 224 x 3</a:t>
-            </a:r>
-          </a:p>
-        </p:txBody>
-      </p:sp>
-      <p:sp>
-        <p:nvSpPr>
-          <p:cNvPr id="8" name="Rounded Rectangle 7"/>
-          <p:cNvSpPr/>
-          <p:nvPr/>
-        </p:nvSpPr>
-        <p:spPr>
-          <a:xfrm>
-            <a:off x="2926080" y="1371600"/>
-            <a:ext cx="2011680" cy="2286000"/>
-          </a:xfrm>
-          <a:prstGeom prst="roundRect">
-            <a:avLst/>
-          </a:prstGeom>
-          <a:solidFill>
-            <a:srgbClr val="FFFFFF"/>
-          </a:solidFill>
-          <a:ln w="12700">
-            <a:solidFill>
-              <a:srgbClr val="1E3A8A"/>
-            </a:solidFill>
-          </a:ln>
-        </p:spPr>
-        <p:style>
-          <a:lnRef idx="1">
-            <a:schemeClr val="accent1"/>
-          </a:lnRef>
-          <a:fillRef idx="3">
-            <a:schemeClr val="accent1"/>
-          </a:fillRef>
-          <a:effectRef idx="2">
-            <a:schemeClr val="accent1"/>
-          </a:effectRef>
-          <a:fontRef idx="minor">
-            <a:schemeClr val="lt1"/>
-          </a:fontRef>
-        </p:style>
-        <p:txBody>
-          <a:bodyPr rtlCol="0" anchor="ctr"/>
-          <a:lstStyle/>
-          <a:p>
-            <a:pPr algn="ctr"/>
-          </a:p>
-        </p:txBody>
-      </p:sp>
-      <p:sp>
-        <p:nvSpPr>
-          <p:cNvPr id="9" name="TextBox 8"/>
-          <p:cNvSpPr txBox="1"/>
-          <p:nvPr/>
-        </p:nvSpPr>
-        <p:spPr>
-          <a:xfrm>
-            <a:off x="3017520" y="1463040"/>
-            <a:ext cx="1828800" cy="2103120"/>
-          </a:xfrm>
-          <a:prstGeom prst="rect">
-            <a:avLst/>
-          </a:prstGeom>
-          <a:noFill/>
-        </p:spPr>
-        <p:txBody>
-          <a:bodyPr wrap="square">
-            <a:spAutoFit/>
-          </a:bodyPr>
-          <a:lstStyle/>
-          <a:p>
-            <a:pPr>
-              <a:defRPr sz="1200" b="1">
-                <a:solidFill>
-                  <a:srgbClr val="1E3A8A"/>
-                </a:solidFill>
-              </a:defRPr>
-            </a:pPr>
-            <a:r>
-              <a:t>2. Classical Backbone</a:t>
-            </a:r>
-          </a:p>
-          <a:p>
-            <a:pPr>
-              <a:spcBef>
-                <a:spcPts val="800"/>
-              </a:spcBef>
-              <a:defRPr sz="1000">
-                <a:solidFill>
-                  <a:srgbClr val="0F172A"/>
-                </a:solidFill>
-              </a:defRPr>
-            </a:pPr>
-            <a:r>
-              <a:t>ResNet18 (ImageNet)</a:t>
-            </a:r>
-            <a:br/>
-            <a:r>
-              <a:t>Frozen Feature Extractor</a:t>
-            </a:r>
-            <a:br/>
-            <a:r>
-              <a:t>Output: 512-d Vector</a:t>
-            </a:r>
-          </a:p>
-        </p:txBody>
-      </p:sp>
-      <p:sp>
-        <p:nvSpPr>
-          <p:cNvPr id="10" name="Rounded Rectangle 9"/>
-          <p:cNvSpPr/>
-          <p:nvPr/>
-        </p:nvSpPr>
-        <p:spPr>
-          <a:xfrm>
-            <a:off x="5120640" y="1371600"/>
-            <a:ext cx="2011680" cy="2286000"/>
-          </a:xfrm>
-          <a:prstGeom prst="roundRect">
-            <a:avLst/>
-          </a:prstGeom>
-          <a:solidFill>
-            <a:srgbClr val="FFFFFF"/>
-          </a:solidFill>
-          <a:ln w="12700">
-            <a:solidFill>
-              <a:srgbClr val="0D9488"/>
-            </a:solidFill>
-          </a:ln>
-        </p:spPr>
-        <p:style>
-          <a:lnRef idx="1">
-            <a:schemeClr val="accent1"/>
-          </a:lnRef>
-          <a:fillRef idx="3">
-            <a:schemeClr val="accent1"/>
-          </a:fillRef>
-          <a:effectRef idx="2">
-            <a:schemeClr val="accent1"/>
-          </a:effectRef>
-          <a:fontRef idx="minor">
-            <a:schemeClr val="lt1"/>
-          </a:fontRef>
-        </p:style>
-        <p:txBody>
-          <a:bodyPr rtlCol="0" anchor="ctr"/>
-          <a:lstStyle/>
-          <a:p>
-            <a:pPr algn="ctr"/>
-          </a:p>
-        </p:txBody>
-      </p:sp>
-      <p:sp>
-        <p:nvSpPr>
-          <p:cNvPr id="11" name="TextBox 10"/>
-          <p:cNvSpPr txBox="1"/>
-          <p:nvPr/>
-        </p:nvSpPr>
-        <p:spPr>
-          <a:xfrm>
-            <a:off x="5212079" y="1463040"/>
-            <a:ext cx="1828800" cy="2103120"/>
-          </a:xfrm>
-          <a:prstGeom prst="rect">
-            <a:avLst/>
-          </a:prstGeom>
-          <a:noFill/>
-        </p:spPr>
-        <p:txBody>
-          <a:bodyPr wrap="square">
-            <a:spAutoFit/>
-          </a:bodyPr>
-          <a:lstStyle/>
-          <a:p>
-            <a:pPr>
-              <a:defRPr sz="1200" b="1">
-                <a:solidFill>
-                  <a:srgbClr val="0D9488"/>
-                </a:solidFill>
-              </a:defRPr>
-            </a:pPr>
-            <a:r>
-              <a:t>3. Compression Stage</a:t>
-            </a:r>
-          </a:p>
-          <a:p>
-            <a:pPr>
-              <a:spcBef>
-                <a:spcPts val="800"/>
-              </a:spcBef>
-              <a:defRPr sz="1000">
-                <a:solidFill>
-                  <a:srgbClr val="0F172A"/>
-                </a:solidFill>
-              </a:defRPr>
-            </a:pPr>
-            <a:r>
-              <a:t>Linear / Autoencoder / PCA</a:t>
-            </a:r>
-            <a:br/>
-            <a:r>
-              <a:t>Output: n_qubits angles</a:t>
-            </a:r>
-            <a:br/>
-            <a:r>
-              <a:t>Domain: [-pi, pi]</a:t>
-            </a:r>
-          </a:p>
-        </p:txBody>
-      </p:sp>
-      <p:sp>
-        <p:nvSpPr>
-          <p:cNvPr id="12" name="Rounded Rectangle 11"/>
-          <p:cNvSpPr/>
-          <p:nvPr/>
-        </p:nvSpPr>
-        <p:spPr>
-          <a:xfrm>
-            <a:off x="7315199" y="1371600"/>
-            <a:ext cx="2011680" cy="2286000"/>
-          </a:xfrm>
-          <a:prstGeom prst="roundRect">
-            <a:avLst/>
-          </a:prstGeom>
-          <a:solidFill>
-            <a:srgbClr val="FFFFFF"/>
-          </a:solidFill>
-          <a:ln w="12700">
-            <a:solidFill>
-              <a:srgbClr val="1E3A8A"/>
-            </a:solidFill>
-          </a:ln>
-        </p:spPr>
-        <p:style>
-          <a:lnRef idx="1">
-            <a:schemeClr val="accent1"/>
-          </a:lnRef>
-          <a:fillRef idx="3">
-            <a:schemeClr val="accent1"/>
-          </a:fillRef>
-          <a:effectRef idx="2">
-            <a:schemeClr val="accent1"/>
-          </a:effectRef>
-          <a:fontRef idx="minor">
-            <a:schemeClr val="lt1"/>
-          </a:fontRef>
-        </p:style>
-        <p:txBody>
-          <a:bodyPr rtlCol="0" anchor="ctr"/>
-          <a:lstStyle/>
-          <a:p>
-            <a:pPr algn="ctr"/>
-          </a:p>
-        </p:txBody>
-      </p:sp>
-      <p:sp>
-        <p:nvSpPr>
-          <p:cNvPr id="13" name="TextBox 12"/>
-          <p:cNvSpPr txBox="1"/>
-          <p:nvPr/>
-        </p:nvSpPr>
-        <p:spPr>
-          <a:xfrm>
-            <a:off x="7406640" y="1463040"/>
-            <a:ext cx="1828800" cy="2103120"/>
-          </a:xfrm>
-          <a:prstGeom prst="rect">
-            <a:avLst/>
-          </a:prstGeom>
-          <a:noFill/>
-        </p:spPr>
-        <p:txBody>
-          <a:bodyPr wrap="square">
-            <a:spAutoFit/>
-          </a:bodyPr>
-          <a:lstStyle/>
-          <a:p>
-            <a:pPr>
-              <a:defRPr sz="1200" b="1">
-                <a:solidFill>
-                  <a:srgbClr val="1E3A8A"/>
-                </a:solidFill>
-              </a:defRPr>
-            </a:pPr>
-            <a:r>
-              <a:t>4. Quantum PQC</a:t>
-            </a:r>
-          </a:p>
-          <a:p>
-            <a:pPr>
-              <a:spcBef>
-                <a:spcPts val="800"/>
-              </a:spcBef>
-              <a:defRPr sz="1000">
-                <a:solidFill>
-                  <a:srgbClr val="0F172A"/>
-                </a:solidFill>
-              </a:defRPr>
-            </a:pPr>
-            <a:r>
-              <a:t>AngleEmbedding(Ry)</a:t>
-            </a:r>
-            <a:br/>
-            <a:r>
-              <a:t>StronglyEntanglingLayers</a:t>
-            </a:r>
-            <a:br/>
-            <a:r>
-              <a:t>Pauli-Z Expectation: [-1, 1]</a:t>
-            </a:r>
-          </a:p>
-        </p:txBody>
-      </p:sp>
-      <p:sp>
-        <p:nvSpPr>
-          <p:cNvPr id="14" name="Rounded Rectangle 13"/>
-          <p:cNvSpPr/>
-          <p:nvPr/>
-        </p:nvSpPr>
-        <p:spPr>
-          <a:xfrm>
-            <a:off x="9509760" y="1371600"/>
-            <a:ext cx="2011680" cy="2286000"/>
-          </a:xfrm>
-          <a:prstGeom prst="roundRect">
-            <a:avLst/>
-          </a:prstGeom>
-          <a:solidFill>
-            <a:srgbClr val="FFFFFF"/>
-          </a:solidFill>
-          <a:ln w="12700">
-            <a:solidFill>
-              <a:srgbClr val="0D9488"/>
-            </a:solidFill>
-          </a:ln>
-        </p:spPr>
-        <p:style>
-          <a:lnRef idx="1">
-            <a:schemeClr val="accent1"/>
-          </a:lnRef>
-          <a:fillRef idx="3">
-            <a:schemeClr val="accent1"/>
-          </a:fillRef>
-          <a:effectRef idx="2">
-            <a:schemeClr val="accent1"/>
-          </a:effectRef>
-          <a:fontRef idx="minor">
-            <a:schemeClr val="lt1"/>
-          </a:fontRef>
-        </p:style>
-        <p:txBody>
-          <a:bodyPr rtlCol="0" anchor="ctr"/>
-          <a:lstStyle/>
-          <a:p>
-            <a:pPr algn="ctr"/>
-          </a:p>
-        </p:txBody>
-      </p:sp>
-      <p:sp>
-        <p:nvSpPr>
-          <p:cNvPr id="15" name="TextBox 14"/>
-          <p:cNvSpPr txBox="1"/>
-          <p:nvPr/>
-        </p:nvSpPr>
-        <p:spPr>
-          <a:xfrm>
-            <a:off x="9601200" y="1463040"/>
-            <a:ext cx="1828800" cy="2103120"/>
-          </a:xfrm>
-          <a:prstGeom prst="rect">
-            <a:avLst/>
-          </a:prstGeom>
-          <a:noFill/>
-        </p:spPr>
-        <p:txBody>
-          <a:bodyPr wrap="square">
-            <a:spAutoFit/>
-          </a:bodyPr>
-          <a:lstStyle/>
-          <a:p>
-            <a:pPr>
-              <a:defRPr sz="1200" b="1">
-                <a:solidFill>
-                  <a:srgbClr val="0D9488"/>
-                </a:solidFill>
-              </a:defRPr>
-            </a:pPr>
-            <a:r>
-              <a:t>5. Output Head</a:t>
-            </a:r>
-          </a:p>
-          <a:p>
-            <a:pPr>
-              <a:spcBef>
-                <a:spcPts val="800"/>
-              </a:spcBef>
-              <a:defRPr sz="1000">
-                <a:solidFill>
-                  <a:srgbClr val="0F172A"/>
-                </a:solidFill>
-              </a:defRPr>
-            </a:pPr>
-            <a:r>
-              <a:t>Linear Head (n -&gt; 5)</a:t>
-            </a:r>
-            <a:br/>
-            <a:r>
-              <a:t>Softmax Probabilities</a:t>
-            </a:r>
-            <a:br/>
-            <a:r>
-              <a:t>Focal Loss Optimization</a:t>
-            </a:r>
-          </a:p>
-        </p:txBody>
-      </p:sp>
-      <p:sp>
-        <p:nvSpPr>
-          <p:cNvPr id="16" name="Rounded Rectangle 15"/>
-          <p:cNvSpPr/>
-          <p:nvPr/>
-        </p:nvSpPr>
-        <p:spPr>
-          <a:xfrm>
-            <a:off x="731520" y="3931920"/>
-            <a:ext cx="10725912" cy="2286000"/>
+            <a:off x="731520" y="1280160"/>
+            <a:ext cx="3410712" cy="2286000"/>
           </a:xfrm>
           <a:prstGeom prst="roundRect">
             <a:avLst/>
@@ -9041,14 +7676,14 @@
       </p:sp>
       <p:sp>
         <p:nvSpPr>
-          <p:cNvPr id="17" name="TextBox 16"/>
+          <p:cNvPr id="7" name="TextBox 6"/>
           <p:cNvSpPr txBox="1"/>
           <p:nvPr/>
         </p:nvSpPr>
         <p:spPr>
           <a:xfrm>
-            <a:off x="914400" y="4023360"/>
-            <a:ext cx="10360152" cy="2103120"/>
+            <a:off x="868680" y="1417319"/>
+            <a:ext cx="3136392" cy="2011680"/>
           </a:xfrm>
           <a:prstGeom prst="rect">
             <a:avLst/>
@@ -9062,74 +7697,557 @@
           <a:lstStyle/>
           <a:p>
             <a:pPr>
-              <a:defRPr sz="1300" b="1">
+              <a:defRPr sz="1200" b="1">
                 <a:solidFill>
                   <a:srgbClr val="1E3A8A"/>
                 </a:solidFill>
               </a:defRPr>
             </a:pPr>
             <a:r>
-              <a:t>Detailed Component Ledger &amp; Device Interfacing:</a:t>
+              <a:t>1. Clinical Preprocessing</a:t>
             </a:r>
           </a:p>
           <a:p>
             <a:pPr>
               <a:spcBef>
-                <a:spcPts val="400"/>
+                <a:spcPts val="600"/>
               </a:spcBef>
-              <a:defRPr sz="1100">
+              <a:defRPr sz="1000">
                 <a:solidFill>
                   <a:srgbClr val="0F172A"/>
                 </a:solidFill>
               </a:defRPr>
             </a:pPr>
             <a:r>
-              <a:t>• Feature Caching Interface: Extracted 512-d vectors cached to data/features/train_features_full.pt to eliminate redundant CNN forward passes.</a:t>
+              <a:t>• Ben Graham Circular Crop: Automates contour thresholding, circular masking, and black margin removal.</a:t>
+            </a:r>
+            <a:br/>
+            <a:r>
+              <a:t>• Green-Channel CLAHE: Isolates 540-575nm spectrum where hemoglobin absorbs light, maximizing lesion contrast.</a:t>
+            </a:r>
+            <a:br/>
+            <a:r>
+              <a:t>• Bilinear Resize: Standardizes images to 224x224x3.</a:t>
+            </a:r>
+          </a:p>
+        </p:txBody>
+      </p:sp>
+      <p:sp>
+        <p:nvSpPr>
+          <p:cNvPr id="8" name="Rounded Rectangle 7"/>
+          <p:cNvSpPr/>
+          <p:nvPr/>
+        </p:nvSpPr>
+        <p:spPr>
+          <a:xfrm>
+            <a:off x="4389120" y="1280160"/>
+            <a:ext cx="3410712" cy="2286000"/>
+          </a:xfrm>
+          <a:prstGeom prst="roundRect">
+            <a:avLst/>
+          </a:prstGeom>
+          <a:solidFill>
+            <a:srgbClr val="FFFFFF"/>
+          </a:solidFill>
+          <a:ln w="12700">
+            <a:solidFill>
+              <a:srgbClr val="E2E8F0"/>
+            </a:solidFill>
+          </a:ln>
+        </p:spPr>
+        <p:style>
+          <a:lnRef idx="1">
+            <a:schemeClr val="accent1"/>
+          </a:lnRef>
+          <a:fillRef idx="3">
+            <a:schemeClr val="accent1"/>
+          </a:fillRef>
+          <a:effectRef idx="2">
+            <a:schemeClr val="accent1"/>
+          </a:effectRef>
+          <a:fontRef idx="minor">
+            <a:schemeClr val="lt1"/>
+          </a:fontRef>
+        </p:style>
+        <p:txBody>
+          <a:bodyPr rtlCol="0" anchor="ctr"/>
+          <a:lstStyle/>
+          <a:p>
+            <a:pPr algn="ctr"/>
+          </a:p>
+        </p:txBody>
+      </p:sp>
+      <p:sp>
+        <p:nvSpPr>
+          <p:cNvPr id="9" name="TextBox 8"/>
+          <p:cNvSpPr txBox="1"/>
+          <p:nvPr/>
+        </p:nvSpPr>
+        <p:spPr>
+          <a:xfrm>
+            <a:off x="4526280" y="1417319"/>
+            <a:ext cx="3136392" cy="2011680"/>
+          </a:xfrm>
+          <a:prstGeom prst="rect">
+            <a:avLst/>
+          </a:prstGeom>
+          <a:noFill/>
+        </p:spPr>
+        <p:txBody>
+          <a:bodyPr wrap="square">
+            <a:spAutoFit/>
+          </a:bodyPr>
+          <a:lstStyle/>
+          <a:p>
+            <a:pPr>
+              <a:defRPr sz="1200" b="1">
+                <a:solidFill>
+                  <a:srgbClr val="0D9488"/>
+                </a:solidFill>
+              </a:defRPr>
+            </a:pPr>
+            <a:r>
+              <a:t>2. Class-Weighted Focal Loss</a:t>
             </a:r>
           </a:p>
           <a:p>
             <a:pPr>
               <a:spcBef>
-                <a:spcPts val="400"/>
+                <a:spcPts val="600"/>
               </a:spcBef>
-              <a:defRPr sz="1100">
+              <a:defRPr sz="1000">
                 <a:solidFill>
                   <a:srgbClr val="0F172A"/>
                 </a:solidFill>
               </a:defRPr>
             </a:pPr>
             <a:r>
-              <a:t>• CPU-GPU Device Bridge: Automatically moves compressed angles to .cpu() before calling PennyLane's default.qubit simulator, and transfers output back via .to(device) for the PyTorch classification head.</a:t>
+              <a:t>L_Focal = -sum y_c * alpha_c * (1 - p_c)^gamma * log(p_c)</a:t>
+            </a:r>
+            <a:br/>
+            <a:br/>
+            <a:r>
+              <a:t>• gamma = 2.0 suppresses easy majority-class gradients (Grade 0)</a:t>
+            </a:r>
+            <a:br/>
+            <a:r>
+              <a:t>• alpha_c = N / (C * N_c) enforces 9.3x higher penalty on rare Grade 3 lesions.</a:t>
+            </a:r>
+          </a:p>
+        </p:txBody>
+      </p:sp>
+      <p:sp>
+        <p:nvSpPr>
+          <p:cNvPr id="10" name="Rounded Rectangle 9"/>
+          <p:cNvSpPr/>
+          <p:nvPr/>
+        </p:nvSpPr>
+        <p:spPr>
+          <a:xfrm>
+            <a:off x="8046720" y="1280160"/>
+            <a:ext cx="3410712" cy="2286000"/>
+          </a:xfrm>
+          <a:prstGeom prst="roundRect">
+            <a:avLst/>
+          </a:prstGeom>
+          <a:solidFill>
+            <a:srgbClr val="FFFFFF"/>
+          </a:solidFill>
+          <a:ln w="12700">
+            <a:solidFill>
+              <a:srgbClr val="E2E8F0"/>
+            </a:solidFill>
+          </a:ln>
+        </p:spPr>
+        <p:style>
+          <a:lnRef idx="1">
+            <a:schemeClr val="accent1"/>
+          </a:lnRef>
+          <a:fillRef idx="3">
+            <a:schemeClr val="accent1"/>
+          </a:fillRef>
+          <a:effectRef idx="2">
+            <a:schemeClr val="accent1"/>
+          </a:effectRef>
+          <a:fontRef idx="minor">
+            <a:schemeClr val="lt1"/>
+          </a:fontRef>
+        </p:style>
+        <p:txBody>
+          <a:bodyPr rtlCol="0" anchor="ctr"/>
+          <a:lstStyle/>
+          <a:p>
+            <a:pPr algn="ctr"/>
+          </a:p>
+        </p:txBody>
+      </p:sp>
+      <p:sp>
+        <p:nvSpPr>
+          <p:cNvPr id="11" name="TextBox 10"/>
+          <p:cNvSpPr txBox="1"/>
+          <p:nvPr/>
+        </p:nvSpPr>
+        <p:spPr>
+          <a:xfrm>
+            <a:off x="8183880" y="1417319"/>
+            <a:ext cx="3136392" cy="2011680"/>
+          </a:xfrm>
+          <a:prstGeom prst="rect">
+            <a:avLst/>
+          </a:prstGeom>
+          <a:noFill/>
+        </p:spPr>
+        <p:txBody>
+          <a:bodyPr wrap="square">
+            <a:spAutoFit/>
+          </a:bodyPr>
+          <a:lstStyle/>
+          <a:p>
+            <a:pPr>
+              <a:defRPr sz="1200" b="1">
+                <a:solidFill>
+                  <a:srgbClr val="1E3A8A"/>
+                </a:solidFill>
+              </a:defRPr>
+            </a:pPr>
+            <a:r>
+              <a:t>3. Quantum State Preparation</a:t>
             </a:r>
           </a:p>
           <a:p>
             <a:pPr>
               <a:spcBef>
-                <a:spcPts val="400"/>
+                <a:spcPts val="600"/>
               </a:spcBef>
-              <a:defRPr sz="1100">
+              <a:defRPr sz="1000">
                 <a:solidFill>
                   <a:srgbClr val="0F172A"/>
                 </a:solidFill>
               </a:defRPr>
             </a:pPr>
             <a:r>
-              <a:t>• Modularity: The compression stage (Linear, Autoencoder, PCA) and quantum register size (n=4, 8) are completely configuration-driven via YAML configs.</a:t>
+              <a:t>|psi(z)&gt; = (X)_{i=0}^{n-1} Ry(z_i) |0&gt;</a:t>
+            </a:r>
+            <a:br/>
+            <a:br/>
+            <a:r>
+              <a:t>• Continuous angles z_i in [-pi, pi] rotate qubits on Bloch sphere</a:t>
+            </a:r>
+            <a:br/>
+            <a:r>
+              <a:t>• Constant circuit depth O(1); zero multi-qubit CNOT overhead.</a:t>
+            </a:r>
+          </a:p>
+        </p:txBody>
+      </p:sp>
+      <p:sp>
+        <p:nvSpPr>
+          <p:cNvPr id="12" name="Rounded Rectangle 11"/>
+          <p:cNvSpPr/>
+          <p:nvPr/>
+        </p:nvSpPr>
+        <p:spPr>
+          <a:xfrm>
+            <a:off x="731520" y="3749039"/>
+            <a:ext cx="3410712" cy="2286000"/>
+          </a:xfrm>
+          <a:prstGeom prst="roundRect">
+            <a:avLst/>
+          </a:prstGeom>
+          <a:solidFill>
+            <a:srgbClr val="FFFFFF"/>
+          </a:solidFill>
+          <a:ln w="12700">
+            <a:solidFill>
+              <a:srgbClr val="E2E8F0"/>
+            </a:solidFill>
+          </a:ln>
+        </p:spPr>
+        <p:style>
+          <a:lnRef idx="1">
+            <a:schemeClr val="accent1"/>
+          </a:lnRef>
+          <a:fillRef idx="3">
+            <a:schemeClr val="accent1"/>
+          </a:fillRef>
+          <a:effectRef idx="2">
+            <a:schemeClr val="accent1"/>
+          </a:effectRef>
+          <a:fontRef idx="minor">
+            <a:schemeClr val="lt1"/>
+          </a:fontRef>
+        </p:style>
+        <p:txBody>
+          <a:bodyPr rtlCol="0" anchor="ctr"/>
+          <a:lstStyle/>
+          <a:p>
+            <a:pPr algn="ctr"/>
+          </a:p>
+        </p:txBody>
+      </p:sp>
+      <p:sp>
+        <p:nvSpPr>
+          <p:cNvPr id="13" name="TextBox 12"/>
+          <p:cNvSpPr txBox="1"/>
+          <p:nvPr/>
+        </p:nvSpPr>
+        <p:spPr>
+          <a:xfrm>
+            <a:off x="868680" y="3886200"/>
+            <a:ext cx="3136392" cy="2011680"/>
+          </a:xfrm>
+          <a:prstGeom prst="rect">
+            <a:avLst/>
+          </a:prstGeom>
+          <a:noFill/>
+        </p:spPr>
+        <p:txBody>
+          <a:bodyPr wrap="square">
+            <a:spAutoFit/>
+          </a:bodyPr>
+          <a:lstStyle/>
+          <a:p>
+            <a:pPr>
+              <a:defRPr sz="1200" b="1">
+                <a:solidFill>
+                  <a:srgbClr val="0D9488"/>
+                </a:solidFill>
+              </a:defRPr>
+            </a:pPr>
+            <a:r>
+              <a:t>4. Strongly Entangling Ansatz</a:t>
             </a:r>
           </a:p>
           <a:p>
             <a:pPr>
               <a:spcBef>
-                <a:spcPts val="400"/>
+                <a:spcPts val="600"/>
               </a:spcBef>
-              <a:defRPr sz="1100">
+              <a:defRPr sz="1000">
                 <a:solidFill>
                   <a:srgbClr val="0F172A"/>
                 </a:solidFill>
               </a:defRPr>
             </a:pPr>
             <a:r>
-              <a:t>• Backpropagation Flow: Autograd gradients backpropagate seamlessly from the classification head -&gt; quantum circuit weights (via parameter-shift rule) -&gt; compression bottleneck in a single .backward() call.</a:t>
+              <a:t>U(theta) = Prod_{l=1}^L [ U_ent * (X) R(alpha, beta, gamma) ]</a:t>
+            </a:r>
+            <a:br/>
+            <a:br/>
+            <a:r>
+              <a:t>• 3 Euler rotation angles per qubit: Rz(gamma) Ry(beta) Rx(alpha)</a:t>
+            </a:r>
+            <a:br/>
+            <a:r>
+              <a:t>• Periodic circular CNOT ring generates multi-qubit entanglement.</a:t>
+            </a:r>
+          </a:p>
+        </p:txBody>
+      </p:sp>
+      <p:sp>
+        <p:nvSpPr>
+          <p:cNvPr id="14" name="Rounded Rectangle 13"/>
+          <p:cNvSpPr/>
+          <p:nvPr/>
+        </p:nvSpPr>
+        <p:spPr>
+          <a:xfrm>
+            <a:off x="4389120" y="3749039"/>
+            <a:ext cx="3410712" cy="2286000"/>
+          </a:xfrm>
+          <a:prstGeom prst="roundRect">
+            <a:avLst/>
+          </a:prstGeom>
+          <a:solidFill>
+            <a:srgbClr val="FFFFFF"/>
+          </a:solidFill>
+          <a:ln w="12700">
+            <a:solidFill>
+              <a:srgbClr val="E2E8F0"/>
+            </a:solidFill>
+          </a:ln>
+        </p:spPr>
+        <p:style>
+          <a:lnRef idx="1">
+            <a:schemeClr val="accent1"/>
+          </a:lnRef>
+          <a:fillRef idx="3">
+            <a:schemeClr val="accent1"/>
+          </a:fillRef>
+          <a:effectRef idx="2">
+            <a:schemeClr val="accent1"/>
+          </a:effectRef>
+          <a:fontRef idx="minor">
+            <a:schemeClr val="lt1"/>
+          </a:fontRef>
+        </p:style>
+        <p:txBody>
+          <a:bodyPr rtlCol="0" anchor="ctr"/>
+          <a:lstStyle/>
+          <a:p>
+            <a:pPr algn="ctr"/>
+          </a:p>
+        </p:txBody>
+      </p:sp>
+      <p:sp>
+        <p:nvSpPr>
+          <p:cNvPr id="15" name="TextBox 14"/>
+          <p:cNvSpPr txBox="1"/>
+          <p:nvPr/>
+        </p:nvSpPr>
+        <p:spPr>
+          <a:xfrm>
+            <a:off x="4526280" y="3886200"/>
+            <a:ext cx="3136392" cy="2011680"/>
+          </a:xfrm>
+          <a:prstGeom prst="rect">
+            <a:avLst/>
+          </a:prstGeom>
+          <a:noFill/>
+        </p:spPr>
+        <p:txBody>
+          <a:bodyPr wrap="square">
+            <a:spAutoFit/>
+          </a:bodyPr>
+          <a:lstStyle/>
+          <a:p>
+            <a:pPr>
+              <a:defRPr sz="1200" b="1">
+                <a:solidFill>
+                  <a:srgbClr val="1E3A8A"/>
+                </a:solidFill>
+              </a:defRPr>
+            </a:pPr>
+            <a:r>
+              <a:t>5. Parameter-Shift Rule</a:t>
+            </a:r>
+          </a:p>
+          <a:p>
+            <a:pPr>
+              <a:spcBef>
+                <a:spcPts val="600"/>
+              </a:spcBef>
+              <a:defRPr sz="1000">
+                <a:solidFill>
+                  <a:srgbClr val="0F172A"/>
+                </a:solidFill>
+              </a:defRPr>
+            </a:pPr>
+            <a:r>
+              <a:t>d&lt;Z_i&gt;/dtheta_j = (&lt;Z_i&gt;(theta_j + pi/2) - &lt;Z_i&gt;(theta_j - pi/2)) / 2</a:t>
+            </a:r>
+            <a:br/>
+            <a:br/>
+            <a:r>
+              <a:t>• Evaluates exact analytical gradients without intermediate state readout</a:t>
+            </a:r>
+            <a:br/>
+            <a:r>
+              <a:t>• Enables hardware-native backpropagation on physical QPUs.</a:t>
+            </a:r>
+          </a:p>
+        </p:txBody>
+      </p:sp>
+      <p:sp>
+        <p:nvSpPr>
+          <p:cNvPr id="16" name="Rounded Rectangle 15"/>
+          <p:cNvSpPr/>
+          <p:nvPr/>
+        </p:nvSpPr>
+        <p:spPr>
+          <a:xfrm>
+            <a:off x="8046720" y="3749039"/>
+            <a:ext cx="3410712" cy="2286000"/>
+          </a:xfrm>
+          <a:prstGeom prst="roundRect">
+            <a:avLst/>
+          </a:prstGeom>
+          <a:solidFill>
+            <a:srgbClr val="FFFFFF"/>
+          </a:solidFill>
+          <a:ln w="12700">
+            <a:solidFill>
+              <a:srgbClr val="E2E8F0"/>
+            </a:solidFill>
+          </a:ln>
+        </p:spPr>
+        <p:style>
+          <a:lnRef idx="1">
+            <a:schemeClr val="accent1"/>
+          </a:lnRef>
+          <a:fillRef idx="3">
+            <a:schemeClr val="accent1"/>
+          </a:fillRef>
+          <a:effectRef idx="2">
+            <a:schemeClr val="accent1"/>
+          </a:effectRef>
+          <a:fontRef idx="minor">
+            <a:schemeClr val="lt1"/>
+          </a:fontRef>
+        </p:style>
+        <p:txBody>
+          <a:bodyPr rtlCol="0" anchor="ctr"/>
+          <a:lstStyle/>
+          <a:p>
+            <a:pPr algn="ctr"/>
+          </a:p>
+        </p:txBody>
+      </p:sp>
+      <p:sp>
+        <p:nvSpPr>
+          <p:cNvPr id="17" name="TextBox 16"/>
+          <p:cNvSpPr txBox="1"/>
+          <p:nvPr/>
+        </p:nvSpPr>
+        <p:spPr>
+          <a:xfrm>
+            <a:off x="8183880" y="3886200"/>
+            <a:ext cx="3136392" cy="2011680"/>
+          </a:xfrm>
+          <a:prstGeom prst="rect">
+            <a:avLst/>
+          </a:prstGeom>
+          <a:noFill/>
+        </p:spPr>
+        <p:txBody>
+          <a:bodyPr wrap="square">
+            <a:spAutoFit/>
+          </a:bodyPr>
+          <a:lstStyle/>
+          <a:p>
+            <a:pPr>
+              <a:defRPr sz="1200" b="1">
+                <a:solidFill>
+                  <a:srgbClr val="0D9488"/>
+                </a:solidFill>
+              </a:defRPr>
+            </a:pPr>
+            <a:r>
+              <a:t>6. Quadratic Weighted Kappa</a:t>
+            </a:r>
+          </a:p>
+          <a:p>
+            <a:pPr>
+              <a:spcBef>
+                <a:spcPts val="600"/>
+              </a:spcBef>
+              <a:defRPr sz="1000">
+                <a:solidFill>
+                  <a:srgbClr val="0F172A"/>
+                </a:solidFill>
+              </a:defRPr>
+            </a:pPr>
+            <a:r>
+              <a:t>kappa = 1 - (sum w_ij O_ij) / (sum w_ij E_ij)</a:t>
+            </a:r>
+            <a:br/>
+            <a:br/>
+            <a:r>
+              <a:t>w_ij = (i - j)^2 / (C - 1)^2 = (i - j)^2 / 16</a:t>
+            </a:r>
+            <a:br/>
+            <a:r>
+              <a:t>• Penalizes severe clinical misclassifications quadratically (w_0,4 = 1.0 vs w_0,1 = 0.0625).</a:t>
             </a:r>
           </a:p>
         </p:txBody>
@@ -9214,34 +8332,252 @@
           <a:noFill/>
         </p:spPr>
         <p:txBody>
+          <a:bodyPr wrap="none">
+            <a:spAutoFit/>
+          </a:bodyPr>
+          <a:lstStyle/>
+          <a:p>
+            <a:pPr>
+              <a:defRPr sz="1100" b="1">
+                <a:solidFill>
+                  <a:srgbClr val="0D9488"/>
+                </a:solidFill>
+              </a:defRPr>
+            </a:pPr>
+            <a:r>
+              <a:t>SYSTEM DESIGN &amp; TECH STACK</a:t>
+            </a:r>
+          </a:p>
+        </p:txBody>
+      </p:sp>
+      <p:sp>
+        <p:nvSpPr>
+          <p:cNvPr id="4" name="TextBox 3"/>
+          <p:cNvSpPr txBox="1"/>
+          <p:nvPr/>
+        </p:nvSpPr>
+        <p:spPr>
+          <a:xfrm>
+            <a:off x="731520" y="365760"/>
+            <a:ext cx="10698480" cy="502920"/>
+          </a:xfrm>
+          <a:prstGeom prst="rect">
+            <a:avLst/>
+          </a:prstGeom>
+          <a:noFill/>
+        </p:spPr>
+        <p:txBody>
+          <a:bodyPr wrap="none">
+            <a:spAutoFit/>
+          </a:bodyPr>
+          <a:lstStyle/>
+          <a:p>
+            <a:pPr>
+              <a:defRPr sz="2200" b="1">
+                <a:solidFill>
+                  <a:srgbClr val="FFFFFF"/>
+                </a:solidFill>
+              </a:defRPr>
+            </a:pPr>
+            <a:r>
+              <a:t>System Architecture &amp; Technology Stack</a:t>
+            </a:r>
+          </a:p>
+        </p:txBody>
+      </p:sp>
+      <p:sp>
+        <p:nvSpPr>
+          <p:cNvPr id="5" name="TextBox 4"/>
+          <p:cNvSpPr txBox="1"/>
+          <p:nvPr/>
+        </p:nvSpPr>
+        <p:spPr>
+          <a:xfrm>
+            <a:off x="731520" y="6492240"/>
+            <a:ext cx="10698480" cy="274320"/>
+          </a:xfrm>
+          <a:prstGeom prst="rect">
+            <a:avLst/>
+          </a:prstGeom>
+          <a:noFill/>
+        </p:spPr>
+        <p:txBody>
+          <a:bodyPr wrap="none">
+            <a:spAutoFit/>
+          </a:bodyPr>
+          <a:lstStyle/>
+          <a:p>
+            <a:pPr>
+              <a:defRPr sz="900">
+                <a:solidFill>
+                  <a:srgbClr val="475569"/>
+                </a:solidFill>
+              </a:defRPr>
+            </a:pPr>
+            <a:r>
+              <a:t>EDI Mid-Semester Assessment | Project ID: ERI 5 / TY_CSE_10 | HQNN for Retinal Disease Classification</a:t>
+            </a:r>
+          </a:p>
+        </p:txBody>
+      </p:sp>
+      <p:sp>
+        <p:nvSpPr>
+          <p:cNvPr id="6" name="Rounded Rectangle 5"/>
+          <p:cNvSpPr/>
+          <p:nvPr/>
+        </p:nvSpPr>
+        <p:spPr>
+          <a:xfrm>
+            <a:off x="731520" y="1280160"/>
+            <a:ext cx="2011680" cy="2011680"/>
+          </a:xfrm>
+          <a:prstGeom prst="roundRect">
+            <a:avLst/>
+          </a:prstGeom>
+          <a:solidFill>
+            <a:srgbClr val="FFFFFF"/>
+          </a:solidFill>
+          <a:ln w="12700">
+            <a:solidFill>
+              <a:srgbClr val="0D9488"/>
+            </a:solidFill>
+          </a:ln>
+        </p:spPr>
+        <p:style>
+          <a:lnRef idx="1">
+            <a:schemeClr val="accent1"/>
+          </a:lnRef>
+          <a:fillRef idx="3">
+            <a:schemeClr val="accent1"/>
+          </a:fillRef>
+          <a:effectRef idx="2">
+            <a:schemeClr val="accent1"/>
+          </a:effectRef>
+          <a:fontRef idx="minor">
+            <a:schemeClr val="lt1"/>
+          </a:fontRef>
+        </p:style>
+        <p:txBody>
+          <a:bodyPr rtlCol="0" anchor="ctr"/>
+          <a:lstStyle/>
+          <a:p>
+            <a:pPr algn="ctr"/>
+          </a:p>
+        </p:txBody>
+      </p:sp>
+      <p:sp>
+        <p:nvSpPr>
+          <p:cNvPr id="7" name="TextBox 6"/>
+          <p:cNvSpPr txBox="1"/>
+          <p:nvPr/>
+        </p:nvSpPr>
+        <p:spPr>
+          <a:xfrm>
+            <a:off x="822960" y="1371600"/>
+            <a:ext cx="1828800" cy="1828800"/>
+          </a:xfrm>
+          <a:prstGeom prst="rect">
+            <a:avLst/>
+          </a:prstGeom>
+          <a:noFill/>
+        </p:spPr>
+        <p:txBody>
           <a:bodyPr wrap="square">
             <a:spAutoFit/>
           </a:bodyPr>
           <a:lstStyle/>
           <a:p>
             <a:pPr>
-              <a:defRPr sz="1100" b="1">
+              <a:defRPr sz="1200" b="1">
                 <a:solidFill>
                   <a:srgbClr val="0D9488"/>
                 </a:solidFill>
               </a:defRPr>
             </a:pPr>
             <a:r>
-              <a:t>EDI PARAMETER 7: METHODOLOGY</a:t>
-            </a:r>
-          </a:p>
-        </p:txBody>
-      </p:sp>
-      <p:sp>
-        <p:nvSpPr>
-          <p:cNvPr id="4" name="TextBox 3"/>
+              <a:t>1. Preprocessing</a:t>
+            </a:r>
+          </a:p>
+          <a:p>
+            <a:pPr>
+              <a:spcBef>
+                <a:spcPts val="600"/>
+              </a:spcBef>
+              <a:defRPr sz="1000">
+                <a:solidFill>
+                  <a:srgbClr val="0F172A"/>
+                </a:solidFill>
+              </a:defRPr>
+            </a:pPr>
+            <a:r>
+              <a:t>Ben Graham Circular Crop</a:t>
+            </a:r>
+            <a:br/>
+            <a:r>
+              <a:t>Green CLAHE Isolation</a:t>
+            </a:r>
+            <a:br/>
+            <a:r>
+              <a:t>Resize: 224 x 224 x 3</a:t>
+            </a:r>
+          </a:p>
+        </p:txBody>
+      </p:sp>
+      <p:sp>
+        <p:nvSpPr>
+          <p:cNvPr id="8" name="Rounded Rectangle 7"/>
+          <p:cNvSpPr/>
+          <p:nvPr/>
+        </p:nvSpPr>
+        <p:spPr>
+          <a:xfrm>
+            <a:off x="2926080" y="1280160"/>
+            <a:ext cx="2011680" cy="2011680"/>
+          </a:xfrm>
+          <a:prstGeom prst="roundRect">
+            <a:avLst/>
+          </a:prstGeom>
+          <a:solidFill>
+            <a:srgbClr val="FFFFFF"/>
+          </a:solidFill>
+          <a:ln w="12700">
+            <a:solidFill>
+              <a:srgbClr val="1E3A8A"/>
+            </a:solidFill>
+          </a:ln>
+        </p:spPr>
+        <p:style>
+          <a:lnRef idx="1">
+            <a:schemeClr val="accent1"/>
+          </a:lnRef>
+          <a:fillRef idx="3">
+            <a:schemeClr val="accent1"/>
+          </a:fillRef>
+          <a:effectRef idx="2">
+            <a:schemeClr val="accent1"/>
+          </a:effectRef>
+          <a:fontRef idx="minor">
+            <a:schemeClr val="lt1"/>
+          </a:fontRef>
+        </p:style>
+        <p:txBody>
+          <a:bodyPr rtlCol="0" anchor="ctr"/>
+          <a:lstStyle/>
+          <a:p>
+            <a:pPr algn="ctr"/>
+          </a:p>
+        </p:txBody>
+      </p:sp>
+      <p:sp>
+        <p:nvSpPr>
+          <p:cNvPr id="9" name="TextBox 8"/>
           <p:cNvSpPr txBox="1"/>
           <p:nvPr/>
         </p:nvSpPr>
         <p:spPr>
           <a:xfrm>
-            <a:off x="731520" y="365760"/>
-            <a:ext cx="10698480" cy="502920"/>
+            <a:off x="3017520" y="1371600"/>
+            <a:ext cx="1828800" cy="1828800"/>
           </a:xfrm>
           <a:prstGeom prst="rect">
             <a:avLst/>
@@ -9255,28 +8591,96 @@
           <a:lstStyle/>
           <a:p>
             <a:pPr>
-              <a:defRPr sz="2200" b="1">
-                <a:solidFill>
-                  <a:srgbClr val="FFFFFF"/>
-                </a:solidFill>
-              </a:defRPr>
-            </a:pPr>
-            <a:r>
-              <a:t>Methodology: Core Algorithms &amp; Mathematical Formulations</a:t>
-            </a:r>
-          </a:p>
-        </p:txBody>
-      </p:sp>
-      <p:sp>
-        <p:nvSpPr>
-          <p:cNvPr id="5" name="TextBox 4"/>
+              <a:defRPr sz="1200" b="1">
+                <a:solidFill>
+                  <a:srgbClr val="1E3A8A"/>
+                </a:solidFill>
+              </a:defRPr>
+            </a:pPr>
+            <a:r>
+              <a:t>2. Classical Backbone</a:t>
+            </a:r>
+          </a:p>
+          <a:p>
+            <a:pPr>
+              <a:spcBef>
+                <a:spcPts val="600"/>
+              </a:spcBef>
+              <a:defRPr sz="1000">
+                <a:solidFill>
+                  <a:srgbClr val="0F172A"/>
+                </a:solidFill>
+              </a:defRPr>
+            </a:pPr>
+            <a:r>
+              <a:t>ResNet18 (ImageNet)</a:t>
+            </a:r>
+            <a:br/>
+            <a:r>
+              <a:t>Frozen Feature Extractor</a:t>
+            </a:r>
+            <a:br/>
+            <a:r>
+              <a:t>Output: 512-d Vector</a:t>
+            </a:r>
+          </a:p>
+        </p:txBody>
+      </p:sp>
+      <p:sp>
+        <p:nvSpPr>
+          <p:cNvPr id="10" name="Rounded Rectangle 9"/>
+          <p:cNvSpPr/>
+          <p:nvPr/>
+        </p:nvSpPr>
+        <p:spPr>
+          <a:xfrm>
+            <a:off x="5120640" y="1280160"/>
+            <a:ext cx="2011680" cy="2011680"/>
+          </a:xfrm>
+          <a:prstGeom prst="roundRect">
+            <a:avLst/>
+          </a:prstGeom>
+          <a:solidFill>
+            <a:srgbClr val="FFFFFF"/>
+          </a:solidFill>
+          <a:ln w="12700">
+            <a:solidFill>
+              <a:srgbClr val="0D9488"/>
+            </a:solidFill>
+          </a:ln>
+        </p:spPr>
+        <p:style>
+          <a:lnRef idx="1">
+            <a:schemeClr val="accent1"/>
+          </a:lnRef>
+          <a:fillRef idx="3">
+            <a:schemeClr val="accent1"/>
+          </a:fillRef>
+          <a:effectRef idx="2">
+            <a:schemeClr val="accent1"/>
+          </a:effectRef>
+          <a:fontRef idx="minor">
+            <a:schemeClr val="lt1"/>
+          </a:fontRef>
+        </p:style>
+        <p:txBody>
+          <a:bodyPr rtlCol="0" anchor="ctr"/>
+          <a:lstStyle/>
+          <a:p>
+            <a:pPr algn="ctr"/>
+          </a:p>
+        </p:txBody>
+      </p:sp>
+      <p:sp>
+        <p:nvSpPr>
+          <p:cNvPr id="11" name="TextBox 10"/>
           <p:cNvSpPr txBox="1"/>
           <p:nvPr/>
         </p:nvSpPr>
         <p:spPr>
           <a:xfrm>
-            <a:off x="731520" y="6492240"/>
-            <a:ext cx="10698480" cy="274320"/>
+            <a:off x="5212079" y="1371600"/>
+            <a:ext cx="1828800" cy="1828800"/>
           </a:xfrm>
           <a:prstGeom prst="rect">
             <a:avLst/>
@@ -9284,34 +8688,263 @@
           <a:noFill/>
         </p:spPr>
         <p:txBody>
-          <a:bodyPr wrap="none">
+          <a:bodyPr wrap="square">
             <a:spAutoFit/>
           </a:bodyPr>
           <a:lstStyle/>
           <a:p>
             <a:pPr>
-              <a:defRPr sz="900">
-                <a:solidFill>
-                  <a:srgbClr val="475569"/>
-                </a:solidFill>
-              </a:defRPr>
-            </a:pPr>
-            <a:r>
-              <a:t>EDI Mid-Semester Assessment | Project ID: ERI 5 / TY_CSE_10 | Hybrid Quantum-Classical CNN for Retinal Disease</a:t>
-            </a:r>
-          </a:p>
-        </p:txBody>
-      </p:sp>
-      <p:sp>
-        <p:nvSpPr>
-          <p:cNvPr id="6" name="Rounded Rectangle 5"/>
+              <a:defRPr sz="1200" b="1">
+                <a:solidFill>
+                  <a:srgbClr val="0D9488"/>
+                </a:solidFill>
+              </a:defRPr>
+            </a:pPr>
+            <a:r>
+              <a:t>3. Compression Stage</a:t>
+            </a:r>
+          </a:p>
+          <a:p>
+            <a:pPr>
+              <a:spcBef>
+                <a:spcPts val="600"/>
+              </a:spcBef>
+              <a:defRPr sz="1000">
+                <a:solidFill>
+                  <a:srgbClr val="0F172A"/>
+                </a:solidFill>
+              </a:defRPr>
+            </a:pPr>
+            <a:r>
+              <a:t>Linear / Autoencoder / PCA</a:t>
+            </a:r>
+            <a:br/>
+            <a:r>
+              <a:t>Output: n_qubits angles</a:t>
+            </a:r>
+            <a:br/>
+            <a:r>
+              <a:t>Domain: [-pi, pi]</a:t>
+            </a:r>
+          </a:p>
+        </p:txBody>
+      </p:sp>
+      <p:sp>
+        <p:nvSpPr>
+          <p:cNvPr id="12" name="Rounded Rectangle 11"/>
           <p:cNvSpPr/>
           <p:nvPr/>
         </p:nvSpPr>
         <p:spPr>
           <a:xfrm>
-            <a:off x="731520" y="1280160"/>
-            <a:ext cx="3410712" cy="2286000"/>
+            <a:off x="7315199" y="1280160"/>
+            <a:ext cx="2011680" cy="2011680"/>
+          </a:xfrm>
+          <a:prstGeom prst="roundRect">
+            <a:avLst/>
+          </a:prstGeom>
+          <a:solidFill>
+            <a:srgbClr val="FFFFFF"/>
+          </a:solidFill>
+          <a:ln w="12700">
+            <a:solidFill>
+              <a:srgbClr val="1E3A8A"/>
+            </a:solidFill>
+          </a:ln>
+        </p:spPr>
+        <p:style>
+          <a:lnRef idx="1">
+            <a:schemeClr val="accent1"/>
+          </a:lnRef>
+          <a:fillRef idx="3">
+            <a:schemeClr val="accent1"/>
+          </a:fillRef>
+          <a:effectRef idx="2">
+            <a:schemeClr val="accent1"/>
+          </a:effectRef>
+          <a:fontRef idx="minor">
+            <a:schemeClr val="lt1"/>
+          </a:fontRef>
+        </p:style>
+        <p:txBody>
+          <a:bodyPr rtlCol="0" anchor="ctr"/>
+          <a:lstStyle/>
+          <a:p>
+            <a:pPr algn="ctr"/>
+          </a:p>
+        </p:txBody>
+      </p:sp>
+      <p:sp>
+        <p:nvSpPr>
+          <p:cNvPr id="13" name="TextBox 12"/>
+          <p:cNvSpPr txBox="1"/>
+          <p:nvPr/>
+        </p:nvSpPr>
+        <p:spPr>
+          <a:xfrm>
+            <a:off x="7406640" y="1371600"/>
+            <a:ext cx="1828800" cy="1828800"/>
+          </a:xfrm>
+          <a:prstGeom prst="rect">
+            <a:avLst/>
+          </a:prstGeom>
+          <a:noFill/>
+        </p:spPr>
+        <p:txBody>
+          <a:bodyPr wrap="square">
+            <a:spAutoFit/>
+          </a:bodyPr>
+          <a:lstStyle/>
+          <a:p>
+            <a:pPr>
+              <a:defRPr sz="1200" b="1">
+                <a:solidFill>
+                  <a:srgbClr val="1E3A8A"/>
+                </a:solidFill>
+              </a:defRPr>
+            </a:pPr>
+            <a:r>
+              <a:t>4. Quantum PQC</a:t>
+            </a:r>
+          </a:p>
+          <a:p>
+            <a:pPr>
+              <a:spcBef>
+                <a:spcPts val="600"/>
+              </a:spcBef>
+              <a:defRPr sz="1000">
+                <a:solidFill>
+                  <a:srgbClr val="0F172A"/>
+                </a:solidFill>
+              </a:defRPr>
+            </a:pPr>
+            <a:r>
+              <a:t>AngleEmbedding(Ry)</a:t>
+            </a:r>
+            <a:br/>
+            <a:r>
+              <a:t>StronglyEntanglingLayers</a:t>
+            </a:r>
+            <a:br/>
+            <a:r>
+              <a:t>Pauli-Z Expectation: [-1, 1]</a:t>
+            </a:r>
+          </a:p>
+        </p:txBody>
+      </p:sp>
+      <p:sp>
+        <p:nvSpPr>
+          <p:cNvPr id="14" name="Rounded Rectangle 13"/>
+          <p:cNvSpPr/>
+          <p:nvPr/>
+        </p:nvSpPr>
+        <p:spPr>
+          <a:xfrm>
+            <a:off x="9509760" y="1280160"/>
+            <a:ext cx="2011680" cy="2011680"/>
+          </a:xfrm>
+          <a:prstGeom prst="roundRect">
+            <a:avLst/>
+          </a:prstGeom>
+          <a:solidFill>
+            <a:srgbClr val="FFFFFF"/>
+          </a:solidFill>
+          <a:ln w="12700">
+            <a:solidFill>
+              <a:srgbClr val="0D9488"/>
+            </a:solidFill>
+          </a:ln>
+        </p:spPr>
+        <p:style>
+          <a:lnRef idx="1">
+            <a:schemeClr val="accent1"/>
+          </a:lnRef>
+          <a:fillRef idx="3">
+            <a:schemeClr val="accent1"/>
+          </a:fillRef>
+          <a:effectRef idx="2">
+            <a:schemeClr val="accent1"/>
+          </a:effectRef>
+          <a:fontRef idx="minor">
+            <a:schemeClr val="lt1"/>
+          </a:fontRef>
+        </p:style>
+        <p:txBody>
+          <a:bodyPr rtlCol="0" anchor="ctr"/>
+          <a:lstStyle/>
+          <a:p>
+            <a:pPr algn="ctr"/>
+          </a:p>
+        </p:txBody>
+      </p:sp>
+      <p:sp>
+        <p:nvSpPr>
+          <p:cNvPr id="15" name="TextBox 14"/>
+          <p:cNvSpPr txBox="1"/>
+          <p:nvPr/>
+        </p:nvSpPr>
+        <p:spPr>
+          <a:xfrm>
+            <a:off x="9601200" y="1371600"/>
+            <a:ext cx="1828800" cy="1828800"/>
+          </a:xfrm>
+          <a:prstGeom prst="rect">
+            <a:avLst/>
+          </a:prstGeom>
+          <a:noFill/>
+        </p:spPr>
+        <p:txBody>
+          <a:bodyPr wrap="square">
+            <a:spAutoFit/>
+          </a:bodyPr>
+          <a:lstStyle/>
+          <a:p>
+            <a:pPr>
+              <a:defRPr sz="1200" b="1">
+                <a:solidFill>
+                  <a:srgbClr val="0D9488"/>
+                </a:solidFill>
+              </a:defRPr>
+            </a:pPr>
+            <a:r>
+              <a:t>5. Output Head</a:t>
+            </a:r>
+          </a:p>
+          <a:p>
+            <a:pPr>
+              <a:spcBef>
+                <a:spcPts val="600"/>
+              </a:spcBef>
+              <a:defRPr sz="1000">
+                <a:solidFill>
+                  <a:srgbClr val="0F172A"/>
+                </a:solidFill>
+              </a:defRPr>
+            </a:pPr>
+            <a:r>
+              <a:t>Linear Head (n -&gt; 5)</a:t>
+            </a:r>
+            <a:br/>
+            <a:r>
+              <a:t>Softmax Probabilities</a:t>
+            </a:r>
+            <a:br/>
+            <a:r>
+              <a:t>Focal Loss Optimization</a:t>
+            </a:r>
+          </a:p>
+        </p:txBody>
+      </p:sp>
+      <p:sp>
+        <p:nvSpPr>
+          <p:cNvPr id="16" name="Rounded Rectangle 15"/>
+          <p:cNvSpPr/>
+          <p:nvPr/>
+        </p:nvSpPr>
+        <p:spPr>
+          <a:xfrm>
+            <a:off x="731520" y="3474720"/>
+            <a:ext cx="3410712" cy="2743200"/>
           </a:xfrm>
           <a:prstGeom prst="roundRect">
             <a:avLst/>
@@ -9349,14 +8982,14 @@
       </p:sp>
       <p:sp>
         <p:nvSpPr>
-          <p:cNvPr id="7" name="TextBox 6"/>
+          <p:cNvPr id="17" name="TextBox 16"/>
           <p:cNvSpPr txBox="1"/>
           <p:nvPr/>
         </p:nvSpPr>
         <p:spPr>
           <a:xfrm>
-            <a:off x="868680" y="1417319"/>
-            <a:ext cx="3136392" cy="2011680"/>
+            <a:off x="868680" y="3566160"/>
+            <a:ext cx="3136392" cy="2560320"/>
           </a:xfrm>
           <a:prstGeom prst="rect">
             <a:avLst/>
@@ -9370,14 +9003,14 @@
           <a:lstStyle/>
           <a:p>
             <a:pPr>
-              <a:defRPr sz="1200" b="1">
-                <a:solidFill>
-                  <a:srgbClr val="1E3A8A"/>
-                </a:solidFill>
-              </a:defRPr>
-            </a:pPr>
-            <a:r>
-              <a:t>1. Class-Weighted Focal Loss</a:t>
+              <a:defRPr sz="1300" b="1">
+                <a:solidFill>
+                  <a:srgbClr val="0D9488"/>
+                </a:solidFill>
+              </a:defRPr>
+            </a:pPr>
+            <a:r>
+              <a:t>Medical &amp; Preprocessing</a:t>
             </a:r>
           </a:p>
           <a:p>
@@ -9385,37 +9018,58 @@
               <a:spcBef>
                 <a:spcPts val="600"/>
               </a:spcBef>
-              <a:defRPr sz="1000">
+              <a:defRPr sz="1100">
                 <a:solidFill>
                   <a:srgbClr val="0F172A"/>
                 </a:solidFill>
               </a:defRPr>
             </a:pPr>
             <a:r>
-              <a:t>L_Focal = -alpha_t * (1 - p_t)^gamma * log(p_t)</a:t>
-            </a:r>
-            <a:br/>
-            <a:br/>
-            <a:r>
-              <a:t>• gamma = 2.0 down-weights easy majority examples (Grade 0)</a:t>
-            </a:r>
-            <a:br/>
-            <a:r>
-              <a:t>• alpha_t = N / (C * N_c) enforces 9.3x higher penalty on rare Grade 3 lesions.</a:t>
-            </a:r>
-          </a:p>
-        </p:txBody>
-      </p:sp>
-      <p:sp>
-        <p:nvSpPr>
-          <p:cNvPr id="8" name="Rounded Rectangle 7"/>
+              <a:t>• OpenCV &amp; Albumentations</a:t>
+            </a:r>
+          </a:p>
+          <a:p>
+            <a:pPr>
+              <a:spcBef>
+                <a:spcPts val="600"/>
+              </a:spcBef>
+              <a:defRPr sz="1100">
+                <a:solidFill>
+                  <a:srgbClr val="0F172A"/>
+                </a:solidFill>
+              </a:defRPr>
+            </a:pPr>
+            <a:r>
+              <a:t>• Ben Graham Circular Masking</a:t>
+            </a:r>
+          </a:p>
+          <a:p>
+            <a:pPr>
+              <a:spcBef>
+                <a:spcPts val="600"/>
+              </a:spcBef>
+              <a:defRPr sz="1100">
+                <a:solidFill>
+                  <a:srgbClr val="0F172A"/>
+                </a:solidFill>
+              </a:defRPr>
+            </a:pPr>
+            <a:r>
+              <a:t>• Green-Channel CLAHE Equalization</a:t>
+            </a:r>
+          </a:p>
+        </p:txBody>
+      </p:sp>
+      <p:sp>
+        <p:nvSpPr>
+          <p:cNvPr id="18" name="Rounded Rectangle 17"/>
           <p:cNvSpPr/>
           <p:nvPr/>
         </p:nvSpPr>
         <p:spPr>
           <a:xfrm>
-            <a:off x="4389120" y="1280160"/>
-            <a:ext cx="3410712" cy="2286000"/>
+            <a:off x="4389120" y="3474720"/>
+            <a:ext cx="3410712" cy="2743200"/>
           </a:xfrm>
           <a:prstGeom prst="roundRect">
             <a:avLst/>
@@ -9453,14 +9107,14 @@
       </p:sp>
       <p:sp>
         <p:nvSpPr>
-          <p:cNvPr id="9" name="TextBox 8"/>
+          <p:cNvPr id="19" name="TextBox 18"/>
           <p:cNvSpPr txBox="1"/>
           <p:nvPr/>
         </p:nvSpPr>
         <p:spPr>
           <a:xfrm>
-            <a:off x="4526280" y="1417319"/>
-            <a:ext cx="3136392" cy="2011680"/>
+            <a:off x="4526280" y="3566160"/>
+            <a:ext cx="3136392" cy="2560320"/>
           </a:xfrm>
           <a:prstGeom prst="rect">
             <a:avLst/>
@@ -9474,14 +9128,14 @@
           <a:lstStyle/>
           <a:p>
             <a:pPr>
-              <a:defRPr sz="1200" b="1">
-                <a:solidFill>
-                  <a:srgbClr val="0D9488"/>
-                </a:solidFill>
-              </a:defRPr>
-            </a:pPr>
-            <a:r>
-              <a:t>2. Quantum State Preparation</a:t>
+              <a:defRPr sz="1300" b="1">
+                <a:solidFill>
+                  <a:srgbClr val="1E3A8A"/>
+                </a:solidFill>
+              </a:defRPr>
+            </a:pPr>
+            <a:r>
+              <a:t>Deep Learning &amp; AI Stack</a:t>
             </a:r>
           </a:p>
           <a:p>
@@ -9489,37 +9143,58 @@
               <a:spcBef>
                 <a:spcPts val="600"/>
               </a:spcBef>
-              <a:defRPr sz="1000">
+              <a:defRPr sz="1100">
                 <a:solidFill>
                   <a:srgbClr val="0F172A"/>
                 </a:solidFill>
               </a:defRPr>
             </a:pPr>
             <a:r>
-              <a:t>|psi(z)&gt; = (X)_{i=0}^{n-1} Ry(z_i) |0&gt;</a:t>
-            </a:r>
-            <a:br/>
-            <a:br/>
-            <a:r>
-              <a:t>• Continuous angles z_i in [-pi, pi] rotate qubits on Bloch sphere</a:t>
-            </a:r>
-            <a:br/>
-            <a:r>
-              <a:t>• Constant circuit depth O(1); zero multi-qubit CNOT overhead.</a:t>
-            </a:r>
-          </a:p>
-        </p:txBody>
-      </p:sp>
-      <p:sp>
-        <p:nvSpPr>
-          <p:cNvPr id="10" name="Rounded Rectangle 9"/>
+              <a:t>• PyTorch 2.2+ (Autograd &amp; GPU)</a:t>
+            </a:r>
+          </a:p>
+          <a:p>
+            <a:pPr>
+              <a:spcBef>
+                <a:spcPts val="600"/>
+              </a:spcBef>
+              <a:defRPr sz="1100">
+                <a:solidFill>
+                  <a:srgbClr val="0F172A"/>
+                </a:solidFill>
+              </a:defRPr>
+            </a:pPr>
+            <a:r>
+              <a:t>• ResNet18 &amp; MobileNetV2 (Backbones)</a:t>
+            </a:r>
+          </a:p>
+          <a:p>
+            <a:pPr>
+              <a:spcBef>
+                <a:spcPts val="600"/>
+              </a:spcBef>
+              <a:defRPr sz="1100">
+                <a:solidFill>
+                  <a:srgbClr val="0F172A"/>
+                </a:solidFill>
+              </a:defRPr>
+            </a:pPr>
+            <a:r>
+              <a:t>• Class-Weighted Focal Loss (gamma=2.0)</a:t>
+            </a:r>
+          </a:p>
+        </p:txBody>
+      </p:sp>
+      <p:sp>
+        <p:nvSpPr>
+          <p:cNvPr id="20" name="Rounded Rectangle 19"/>
           <p:cNvSpPr/>
           <p:nvPr/>
         </p:nvSpPr>
         <p:spPr>
           <a:xfrm>
-            <a:off x="8046720" y="1280160"/>
-            <a:ext cx="3410712" cy="2286000"/>
+            <a:off x="8046720" y="3474720"/>
+            <a:ext cx="3410712" cy="2743200"/>
           </a:xfrm>
           <a:prstGeom prst="roundRect">
             <a:avLst/>
@@ -9557,14 +9232,14 @@
       </p:sp>
       <p:sp>
         <p:nvSpPr>
-          <p:cNvPr id="11" name="TextBox 10"/>
+          <p:cNvPr id="21" name="TextBox 20"/>
           <p:cNvSpPr txBox="1"/>
           <p:nvPr/>
         </p:nvSpPr>
         <p:spPr>
           <a:xfrm>
-            <a:off x="8183880" y="1417319"/>
-            <a:ext cx="3136392" cy="2011680"/>
+            <a:off x="8183880" y="3566160"/>
+            <a:ext cx="3136392" cy="2560320"/>
           </a:xfrm>
           <a:prstGeom prst="rect">
             <a:avLst/>
@@ -9578,14 +9253,14 @@
           <a:lstStyle/>
           <a:p>
             <a:pPr>
-              <a:defRPr sz="1200" b="1">
-                <a:solidFill>
-                  <a:srgbClr val="1E3A8A"/>
-                </a:solidFill>
-              </a:defRPr>
-            </a:pPr>
-            <a:r>
-              <a:t>3. Strongly Entangling Ansatz</a:t>
+              <a:defRPr sz="1300" b="1">
+                <a:solidFill>
+                  <a:srgbClr val="0D9488"/>
+                </a:solidFill>
+              </a:defRPr>
+            </a:pPr>
+            <a:r>
+              <a:t>Quantum Technologies</a:t>
             </a:r>
           </a:p>
           <a:p>
@@ -9593,103 +9268,14 @@
               <a:spcBef>
                 <a:spcPts val="600"/>
               </a:spcBef>
-              <a:defRPr sz="1000">
+              <a:defRPr sz="1100">
                 <a:solidFill>
                   <a:srgbClr val="0F172A"/>
                 </a:solidFill>
               </a:defRPr>
             </a:pPr>
             <a:r>
-              <a:t>U(theta) = Prod_{l=1}^L [ U_ent * (X) R(alpha, beta, gamma) ]</a:t>
-            </a:r>
-            <a:br/>
-            <a:br/>
-            <a:r>
-              <a:t>• 3 Euler rotation angles per qubit: Rz(gamma) Ry(beta) Rx(alpha)</a:t>
-            </a:r>
-            <a:br/>
-            <a:r>
-              <a:t>• Periodic circular CNOT ring generates multi-qubit entanglement.</a:t>
-            </a:r>
-          </a:p>
-        </p:txBody>
-      </p:sp>
-      <p:sp>
-        <p:nvSpPr>
-          <p:cNvPr id="12" name="Rounded Rectangle 11"/>
-          <p:cNvSpPr/>
-          <p:nvPr/>
-        </p:nvSpPr>
-        <p:spPr>
-          <a:xfrm>
-            <a:off x="731520" y="3749039"/>
-            <a:ext cx="3410712" cy="2286000"/>
-          </a:xfrm>
-          <a:prstGeom prst="roundRect">
-            <a:avLst/>
-          </a:prstGeom>
-          <a:solidFill>
-            <a:srgbClr val="FFFFFF"/>
-          </a:solidFill>
-          <a:ln w="12700">
-            <a:solidFill>
-              <a:srgbClr val="E2E8F0"/>
-            </a:solidFill>
-          </a:ln>
-        </p:spPr>
-        <p:style>
-          <a:lnRef idx="1">
-            <a:schemeClr val="accent1"/>
-          </a:lnRef>
-          <a:fillRef idx="3">
-            <a:schemeClr val="accent1"/>
-          </a:fillRef>
-          <a:effectRef idx="2">
-            <a:schemeClr val="accent1"/>
-          </a:effectRef>
-          <a:fontRef idx="minor">
-            <a:schemeClr val="lt1"/>
-          </a:fontRef>
-        </p:style>
-        <p:txBody>
-          <a:bodyPr rtlCol="0" anchor="ctr"/>
-          <a:lstStyle/>
-          <a:p>
-            <a:pPr algn="ctr"/>
-          </a:p>
-        </p:txBody>
-      </p:sp>
-      <p:sp>
-        <p:nvSpPr>
-          <p:cNvPr id="13" name="TextBox 12"/>
-          <p:cNvSpPr txBox="1"/>
-          <p:nvPr/>
-        </p:nvSpPr>
-        <p:spPr>
-          <a:xfrm>
-            <a:off x="868680" y="3886200"/>
-            <a:ext cx="3136392" cy="2011680"/>
-          </a:xfrm>
-          <a:prstGeom prst="rect">
-            <a:avLst/>
-          </a:prstGeom>
-          <a:noFill/>
-        </p:spPr>
-        <p:txBody>
-          <a:bodyPr wrap="square">
-            <a:spAutoFit/>
-          </a:bodyPr>
-          <a:lstStyle/>
-          <a:p>
-            <a:pPr>
-              <a:defRPr sz="1200" b="1">
-                <a:solidFill>
-                  <a:srgbClr val="0D9488"/>
-                </a:solidFill>
-              </a:defRPr>
-            </a:pPr>
-            <a:r>
-              <a:t>4. Parameter-Shift Rule</a:t>
+              <a:t>• PennyLane 0.35+ (Differentiable QML)</a:t>
             </a:r>
           </a:p>
           <a:p>
@@ -9697,103 +9283,14 @@
               <a:spcBef>
                 <a:spcPts val="600"/>
               </a:spcBef>
-              <a:defRPr sz="1000">
+              <a:defRPr sz="1100">
                 <a:solidFill>
                   <a:srgbClr val="0F172A"/>
                 </a:solidFill>
               </a:defRPr>
             </a:pPr>
             <a:r>
-              <a:t>d&lt;Z_i&gt;/dtheta_j = (&lt;Z_i&gt;(theta_j + pi/2) - &lt;Z_i&gt;(theta_j - pi/2)) / 2</a:t>
-            </a:r>
-            <a:br/>
-            <a:br/>
-            <a:r>
-              <a:t>• Evaluates exact analytical gradients without intermediate state readout</a:t>
-            </a:r>
-            <a:br/>
-            <a:r>
-              <a:t>• Enables hardware-native backpropagation on physical QPUs.</a:t>
-            </a:r>
-          </a:p>
-        </p:txBody>
-      </p:sp>
-      <p:sp>
-        <p:nvSpPr>
-          <p:cNvPr id="14" name="Rounded Rectangle 13"/>
-          <p:cNvSpPr/>
-          <p:nvPr/>
-        </p:nvSpPr>
-        <p:spPr>
-          <a:xfrm>
-            <a:off x="4389120" y="3749039"/>
-            <a:ext cx="3410712" cy="2286000"/>
-          </a:xfrm>
-          <a:prstGeom prst="roundRect">
-            <a:avLst/>
-          </a:prstGeom>
-          <a:solidFill>
-            <a:srgbClr val="FFFFFF"/>
-          </a:solidFill>
-          <a:ln w="12700">
-            <a:solidFill>
-              <a:srgbClr val="E2E8F0"/>
-            </a:solidFill>
-          </a:ln>
-        </p:spPr>
-        <p:style>
-          <a:lnRef idx="1">
-            <a:schemeClr val="accent1"/>
-          </a:lnRef>
-          <a:fillRef idx="3">
-            <a:schemeClr val="accent1"/>
-          </a:fillRef>
-          <a:effectRef idx="2">
-            <a:schemeClr val="accent1"/>
-          </a:effectRef>
-          <a:fontRef idx="minor">
-            <a:schemeClr val="lt1"/>
-          </a:fontRef>
-        </p:style>
-        <p:txBody>
-          <a:bodyPr rtlCol="0" anchor="ctr"/>
-          <a:lstStyle/>
-          <a:p>
-            <a:pPr algn="ctr"/>
-          </a:p>
-        </p:txBody>
-      </p:sp>
-      <p:sp>
-        <p:nvSpPr>
-          <p:cNvPr id="15" name="TextBox 14"/>
-          <p:cNvSpPr txBox="1"/>
-          <p:nvPr/>
-        </p:nvSpPr>
-        <p:spPr>
-          <a:xfrm>
-            <a:off x="4526280" y="3886200"/>
-            <a:ext cx="3136392" cy="2011680"/>
-          </a:xfrm>
-          <a:prstGeom prst="rect">
-            <a:avLst/>
-          </a:prstGeom>
-          <a:noFill/>
-        </p:spPr>
-        <p:txBody>
-          <a:bodyPr wrap="square">
-            <a:spAutoFit/>
-          </a:bodyPr>
-          <a:lstStyle/>
-          <a:p>
-            <a:pPr>
-              <a:defRPr sz="1200" b="1">
-                <a:solidFill>
-                  <a:srgbClr val="1E3A8A"/>
-                </a:solidFill>
-              </a:defRPr>
-            </a:pPr>
-            <a:r>
-              <a:t>5. Quadratic Weighted Kappa</a:t>
+              <a:t>• StronglyEntanglingLayers (Ansatz)</a:t>
             </a:r>
           </a:p>
           <a:p>
@@ -9801,126 +9298,14 @@
               <a:spcBef>
                 <a:spcPts val="600"/>
               </a:spcBef>
-              <a:defRPr sz="1000">
+              <a:defRPr sz="1100">
                 <a:solidFill>
                   <a:srgbClr val="0F172A"/>
                 </a:solidFill>
               </a:defRPr>
             </a:pPr>
             <a:r>
-              <a:t>kappa = 1 - (sum w_ij O_ij) / (sum w_ij E_ij)</a:t>
-            </a:r>
-            <a:br/>
-            <a:br/>
-            <a:r>
-              <a:t>w_ij = (i - j)^2 / (C - 1)^2 = (i - j)^2 / 16</a:t>
-            </a:r>
-            <a:br/>
-            <a:r>
-              <a:t>• Penalizes severe clinical misclassifications quadratically (w_0,4 = 1.0 vs w_0,1 = 0.0625).</a:t>
-            </a:r>
-          </a:p>
-        </p:txBody>
-      </p:sp>
-      <p:sp>
-        <p:nvSpPr>
-          <p:cNvPr id="16" name="Rounded Rectangle 15"/>
-          <p:cNvSpPr/>
-          <p:nvPr/>
-        </p:nvSpPr>
-        <p:spPr>
-          <a:xfrm>
-            <a:off x="8046720" y="3749039"/>
-            <a:ext cx="3410712" cy="2286000"/>
-          </a:xfrm>
-          <a:prstGeom prst="roundRect">
-            <a:avLst/>
-          </a:prstGeom>
-          <a:solidFill>
-            <a:srgbClr val="FFFFFF"/>
-          </a:solidFill>
-          <a:ln w="12700">
-            <a:solidFill>
-              <a:srgbClr val="E2E8F0"/>
-            </a:solidFill>
-          </a:ln>
-        </p:spPr>
-        <p:style>
-          <a:lnRef idx="1">
-            <a:schemeClr val="accent1"/>
-          </a:lnRef>
-          <a:fillRef idx="3">
-            <a:schemeClr val="accent1"/>
-          </a:fillRef>
-          <a:effectRef idx="2">
-            <a:schemeClr val="accent1"/>
-          </a:effectRef>
-          <a:fontRef idx="minor">
-            <a:schemeClr val="lt1"/>
-          </a:fontRef>
-        </p:style>
-        <p:txBody>
-          <a:bodyPr rtlCol="0" anchor="ctr"/>
-          <a:lstStyle/>
-          <a:p>
-            <a:pPr algn="ctr"/>
-          </a:p>
-        </p:txBody>
-      </p:sp>
-      <p:sp>
-        <p:nvSpPr>
-          <p:cNvPr id="17" name="TextBox 16"/>
-          <p:cNvSpPr txBox="1"/>
-          <p:nvPr/>
-        </p:nvSpPr>
-        <p:spPr>
-          <a:xfrm>
-            <a:off x="8183880" y="3886200"/>
-            <a:ext cx="3136392" cy="2011680"/>
-          </a:xfrm>
-          <a:prstGeom prst="rect">
-            <a:avLst/>
-          </a:prstGeom>
-          <a:noFill/>
-        </p:spPr>
-        <p:txBody>
-          <a:bodyPr wrap="square">
-            <a:spAutoFit/>
-          </a:bodyPr>
-          <a:lstStyle/>
-          <a:p>
-            <a:pPr>
-              <a:defRPr sz="1200" b="1">
-                <a:solidFill>
-                  <a:srgbClr val="0D9488"/>
-                </a:solidFill>
-              </a:defRPr>
-            </a:pPr>
-            <a:r>
-              <a:t>6. Training Optimization</a:t>
-            </a:r>
-          </a:p>
-          <a:p>
-            <a:pPr>
-              <a:spcBef>
-                <a:spcPts val="600"/>
-              </a:spcBef>
-              <a:defRPr sz="1000">
-                <a:solidFill>
-                  <a:srgbClr val="0F172A"/>
-                </a:solidFill>
-              </a:defRPr>
-            </a:pPr>
-            <a:r>
-              <a:t>• Optimizer: AdamW (beta1=0.9, beta2=0.999, weight_decay=1e-4)</a:t>
-            </a:r>
-            <a:br/>
-            <a:r>
-              <a:t>• Learning Rate Schedule: Cosine Annealing (eta_min=1e-6)</a:t>
-            </a:r>
-            <a:br/>
-            <a:r>
-              <a:t>• Early Stopping: Monitored validation Macro-F1 (patience=5).</a:t>
+              <a:t>• Qiskit 1.0 &amp; IBM Quantum (Hardware)</a:t>
             </a:r>
           </a:p>
         </p:txBody>
@@ -10005,34 +9390,244 @@
           <a:noFill/>
         </p:spPr>
         <p:txBody>
+          <a:bodyPr wrap="none">
+            <a:spAutoFit/>
+          </a:bodyPr>
+          <a:lstStyle/>
+          <a:p>
+            <a:pPr>
+              <a:defRPr sz="1100" b="1">
+                <a:solidFill>
+                  <a:srgbClr val="0D9488"/>
+                </a:solidFill>
+              </a:defRPr>
+            </a:pPr>
+            <a:r>
+              <a:t>CORE TECHNICAL APPROACH</a:t>
+            </a:r>
+          </a:p>
+        </p:txBody>
+      </p:sp>
+      <p:sp>
+        <p:nvSpPr>
+          <p:cNvPr id="4" name="TextBox 3"/>
+          <p:cNvSpPr txBox="1"/>
+          <p:nvPr/>
+        </p:nvSpPr>
+        <p:spPr>
+          <a:xfrm>
+            <a:off x="731520" y="365760"/>
+            <a:ext cx="10698480" cy="502920"/>
+          </a:xfrm>
+          <a:prstGeom prst="rect">
+            <a:avLst/>
+          </a:prstGeom>
+          <a:noFill/>
+        </p:spPr>
+        <p:txBody>
+          <a:bodyPr wrap="none">
+            <a:spAutoFit/>
+          </a:bodyPr>
+          <a:lstStyle/>
+          <a:p>
+            <a:pPr>
+              <a:defRPr sz="2200" b="1">
+                <a:solidFill>
+                  <a:srgbClr val="FFFFFF"/>
+                </a:solidFill>
+              </a:defRPr>
+            </a:pPr>
+            <a:r>
+              <a:t>Model Algorithm Approach: Hybrid Pipeline &amp; Compression Ablation</a:t>
+            </a:r>
+          </a:p>
+        </p:txBody>
+      </p:sp>
+      <p:sp>
+        <p:nvSpPr>
+          <p:cNvPr id="5" name="TextBox 4"/>
+          <p:cNvSpPr txBox="1"/>
+          <p:nvPr/>
+        </p:nvSpPr>
+        <p:spPr>
+          <a:xfrm>
+            <a:off x="731520" y="6492240"/>
+            <a:ext cx="10698480" cy="274320"/>
+          </a:xfrm>
+          <a:prstGeom prst="rect">
+            <a:avLst/>
+          </a:prstGeom>
+          <a:noFill/>
+        </p:spPr>
+        <p:txBody>
+          <a:bodyPr wrap="none">
+            <a:spAutoFit/>
+          </a:bodyPr>
+          <a:lstStyle/>
+          <a:p>
+            <a:pPr>
+              <a:defRPr sz="900">
+                <a:solidFill>
+                  <a:srgbClr val="475569"/>
+                </a:solidFill>
+              </a:defRPr>
+            </a:pPr>
+            <a:r>
+              <a:t>EDI Mid-Semester Assessment | Project ID: ERI 5 / TY_CSE_10 | HQNN for Retinal Disease Classification</a:t>
+            </a:r>
+          </a:p>
+        </p:txBody>
+      </p:sp>
+      <p:sp>
+        <p:nvSpPr>
+          <p:cNvPr id="6" name="Rounded Rectangle 5"/>
+          <p:cNvSpPr/>
+          <p:nvPr/>
+        </p:nvSpPr>
+        <p:spPr>
+          <a:xfrm>
+            <a:off x="731520" y="1280160"/>
+            <a:ext cx="5212080" cy="2286000"/>
+          </a:xfrm>
+          <a:prstGeom prst="roundRect">
+            <a:avLst/>
+          </a:prstGeom>
+          <a:solidFill>
+            <a:srgbClr val="FFFFFF"/>
+          </a:solidFill>
+          <a:ln w="12700">
+            <a:solidFill>
+              <a:srgbClr val="E2E8F0"/>
+            </a:solidFill>
+          </a:ln>
+        </p:spPr>
+        <p:style>
+          <a:lnRef idx="1">
+            <a:schemeClr val="accent1"/>
+          </a:lnRef>
+          <a:fillRef idx="3">
+            <a:schemeClr val="accent1"/>
+          </a:fillRef>
+          <a:effectRef idx="2">
+            <a:schemeClr val="accent1"/>
+          </a:effectRef>
+          <a:fontRef idx="minor">
+            <a:schemeClr val="lt1"/>
+          </a:fontRef>
+        </p:style>
+        <p:txBody>
+          <a:bodyPr rtlCol="0" anchor="ctr"/>
+          <a:lstStyle/>
+          <a:p>
+            <a:pPr algn="ctr"/>
+          </a:p>
+        </p:txBody>
+      </p:sp>
+      <p:sp>
+        <p:nvSpPr>
+          <p:cNvPr id="7" name="TextBox 6"/>
+          <p:cNvSpPr txBox="1"/>
+          <p:nvPr/>
+        </p:nvSpPr>
+        <p:spPr>
+          <a:xfrm>
+            <a:off x="914400" y="1417319"/>
+            <a:ext cx="4846320" cy="2011680"/>
+          </a:xfrm>
+          <a:prstGeom prst="rect">
+            <a:avLst/>
+          </a:prstGeom>
+          <a:noFill/>
+        </p:spPr>
+        <p:txBody>
           <a:bodyPr wrap="square">
             <a:spAutoFit/>
           </a:bodyPr>
           <a:lstStyle/>
           <a:p>
             <a:pPr>
-              <a:defRPr sz="1100" b="1">
-                <a:solidFill>
-                  <a:srgbClr val="0D9488"/>
-                </a:solidFill>
-              </a:defRPr>
-            </a:pPr>
-            <a:r>
-              <a:t>EDI PARAMETER 7: METHODOLOGY &amp; EXPERIMENTAL RESULTS</a:t>
-            </a:r>
-          </a:p>
-        </p:txBody>
-      </p:sp>
-      <p:sp>
-        <p:nvSpPr>
-          <p:cNvPr id="4" name="TextBox 3"/>
+              <a:defRPr sz="1300" b="1">
+                <a:solidFill>
+                  <a:srgbClr val="1E3A8A"/>
+                </a:solidFill>
+              </a:defRPr>
+            </a:pPr>
+            <a:r>
+              <a:t>1. Classical Feature Extraction &amp; Freezing</a:t>
+            </a:r>
+          </a:p>
+          <a:p>
+            <a:pPr>
+              <a:spcBef>
+                <a:spcPts val="600"/>
+              </a:spcBef>
+              <a:defRPr sz="1100">
+                <a:solidFill>
+                  <a:srgbClr val="0F172A"/>
+                </a:solidFill>
+              </a:defRPr>
+            </a:pPr>
+            <a:r>
+              <a:t>The ResNet18 convolutional backbone is initialized with ImageNet pre-trained weights and frozen. It acts as a deterministic 512-dimensional spatial feature extractor, isolating the learning capacity of the quantum decision layer.</a:t>
+            </a:r>
+          </a:p>
+        </p:txBody>
+      </p:sp>
+      <p:sp>
+        <p:nvSpPr>
+          <p:cNvPr id="8" name="Rounded Rectangle 7"/>
+          <p:cNvSpPr/>
+          <p:nvPr/>
+        </p:nvSpPr>
+        <p:spPr>
+          <a:xfrm>
+            <a:off x="6217920" y="1280160"/>
+            <a:ext cx="5212080" cy="2286000"/>
+          </a:xfrm>
+          <a:prstGeom prst="roundRect">
+            <a:avLst/>
+          </a:prstGeom>
+          <a:solidFill>
+            <a:srgbClr val="FFFFFF"/>
+          </a:solidFill>
+          <a:ln w="12700">
+            <a:solidFill>
+              <a:srgbClr val="E2E8F0"/>
+            </a:solidFill>
+          </a:ln>
+        </p:spPr>
+        <p:style>
+          <a:lnRef idx="1">
+            <a:schemeClr val="accent1"/>
+          </a:lnRef>
+          <a:fillRef idx="3">
+            <a:schemeClr val="accent1"/>
+          </a:fillRef>
+          <a:effectRef idx="2">
+            <a:schemeClr val="accent1"/>
+          </a:effectRef>
+          <a:fontRef idx="minor">
+            <a:schemeClr val="lt1"/>
+          </a:fontRef>
+        </p:style>
+        <p:txBody>
+          <a:bodyPr rtlCol="0" anchor="ctr"/>
+          <a:lstStyle/>
+          <a:p>
+            <a:pPr algn="ctr"/>
+          </a:p>
+        </p:txBody>
+      </p:sp>
+      <p:sp>
+        <p:nvSpPr>
+          <p:cNvPr id="9" name="TextBox 8"/>
           <p:cNvSpPr txBox="1"/>
           <p:nvPr/>
         </p:nvSpPr>
         <p:spPr>
           <a:xfrm>
-            <a:off x="731520" y="365760"/>
-            <a:ext cx="10698480" cy="502920"/>
+            <a:off x="6400800" y="1417319"/>
+            <a:ext cx="4846320" cy="2011680"/>
           </a:xfrm>
           <a:prstGeom prst="rect">
             <a:avLst/>
@@ -10046,27 +9641,303 @@
           <a:lstStyle/>
           <a:p>
             <a:pPr>
-              <a:defRPr sz="2200" b="1">
-                <a:solidFill>
-                  <a:srgbClr val="FFFFFF"/>
-                </a:solidFill>
-              </a:defRPr>
-            </a:pPr>
-            <a:r>
-              <a:t>Empirical Benchmark Matrix (Held-Out APTOS Test Set, N=550)</a:t>
-            </a:r>
-          </a:p>
-        </p:txBody>
-      </p:sp>
-      <p:sp>
-        <p:nvSpPr>
-          <p:cNvPr id="5" name="TextBox 4"/>
+              <a:defRPr sz="1300" b="1">
+                <a:solidFill>
+                  <a:srgbClr val="0D9488"/>
+                </a:solidFill>
+              </a:defRPr>
+            </a:pPr>
+            <a:r>
+              <a:t>2. Three Interchangeable Compression Paradigms</a:t>
+            </a:r>
+          </a:p>
+          <a:p>
+            <a:pPr>
+              <a:spcBef>
+                <a:spcPts val="600"/>
+              </a:spcBef>
+              <a:defRPr sz="1100">
+                <a:solidFill>
+                  <a:srgbClr val="0F172A"/>
+                </a:solidFill>
+              </a:defRPr>
+            </a:pPr>
+            <a:r>
+              <a:t>• Bottleneck Linear: Parametric nn.Linear(512, n) with tanh(x) * pi scaling.</a:t>
+            </a:r>
+            <a:br/>
+            <a:r>
+              <a:t>• Deep Autoencoder: 3-layer bottleneck (512-&gt;256-&gt;64-&gt;n) pre-trained with MSE reconstruction loss to preserve non-linear lesion manifolds.</a:t>
+            </a:r>
+            <a:br/>
+            <a:r>
+              <a:t>• PCA Compressor: Statistical SVD projection + min-max angle scaling.</a:t>
+            </a:r>
+          </a:p>
+        </p:txBody>
+      </p:sp>
+      <p:sp>
+        <p:nvSpPr>
+          <p:cNvPr id="10" name="Rounded Rectangle 9"/>
+          <p:cNvSpPr/>
+          <p:nvPr/>
+        </p:nvSpPr>
+        <p:spPr>
+          <a:xfrm>
+            <a:off x="731520" y="3749039"/>
+            <a:ext cx="5212080" cy="2286000"/>
+          </a:xfrm>
+          <a:prstGeom prst="roundRect">
+            <a:avLst/>
+          </a:prstGeom>
+          <a:solidFill>
+            <a:srgbClr val="FFFFFF"/>
+          </a:solidFill>
+          <a:ln w="12700">
+            <a:solidFill>
+              <a:srgbClr val="E2E8F0"/>
+            </a:solidFill>
+          </a:ln>
+        </p:spPr>
+        <p:style>
+          <a:lnRef idx="1">
+            <a:schemeClr val="accent1"/>
+          </a:lnRef>
+          <a:fillRef idx="3">
+            <a:schemeClr val="accent1"/>
+          </a:fillRef>
+          <a:effectRef idx="2">
+            <a:schemeClr val="accent1"/>
+          </a:effectRef>
+          <a:fontRef idx="minor">
+            <a:schemeClr val="lt1"/>
+          </a:fontRef>
+        </p:style>
+        <p:txBody>
+          <a:bodyPr rtlCol="0" anchor="ctr"/>
+          <a:lstStyle/>
+          <a:p>
+            <a:pPr algn="ctr"/>
+          </a:p>
+        </p:txBody>
+      </p:sp>
+      <p:sp>
+        <p:nvSpPr>
+          <p:cNvPr id="11" name="TextBox 10"/>
           <p:cNvSpPr txBox="1"/>
           <p:nvPr/>
         </p:nvSpPr>
         <p:spPr>
           <a:xfrm>
-            <a:off x="731520" y="6492240"/>
+            <a:off x="914400" y="3886200"/>
+            <a:ext cx="4846320" cy="2011680"/>
+          </a:xfrm>
+          <a:prstGeom prst="rect">
+            <a:avLst/>
+          </a:prstGeom>
+          <a:noFill/>
+        </p:spPr>
+        <p:txBody>
+          <a:bodyPr wrap="square">
+            <a:spAutoFit/>
+          </a:bodyPr>
+          <a:lstStyle/>
+          <a:p>
+            <a:pPr>
+              <a:defRPr sz="1300" b="1">
+                <a:solidFill>
+                  <a:srgbClr val="1E3A8A"/>
+                </a:solidFill>
+              </a:defRPr>
+            </a:pPr>
+            <a:r>
+              <a:t>3. Quantum Variational Layer (PQC)</a:t>
+            </a:r>
+          </a:p>
+          <a:p>
+            <a:pPr>
+              <a:spcBef>
+                <a:spcPts val="600"/>
+              </a:spcBef>
+              <a:defRPr sz="1100">
+                <a:solidFill>
+                  <a:srgbClr val="0F172A"/>
+                </a:solidFill>
+              </a:defRPr>
+            </a:pPr>
+            <a:r>
+              <a:t>Features are mapped to rotation angles in [-pi, pi]. State preparation uses AngleEmbedding on the Y-axis. The StronglyEntanglingLayers ansatz applies Euler rotations and circular CNOT entanglement, followed by Pauli-Z expectation value readout in [-1, 1].</a:t>
+            </a:r>
+          </a:p>
+        </p:txBody>
+      </p:sp>
+      <p:sp>
+        <p:nvSpPr>
+          <p:cNvPr id="12" name="Rounded Rectangle 11"/>
+          <p:cNvSpPr/>
+          <p:nvPr/>
+        </p:nvSpPr>
+        <p:spPr>
+          <a:xfrm>
+            <a:off x="6217920" y="3749039"/>
+            <a:ext cx="5212080" cy="2286000"/>
+          </a:xfrm>
+          <a:prstGeom prst="roundRect">
+            <a:avLst/>
+          </a:prstGeom>
+          <a:solidFill>
+            <a:srgbClr val="FFFFFF"/>
+          </a:solidFill>
+          <a:ln w="12700">
+            <a:solidFill>
+              <a:srgbClr val="E2E8F0"/>
+            </a:solidFill>
+          </a:ln>
+        </p:spPr>
+        <p:style>
+          <a:lnRef idx="1">
+            <a:schemeClr val="accent1"/>
+          </a:lnRef>
+          <a:fillRef idx="3">
+            <a:schemeClr val="accent1"/>
+          </a:fillRef>
+          <a:effectRef idx="2">
+            <a:schemeClr val="accent1"/>
+          </a:effectRef>
+          <a:fontRef idx="minor">
+            <a:schemeClr val="lt1"/>
+          </a:fontRef>
+        </p:style>
+        <p:txBody>
+          <a:bodyPr rtlCol="0" anchor="ctr"/>
+          <a:lstStyle/>
+          <a:p>
+            <a:pPr algn="ctr"/>
+          </a:p>
+        </p:txBody>
+      </p:sp>
+      <p:sp>
+        <p:nvSpPr>
+          <p:cNvPr id="13" name="TextBox 12"/>
+          <p:cNvSpPr txBox="1"/>
+          <p:nvPr/>
+        </p:nvSpPr>
+        <p:spPr>
+          <a:xfrm>
+            <a:off x="6400800" y="3886200"/>
+            <a:ext cx="4846320" cy="2011680"/>
+          </a:xfrm>
+          <a:prstGeom prst="rect">
+            <a:avLst/>
+          </a:prstGeom>
+          <a:noFill/>
+        </p:spPr>
+        <p:txBody>
+          <a:bodyPr wrap="square">
+            <a:spAutoFit/>
+          </a:bodyPr>
+          <a:lstStyle/>
+          <a:p>
+            <a:pPr>
+              <a:defRPr sz="1300" b="1">
+                <a:solidFill>
+                  <a:srgbClr val="0D9488"/>
+                </a:solidFill>
+              </a:defRPr>
+            </a:pPr>
+            <a:r>
+              <a:t>4. CPU-GPU Device Bridging Mechanism</a:t>
+            </a:r>
+          </a:p>
+          <a:p>
+            <a:pPr>
+              <a:spcBef>
+                <a:spcPts val="600"/>
+              </a:spcBef>
+              <a:defRPr sz="1100">
+                <a:solidFill>
+                  <a:srgbClr val="0F172A"/>
+                </a:solidFill>
+              </a:defRPr>
+            </a:pPr>
+            <a:r>
+              <a:t>PennyLane's default.qubit simulator executes on CPU, while PyTorch tensors reside on CUDA GPU. Our custom hybrid module routes angles to .cpu() before the quantum layer and transfers outputs back to .to(device) for the classification head.</a:t>
+            </a:r>
+          </a:p>
+        </p:txBody>
+      </p:sp>
+    </p:spTree>
+  </p:cSld>
+  <p:clrMapOvr>
+    <a:masterClrMapping/>
+  </p:clrMapOvr>
+</p:sld>
+</file>
+
+<file path=ppt/slides/slide9.xml><?xml version="1.0" encoding="utf-8"?>
+<p:sld xmlns:a="http://schemas.openxmlformats.org/drawingml/2006/main" xmlns:p="http://schemas.openxmlformats.org/presentationml/2006/main" xmlns:r="http://schemas.openxmlformats.org/officeDocument/2006/relationships">
+  <p:cSld>
+    <p:spTree>
+      <p:nvGrpSpPr>
+        <p:cNvPr id="1" name=""/>
+        <p:cNvGrpSpPr/>
+        <p:nvPr/>
+      </p:nvGrpSpPr>
+      <p:grpSpPr/>
+      <p:sp>
+        <p:nvSpPr>
+          <p:cNvPr id="2" name="Rectangle 1"/>
+          <p:cNvSpPr/>
+          <p:nvPr/>
+        </p:nvSpPr>
+        <p:spPr>
+          <a:xfrm>
+            <a:off x="0" y="0"/>
+            <a:ext cx="12191695" cy="1005840"/>
+          </a:xfrm>
+          <a:prstGeom prst="rect">
+            <a:avLst/>
+          </a:prstGeom>
+          <a:solidFill>
+            <a:srgbClr val="0F172A"/>
+          </a:solidFill>
+          <a:ln>
+            <a:solidFill>
+              <a:srgbClr val="0F172A"/>
+            </a:solidFill>
+          </a:ln>
+        </p:spPr>
+        <p:style>
+          <a:lnRef idx="1">
+            <a:schemeClr val="accent1"/>
+          </a:lnRef>
+          <a:fillRef idx="3">
+            <a:schemeClr val="accent1"/>
+          </a:fillRef>
+          <a:effectRef idx="2">
+            <a:schemeClr val="accent1"/>
+          </a:effectRef>
+          <a:fontRef idx="minor">
+            <a:schemeClr val="lt1"/>
+          </a:fontRef>
+        </p:style>
+        <p:txBody>
+          <a:bodyPr rtlCol="0" anchor="ctr"/>
+          <a:lstStyle/>
+          <a:p>
+            <a:pPr algn="ctr"/>
+          </a:p>
+        </p:txBody>
+      </p:sp>
+      <p:sp>
+        <p:nvSpPr>
+          <p:cNvPr id="3" name="TextBox 2"/>
+          <p:cNvSpPr txBox="1"/>
+          <p:nvPr/>
+        </p:nvSpPr>
+        <p:spPr>
+          <a:xfrm>
+            <a:off x="731520" y="109728"/>
             <a:ext cx="10698480" cy="274320"/>
           </a:xfrm>
           <a:prstGeom prst="rect">
@@ -10081,6 +9952,76 @@
           <a:lstStyle/>
           <a:p>
             <a:pPr>
+              <a:defRPr sz="1100" b="1">
+                <a:solidFill>
+                  <a:srgbClr val="0D9488"/>
+                </a:solidFill>
+              </a:defRPr>
+            </a:pPr>
+            <a:r>
+              <a:t>TRAINING SETUP &amp; BENCHMARK RESULTS</a:t>
+            </a:r>
+          </a:p>
+        </p:txBody>
+      </p:sp>
+      <p:sp>
+        <p:nvSpPr>
+          <p:cNvPr id="4" name="TextBox 3"/>
+          <p:cNvSpPr txBox="1"/>
+          <p:nvPr/>
+        </p:nvSpPr>
+        <p:spPr>
+          <a:xfrm>
+            <a:off x="731520" y="365760"/>
+            <a:ext cx="10698480" cy="502920"/>
+          </a:xfrm>
+          <a:prstGeom prst="rect">
+            <a:avLst/>
+          </a:prstGeom>
+          <a:noFill/>
+        </p:spPr>
+        <p:txBody>
+          <a:bodyPr wrap="none">
+            <a:spAutoFit/>
+          </a:bodyPr>
+          <a:lstStyle/>
+          <a:p>
+            <a:pPr>
+              <a:defRPr sz="2200" b="1">
+                <a:solidFill>
+                  <a:srgbClr val="FFFFFF"/>
+                </a:solidFill>
+              </a:defRPr>
+            </a:pPr>
+            <a:r>
+              <a:t>Model Training &amp; Empirical Results (APTOS Test Set, N=550)</a:t>
+            </a:r>
+          </a:p>
+        </p:txBody>
+      </p:sp>
+      <p:sp>
+        <p:nvSpPr>
+          <p:cNvPr id="5" name="TextBox 4"/>
+          <p:cNvSpPr txBox="1"/>
+          <p:nvPr/>
+        </p:nvSpPr>
+        <p:spPr>
+          <a:xfrm>
+            <a:off x="731520" y="6492240"/>
+            <a:ext cx="10698480" cy="274320"/>
+          </a:xfrm>
+          <a:prstGeom prst="rect">
+            <a:avLst/>
+          </a:prstGeom>
+          <a:noFill/>
+        </p:spPr>
+        <p:txBody>
+          <a:bodyPr wrap="none">
+            <a:spAutoFit/>
+          </a:bodyPr>
+          <a:lstStyle/>
+          <a:p>
+            <a:pPr>
               <a:defRPr sz="900">
                 <a:solidFill>
                   <a:srgbClr val="475569"/>
@@ -10088,7 +10029,7 @@
               </a:defRPr>
             </a:pPr>
             <a:r>
-              <a:t>EDI Mid-Semester Assessment | Project ID: ERI 5 / TY_CSE_10 | Hybrid Quantum-Classical CNN for Retinal Disease</a:t>
+              <a:t>EDI Mid-Semester Assessment | Project ID: ERI 5 / TY_CSE_10 | HQNN for Retinal Disease Classification</a:t>
             </a:r>
           </a:p>
         </p:txBody>
@@ -11355,7 +11296,7 @@
               </a:defRPr>
             </a:pPr>
             <a:r>
-              <a:t>1. Autoencoder Superiority: The 4-qubit Autoencoder achieved the highest hybrid performance (QWK: 0.7693, AUC: 0.8716), confirming that non-linear manifold learning preserves subtle microaneurysms before angle mapping.</a:t>
+              <a:t>1. Autoencoder State Prep Wins: Reached QWK 0.7693 and AUC-ROC 0.8716, proving non-linear manifold learning preserves subtle microaneurysms before angle mapping.</a:t>
             </a:r>
           </a:p>
           <a:p>
@@ -11385,555 +11326,7 @@
               </a:defRPr>
             </a:pPr>
             <a:r>
-              <a:t>3. PCA Failure (37 Params): Unsupervised PCA discarded lesion variance, proving that statistical linear projection collapses clinical signals.</a:t>
-            </a:r>
-          </a:p>
-        </p:txBody>
-      </p:sp>
-    </p:spTree>
-  </p:cSld>
-  <p:clrMapOvr>
-    <a:masterClrMapping/>
-  </p:clrMapOvr>
-</p:sld>
-</file>
-
-<file path=ppt/slides/slide9.xml><?xml version="1.0" encoding="utf-8"?>
-<p:sld xmlns:a="http://schemas.openxmlformats.org/drawingml/2006/main" xmlns:p="http://schemas.openxmlformats.org/presentationml/2006/main" xmlns:r="http://schemas.openxmlformats.org/officeDocument/2006/relationships">
-  <p:cSld>
-    <p:spTree>
-      <p:nvGrpSpPr>
-        <p:cNvPr id="1" name=""/>
-        <p:cNvGrpSpPr/>
-        <p:nvPr/>
-      </p:nvGrpSpPr>
-      <p:grpSpPr/>
-      <p:sp>
-        <p:nvSpPr>
-          <p:cNvPr id="2" name="Rectangle 1"/>
-          <p:cNvSpPr/>
-          <p:nvPr/>
-        </p:nvSpPr>
-        <p:spPr>
-          <a:xfrm>
-            <a:off x="0" y="0"/>
-            <a:ext cx="12191695" cy="1005840"/>
-          </a:xfrm>
-          <a:prstGeom prst="rect">
-            <a:avLst/>
-          </a:prstGeom>
-          <a:solidFill>
-            <a:srgbClr val="0F172A"/>
-          </a:solidFill>
-          <a:ln>
-            <a:solidFill>
-              <a:srgbClr val="0F172A"/>
-            </a:solidFill>
-          </a:ln>
-        </p:spPr>
-        <p:style>
-          <a:lnRef idx="1">
-            <a:schemeClr val="accent1"/>
-          </a:lnRef>
-          <a:fillRef idx="3">
-            <a:schemeClr val="accent1"/>
-          </a:fillRef>
-          <a:effectRef idx="2">
-            <a:schemeClr val="accent1"/>
-          </a:effectRef>
-          <a:fontRef idx="minor">
-            <a:schemeClr val="lt1"/>
-          </a:fontRef>
-        </p:style>
-        <p:txBody>
-          <a:bodyPr rtlCol="0" anchor="ctr"/>
-          <a:lstStyle/>
-          <a:p>
-            <a:pPr algn="ctr"/>
-          </a:p>
-        </p:txBody>
-      </p:sp>
-      <p:sp>
-        <p:nvSpPr>
-          <p:cNvPr id="3" name="TextBox 2"/>
-          <p:cNvSpPr txBox="1"/>
-          <p:nvPr/>
-        </p:nvSpPr>
-        <p:spPr>
-          <a:xfrm>
-            <a:off x="731520" y="109728"/>
-            <a:ext cx="10698480" cy="274320"/>
-          </a:xfrm>
-          <a:prstGeom prst="rect">
-            <a:avLst/>
-          </a:prstGeom>
-          <a:noFill/>
-        </p:spPr>
-        <p:txBody>
-          <a:bodyPr wrap="square">
-            <a:spAutoFit/>
-          </a:bodyPr>
-          <a:lstStyle/>
-          <a:p>
-            <a:pPr>
-              <a:defRPr sz="1100" b="1">
-                <a:solidFill>
-                  <a:srgbClr val="0D9488"/>
-                </a:solidFill>
-              </a:defRPr>
-            </a:pPr>
-            <a:r>
-              <a:t>EDI PARAMETER 7: METHODOLOGY &amp; COMPLEXITY</a:t>
-            </a:r>
-          </a:p>
-        </p:txBody>
-      </p:sp>
-      <p:sp>
-        <p:nvSpPr>
-          <p:cNvPr id="4" name="TextBox 3"/>
-          <p:cNvSpPr txBox="1"/>
-          <p:nvPr/>
-        </p:nvSpPr>
-        <p:spPr>
-          <a:xfrm>
-            <a:off x="731520" y="365760"/>
-            <a:ext cx="10698480" cy="502920"/>
-          </a:xfrm>
-          <a:prstGeom prst="rect">
-            <a:avLst/>
-          </a:prstGeom>
-          <a:noFill/>
-        </p:spPr>
-        <p:txBody>
-          <a:bodyPr wrap="square">
-            <a:spAutoFit/>
-          </a:bodyPr>
-          <a:lstStyle/>
-          <a:p>
-            <a:pPr>
-              <a:defRPr sz="2200" b="1">
-                <a:solidFill>
-                  <a:srgbClr val="FFFFFF"/>
-                </a:solidFill>
-              </a:defRPr>
-            </a:pPr>
-            <a:r>
-              <a:t>Scientific Insights &amp; Engineering Challenges Overcome</a:t>
-            </a:r>
-          </a:p>
-        </p:txBody>
-      </p:sp>
-      <p:sp>
-        <p:nvSpPr>
-          <p:cNvPr id="5" name="TextBox 4"/>
-          <p:cNvSpPr txBox="1"/>
-          <p:nvPr/>
-        </p:nvSpPr>
-        <p:spPr>
-          <a:xfrm>
-            <a:off x="731520" y="6492240"/>
-            <a:ext cx="10698480" cy="274320"/>
-          </a:xfrm>
-          <a:prstGeom prst="rect">
-            <a:avLst/>
-          </a:prstGeom>
-          <a:noFill/>
-        </p:spPr>
-        <p:txBody>
-          <a:bodyPr wrap="none">
-            <a:spAutoFit/>
-          </a:bodyPr>
-          <a:lstStyle/>
-          <a:p>
-            <a:pPr>
-              <a:defRPr sz="900">
-                <a:solidFill>
-                  <a:srgbClr val="475569"/>
-                </a:solidFill>
-              </a:defRPr>
-            </a:pPr>
-            <a:r>
-              <a:t>EDI Mid-Semester Assessment | Project ID: ERI 5 / TY_CSE_10 | Hybrid Quantum-Classical CNN for Retinal Disease</a:t>
-            </a:r>
-          </a:p>
-        </p:txBody>
-      </p:sp>
-      <p:sp>
-        <p:nvSpPr>
-          <p:cNvPr id="6" name="Rounded Rectangle 5"/>
-          <p:cNvSpPr/>
-          <p:nvPr/>
-        </p:nvSpPr>
-        <p:spPr>
-          <a:xfrm>
-            <a:off x="731520" y="1280160"/>
-            <a:ext cx="5212080" cy="2286000"/>
-          </a:xfrm>
-          <a:prstGeom prst="roundRect">
-            <a:avLst/>
-          </a:prstGeom>
-          <a:solidFill>
-            <a:srgbClr val="FFFFFF"/>
-          </a:solidFill>
-          <a:ln w="12700">
-            <a:solidFill>
-              <a:srgbClr val="E2E8F0"/>
-            </a:solidFill>
-          </a:ln>
-        </p:spPr>
-        <p:style>
-          <a:lnRef idx="1">
-            <a:schemeClr val="accent1"/>
-          </a:lnRef>
-          <a:fillRef idx="3">
-            <a:schemeClr val="accent1"/>
-          </a:fillRef>
-          <a:effectRef idx="2">
-            <a:schemeClr val="accent1"/>
-          </a:effectRef>
-          <a:fontRef idx="minor">
-            <a:schemeClr val="lt1"/>
-          </a:fontRef>
-        </p:style>
-        <p:txBody>
-          <a:bodyPr rtlCol="0" anchor="ctr"/>
-          <a:lstStyle/>
-          <a:p>
-            <a:pPr algn="ctr"/>
-          </a:p>
-        </p:txBody>
-      </p:sp>
-      <p:sp>
-        <p:nvSpPr>
-          <p:cNvPr id="7" name="TextBox 6"/>
-          <p:cNvSpPr txBox="1"/>
-          <p:nvPr/>
-        </p:nvSpPr>
-        <p:spPr>
-          <a:xfrm>
-            <a:off x="914400" y="1417319"/>
-            <a:ext cx="4846320" cy="2011680"/>
-          </a:xfrm>
-          <a:prstGeom prst="rect">
-            <a:avLst/>
-          </a:prstGeom>
-          <a:noFill/>
-        </p:spPr>
-        <p:txBody>
-          <a:bodyPr wrap="square">
-            <a:spAutoFit/>
-          </a:bodyPr>
-          <a:lstStyle/>
-          <a:p>
-            <a:pPr>
-              <a:defRPr sz="1300" b="1">
-                <a:solidFill>
-                  <a:srgbClr val="DC2626"/>
-                </a:solidFill>
-              </a:defRPr>
-            </a:pPr>
-            <a:r>
-              <a:t>Insight 1: The '37-Parameter Paradox'</a:t>
-            </a:r>
-          </a:p>
-          <a:p>
-            <a:pPr>
-              <a:spcBef>
-                <a:spcPts val="600"/>
-              </a:spcBef>
-              <a:defRPr sz="1100">
-                <a:solidFill>
-                  <a:srgbClr val="0F172A"/>
-                </a:solidFill>
-              </a:defRPr>
-            </a:pPr>
-            <a:r>
-              <a:t>The PCA model had only 37 trainable parameters (12 quantum + 25 head) with 0.62ms latency, but collapsed (QWK 0.1379). Cause: PCA captures global illumination variance (&gt;95%) while discarding microaneurysm pathology (&lt;1% of pixel variance).</a:t>
-            </a:r>
-          </a:p>
-        </p:txBody>
-      </p:sp>
-      <p:sp>
-        <p:nvSpPr>
-          <p:cNvPr id="8" name="Rounded Rectangle 7"/>
-          <p:cNvSpPr/>
-          <p:nvPr/>
-        </p:nvSpPr>
-        <p:spPr>
-          <a:xfrm>
-            <a:off x="6217920" y="1280160"/>
-            <a:ext cx="5212080" cy="2286000"/>
-          </a:xfrm>
-          <a:prstGeom prst="roundRect">
-            <a:avLst/>
-          </a:prstGeom>
-          <a:solidFill>
-            <a:srgbClr val="FFFFFF"/>
-          </a:solidFill>
-          <a:ln w="12700">
-            <a:solidFill>
-              <a:srgbClr val="E2E8F0"/>
-            </a:solidFill>
-          </a:ln>
-        </p:spPr>
-        <p:style>
-          <a:lnRef idx="1">
-            <a:schemeClr val="accent1"/>
-          </a:lnRef>
-          <a:fillRef idx="3">
-            <a:schemeClr val="accent1"/>
-          </a:fillRef>
-          <a:effectRef idx="2">
-            <a:schemeClr val="accent1"/>
-          </a:effectRef>
-          <a:fontRef idx="minor">
-            <a:schemeClr val="lt1"/>
-          </a:fontRef>
-        </p:style>
-        <p:txBody>
-          <a:bodyPr rtlCol="0" anchor="ctr"/>
-          <a:lstStyle/>
-          <a:p>
-            <a:pPr algn="ctr"/>
-          </a:p>
-        </p:txBody>
-      </p:sp>
-      <p:sp>
-        <p:nvSpPr>
-          <p:cNvPr id="9" name="TextBox 8"/>
-          <p:cNvSpPr txBox="1"/>
-          <p:nvPr/>
-        </p:nvSpPr>
-        <p:spPr>
-          <a:xfrm>
-            <a:off x="6400800" y="1417319"/>
-            <a:ext cx="4846320" cy="2011680"/>
-          </a:xfrm>
-          <a:prstGeom prst="rect">
-            <a:avLst/>
-          </a:prstGeom>
-          <a:noFill/>
-        </p:spPr>
-        <p:txBody>
-          <a:bodyPr wrap="square">
-            <a:spAutoFit/>
-          </a:bodyPr>
-          <a:lstStyle/>
-          <a:p>
-            <a:pPr>
-              <a:defRPr sz="1300" b="1">
-                <a:solidFill>
-                  <a:srgbClr val="1E3A8A"/>
-                </a:solidFill>
-              </a:defRPr>
-            </a:pPr>
-            <a:r>
-              <a:t>Insight 2: 4 Qubits vs. 8 Qubits Dynamics</a:t>
-            </a:r>
-          </a:p>
-          <a:p>
-            <a:pPr>
-              <a:spcBef>
-                <a:spcPts val="600"/>
-              </a:spcBef>
-              <a:defRPr sz="1100">
-                <a:solidFill>
-                  <a:srgbClr val="0F172A"/>
-                </a:solidFill>
-              </a:defRPr>
-            </a:pPr>
-            <a:r>
-              <a:t>8 qubits reached higher raw accuracy (67.82% vs 58.12%) but lower QWK (0.6376 vs 0.7693) and stopped early at epoch 12. Cause: A 256-dimensional Hilbert space overfits intermediate boundaries; 4 qubits acts as an effective regularizer.</a:t>
-            </a:r>
-          </a:p>
-        </p:txBody>
-      </p:sp>
-      <p:sp>
-        <p:nvSpPr>
-          <p:cNvPr id="10" name="Rounded Rectangle 9"/>
-          <p:cNvSpPr/>
-          <p:nvPr/>
-        </p:nvSpPr>
-        <p:spPr>
-          <a:xfrm>
-            <a:off x="731520" y="3749039"/>
-            <a:ext cx="5212080" cy="2286000"/>
-          </a:xfrm>
-          <a:prstGeom prst="roundRect">
-            <a:avLst/>
-          </a:prstGeom>
-          <a:solidFill>
-            <a:srgbClr val="FFFFFF"/>
-          </a:solidFill>
-          <a:ln w="12700">
-            <a:solidFill>
-              <a:srgbClr val="E2E8F0"/>
-            </a:solidFill>
-          </a:ln>
-        </p:spPr>
-        <p:style>
-          <a:lnRef idx="1">
-            <a:schemeClr val="accent1"/>
-          </a:lnRef>
-          <a:fillRef idx="3">
-            <a:schemeClr val="accent1"/>
-          </a:fillRef>
-          <a:effectRef idx="2">
-            <a:schemeClr val="accent1"/>
-          </a:effectRef>
-          <a:fontRef idx="minor">
-            <a:schemeClr val="lt1"/>
-          </a:fontRef>
-        </p:style>
-        <p:txBody>
-          <a:bodyPr rtlCol="0" anchor="ctr"/>
-          <a:lstStyle/>
-          <a:p>
-            <a:pPr algn="ctr"/>
-          </a:p>
-        </p:txBody>
-      </p:sp>
-      <p:sp>
-        <p:nvSpPr>
-          <p:cNvPr id="11" name="TextBox 10"/>
-          <p:cNvSpPr txBox="1"/>
-          <p:nvPr/>
-        </p:nvSpPr>
-        <p:spPr>
-          <a:xfrm>
-            <a:off x="914400" y="3886200"/>
-            <a:ext cx="4846320" cy="2011680"/>
-          </a:xfrm>
-          <a:prstGeom prst="rect">
-            <a:avLst/>
-          </a:prstGeom>
-          <a:noFill/>
-        </p:spPr>
-        <p:txBody>
-          <a:bodyPr wrap="square">
-            <a:spAutoFit/>
-          </a:bodyPr>
-          <a:lstStyle/>
-          <a:p>
-            <a:pPr>
-              <a:defRPr sz="1300" b="1">
-                <a:solidFill>
-                  <a:srgbClr val="0D9488"/>
-                </a:solidFill>
-              </a:defRPr>
-            </a:pPr>
-            <a:r>
-              <a:t>Hardship 1: GPU-CPU Device Mismatch</a:t>
-            </a:r>
-          </a:p>
-          <a:p>
-            <a:pPr>
-              <a:spcBef>
-                <a:spcPts val="600"/>
-              </a:spcBef>
-              <a:defRPr sz="1100">
-                <a:solidFill>
-                  <a:srgbClr val="0F172A"/>
-                </a:solidFill>
-              </a:defRPr>
-            </a:pPr>
-            <a:r>
-              <a:t>PennyLane's default.qubit simulator executes on CPU only; passing CUDA tensors threw fatal runtime errors. Solution: Engineered an automatic device bridge in hybrid_model.py (.cpu() before quantum layer, .to(device) after).</a:t>
-            </a:r>
-          </a:p>
-        </p:txBody>
-      </p:sp>
-      <p:sp>
-        <p:nvSpPr>
-          <p:cNvPr id="12" name="Rounded Rectangle 11"/>
-          <p:cNvSpPr/>
-          <p:nvPr/>
-        </p:nvSpPr>
-        <p:spPr>
-          <a:xfrm>
-            <a:off x="6217920" y="3749039"/>
-            <a:ext cx="5212080" cy="2286000"/>
-          </a:xfrm>
-          <a:prstGeom prst="roundRect">
-            <a:avLst/>
-          </a:prstGeom>
-          <a:solidFill>
-            <a:srgbClr val="FFFFFF"/>
-          </a:solidFill>
-          <a:ln w="12700">
-            <a:solidFill>
-              <a:srgbClr val="E2E8F0"/>
-            </a:solidFill>
-          </a:ln>
-        </p:spPr>
-        <p:style>
-          <a:lnRef idx="1">
-            <a:schemeClr val="accent1"/>
-          </a:lnRef>
-          <a:fillRef idx="3">
-            <a:schemeClr val="accent1"/>
-          </a:fillRef>
-          <a:effectRef idx="2">
-            <a:schemeClr val="accent1"/>
-          </a:effectRef>
-          <a:fontRef idx="minor">
-            <a:schemeClr val="lt1"/>
-          </a:fontRef>
-        </p:style>
-        <p:txBody>
-          <a:bodyPr rtlCol="0" anchor="ctr"/>
-          <a:lstStyle/>
-          <a:p>
-            <a:pPr algn="ctr"/>
-          </a:p>
-        </p:txBody>
-      </p:sp>
-      <p:sp>
-        <p:nvSpPr>
-          <p:cNvPr id="13" name="TextBox 12"/>
-          <p:cNvSpPr txBox="1"/>
-          <p:nvPr/>
-        </p:nvSpPr>
-        <p:spPr>
-          <a:xfrm>
-            <a:off x="6400800" y="3886200"/>
-            <a:ext cx="4846320" cy="2011680"/>
-          </a:xfrm>
-          <a:prstGeom prst="rect">
-            <a:avLst/>
-          </a:prstGeom>
-          <a:noFill/>
-        </p:spPr>
-        <p:txBody>
-          <a:bodyPr wrap="square">
-            <a:spAutoFit/>
-          </a:bodyPr>
-          <a:lstStyle/>
-          <a:p>
-            <a:pPr>
-              <a:defRPr sz="1300" b="1">
-                <a:solidFill>
-                  <a:srgbClr val="16A34A"/>
-                </a:solidFill>
-              </a:defRPr>
-            </a:pPr>
-            <a:r>
-              <a:t>Hardship 2: 45-Minute Epoch Bottleneck</a:t>
-            </a:r>
-          </a:p>
-          <a:p>
-            <a:pPr>
-              <a:spcBef>
-                <a:spcPts val="600"/>
-              </a:spcBef>
-              <a:defRPr sz="1100">
-                <a:solidFill>
-                  <a:srgbClr val="0F172A"/>
-                </a:solidFill>
-              </a:defRPr>
-            </a:pPr>
-            <a:r>
-              <a:t>Simulating 2,563 images through CNN + quantum circuit took &gt;45 min/epoch. Solution: Froze backbone and cached 512-d embeddings to disk (.pt files), slashing training time to 12 seconds/epoch.</a:t>
+              <a:t>3. Training Speed Acceleration: Caching 512-d features reduced epoch training time from 45 minutes to 12 seconds per epoch.</a:t>
             </a:r>
           </a:p>
         </p:txBody>

--- a/reports/mid_sem_presentation.pptx
+++ b/reports/mid_sem_presentation.pptx
@@ -7554,7 +7554,7 @@
               </a:defRPr>
             </a:pPr>
             <a:r>
-              <a:t>TECHNICAL METHODOLOGY</a:t>
+              <a:t>TECHNICAL METHODOLOGY &amp; MATHEMATICAL FORMULATIONS</a:t>
             </a:r>
           </a:p>
         </p:txBody>
@@ -7589,7 +7589,7 @@
               </a:defRPr>
             </a:pPr>
             <a:r>
-              <a:t>Methodology: Clinical Preprocessing &amp; Mathematical Formulations</a:t>
+              <a:t>Methodology: Formulations &amp; Optimization</a:t>
             </a:r>
           </a:p>
         </p:txBody>
@@ -7638,7 +7638,7 @@
         <p:spPr>
           <a:xfrm>
             <a:off x="731520" y="1280160"/>
-            <a:ext cx="3410712" cy="2286000"/>
+            <a:ext cx="3337560" cy="4937760"/>
           </a:xfrm>
           <a:prstGeom prst="roundRect">
             <a:avLst/>
@@ -7648,7 +7648,7 @@
           </a:solidFill>
           <a:ln w="12700">
             <a:solidFill>
-              <a:srgbClr val="E2E8F0"/>
+              <a:srgbClr val="DBEAFE"/>
             </a:solidFill>
           </a:ln>
         </p:spPr>
@@ -7682,8 +7682,43 @@
         </p:nvSpPr>
         <p:spPr>
           <a:xfrm>
-            <a:off x="868680" y="1417319"/>
-            <a:ext cx="3136392" cy="2011680"/>
+            <a:off x="914400" y="1371600"/>
+            <a:ext cx="2971800" cy="457200"/>
+          </a:xfrm>
+          <a:prstGeom prst="rect">
+            <a:avLst/>
+          </a:prstGeom>
+          <a:noFill/>
+        </p:spPr>
+        <p:txBody>
+          <a:bodyPr wrap="none">
+            <a:spAutoFit/>
+          </a:bodyPr>
+          <a:lstStyle/>
+          <a:p>
+            <a:pPr>
+              <a:defRPr sz="1700" b="1">
+                <a:solidFill>
+                  <a:srgbClr val="1E3A8A"/>
+                </a:solidFill>
+              </a:defRPr>
+            </a:pPr>
+            <a:r>
+              <a:t>❶  Preprocessing</a:t>
+            </a:r>
+          </a:p>
+        </p:txBody>
+      </p:sp>
+      <p:sp>
+        <p:nvSpPr>
+          <p:cNvPr id="8" name="TextBox 7"/>
+          <p:cNvSpPr txBox="1"/>
+          <p:nvPr/>
+        </p:nvSpPr>
+        <p:spPr>
+          <a:xfrm>
+            <a:off x="914400" y="1920240"/>
+            <a:ext cx="2971800" cy="4114800"/>
           </a:xfrm>
           <a:prstGeom prst="rect">
             <a:avLst/>
@@ -7697,51 +7732,103 @@
           <a:lstStyle/>
           <a:p>
             <a:pPr>
-              <a:defRPr sz="1200" b="1">
+              <a:defRPr sz="1300" b="1">
                 <a:solidFill>
                   <a:srgbClr val="1E3A8A"/>
                 </a:solidFill>
               </a:defRPr>
             </a:pPr>
             <a:r>
-              <a:t>1. Clinical Preprocessing</a:t>
+              <a:t>Ben Graham Circular Crop</a:t>
             </a:r>
           </a:p>
           <a:p>
             <a:pPr>
               <a:spcBef>
-                <a:spcPts val="600"/>
+                <a:spcPts val="300"/>
               </a:spcBef>
-              <a:defRPr sz="1000">
-                <a:solidFill>
-                  <a:srgbClr val="0F172A"/>
-                </a:solidFill>
-              </a:defRPr>
-            </a:pPr>
-            <a:r>
-              <a:t>• Ben Graham Circular Crop: Automates contour thresholding, circular masking, and black margin removal.</a:t>
-            </a:r>
-            <a:br/>
-            <a:r>
-              <a:t>• Green-Channel CLAHE: Isolates 540-575nm spectrum where hemoglobin absorbs light, maximizing lesion contrast.</a:t>
-            </a:r>
-            <a:br/>
-            <a:r>
-              <a:t>• Bilinear Resize: Standardizes images to 224x224x3.</a:t>
-            </a:r>
-          </a:p>
-        </p:txBody>
-      </p:sp>
-      <p:sp>
-        <p:nvSpPr>
-          <p:cNvPr id="8" name="Rounded Rectangle 7"/>
+              <a:defRPr sz="1100">
+                <a:solidFill>
+                  <a:srgbClr val="475569"/>
+                </a:solidFill>
+              </a:defRPr>
+            </a:pPr>
+            <a:r>
+              <a:t>Masks non-retinal borders and centers the image; removes dark margins and optical artifacts.</a:t>
+            </a:r>
+          </a:p>
+          <a:p>
+            <a:pPr>
+              <a:spcBef>
+                <a:spcPts val="1400"/>
+              </a:spcBef>
+              <a:defRPr sz="1300" b="1">
+                <a:solidFill>
+                  <a:srgbClr val="1E3A8A"/>
+                </a:solidFill>
+              </a:defRPr>
+            </a:pPr>
+            <a:r>
+              <a:t>Green-Channel CLAHE</a:t>
+            </a:r>
+          </a:p>
+          <a:p>
+            <a:pPr>
+              <a:spcBef>
+                <a:spcPts val="300"/>
+              </a:spcBef>
+              <a:defRPr sz="1100">
+                <a:solidFill>
+                  <a:srgbClr val="475569"/>
+                </a:solidFill>
+              </a:defRPr>
+            </a:pPr>
+            <a:r>
+              <a:t>Maximizes lesion contrast in the 540–575 nm spectrum where hemoglobin absorbs light.</a:t>
+            </a:r>
+          </a:p>
+          <a:p>
+            <a:pPr>
+              <a:spcBef>
+                <a:spcPts val="1400"/>
+              </a:spcBef>
+              <a:defRPr sz="1300" b="1">
+                <a:solidFill>
+                  <a:srgbClr val="1E3A8A"/>
+                </a:solidFill>
+              </a:defRPr>
+            </a:pPr>
+            <a:r>
+              <a:t>Standardized Resize</a:t>
+            </a:r>
+          </a:p>
+          <a:p>
+            <a:pPr>
+              <a:spcBef>
+                <a:spcPts val="300"/>
+              </a:spcBef>
+              <a:defRPr sz="1100">
+                <a:solidFill>
+                  <a:srgbClr val="475569"/>
+                </a:solidFill>
+              </a:defRPr>
+            </a:pPr>
+            <a:r>
+              <a:t>All images standardized and bilinearly interpolated to 224 × 224 × 3.</a:t>
+            </a:r>
+          </a:p>
+        </p:txBody>
+      </p:sp>
+      <p:sp>
+        <p:nvSpPr>
+          <p:cNvPr id="9" name="Rounded Rectangle 8"/>
           <p:cNvSpPr/>
           <p:nvPr/>
         </p:nvSpPr>
         <p:spPr>
           <a:xfrm>
-            <a:off x="4389120" y="1280160"/>
-            <a:ext cx="3410712" cy="2286000"/>
+            <a:off x="4425696" y="1280160"/>
+            <a:ext cx="3337560" cy="4937760"/>
           </a:xfrm>
           <a:prstGeom prst="roundRect">
             <a:avLst/>
@@ -7751,7 +7838,7 @@
           </a:solidFill>
           <a:ln w="12700">
             <a:solidFill>
-              <a:srgbClr val="E2E8F0"/>
+              <a:srgbClr val="E9D5FF"/>
             </a:solidFill>
           </a:ln>
         </p:spPr>
@@ -7779,14 +7866,49 @@
       </p:sp>
       <p:sp>
         <p:nvSpPr>
-          <p:cNvPr id="9" name="TextBox 8"/>
+          <p:cNvPr id="10" name="TextBox 9"/>
           <p:cNvSpPr txBox="1"/>
           <p:nvPr/>
         </p:nvSpPr>
         <p:spPr>
           <a:xfrm>
-            <a:off x="4526280" y="1417319"/>
-            <a:ext cx="3136392" cy="2011680"/>
+            <a:off x="4608576" y="1371600"/>
+            <a:ext cx="2971800" cy="457200"/>
+          </a:xfrm>
+          <a:prstGeom prst="rect">
+            <a:avLst/>
+          </a:prstGeom>
+          <a:noFill/>
+        </p:spPr>
+        <p:txBody>
+          <a:bodyPr wrap="none">
+            <a:spAutoFit/>
+          </a:bodyPr>
+          <a:lstStyle/>
+          <a:p>
+            <a:pPr>
+              <a:defRPr sz="1700" b="1">
+                <a:solidFill>
+                  <a:srgbClr val="7E22CE"/>
+                </a:solidFill>
+              </a:defRPr>
+            </a:pPr>
+            <a:r>
+              <a:t>❷  Loss Function</a:t>
+            </a:r>
+          </a:p>
+        </p:txBody>
+      </p:sp>
+      <p:sp>
+        <p:nvSpPr>
+          <p:cNvPr id="11" name="TextBox 10"/>
+          <p:cNvSpPr txBox="1"/>
+          <p:nvPr/>
+        </p:nvSpPr>
+        <p:spPr>
+          <a:xfrm>
+            <a:off x="4608576" y="1920240"/>
+            <a:ext cx="2971800" cy="4114800"/>
           </a:xfrm>
           <a:prstGeom prst="rect">
             <a:avLst/>
@@ -7800,52 +7922,103 @@
           <a:lstStyle/>
           <a:p>
             <a:pPr>
+              <a:defRPr sz="1150">
+                <a:solidFill>
+                  <a:srgbClr val="0F172A"/>
+                </a:solidFill>
+              </a:defRPr>
+            </a:pPr>
+            <a:r>
+              <a:t>We use Class-Weighted Focal Loss to combat severe class imbalance:</a:t>
+            </a:r>
+          </a:p>
+          <a:p>
+            <a:pPr>
+              <a:spcBef>
+                <a:spcPts val="1000"/>
+              </a:spcBef>
               <a:defRPr sz="1200" b="1">
                 <a:solidFill>
-                  <a:srgbClr val="0D9488"/>
-                </a:solidFill>
-              </a:defRPr>
-            </a:pPr>
-            <a:r>
-              <a:t>2. Class-Weighted Focal Loss</a:t>
+                  <a:srgbClr val="7E22CE"/>
+                </a:solidFill>
+              </a:defRPr>
+            </a:pPr>
+            <a:r>
+              <a:t>ℒ_Focal = - ∑_c α_c y_c (1 - p_c)^γ log(p_c)</a:t>
             </a:r>
           </a:p>
           <a:p>
             <a:pPr>
               <a:spcBef>
-                <a:spcPts val="600"/>
+                <a:spcPts val="1400"/>
               </a:spcBef>
-              <a:defRPr sz="1000">
-                <a:solidFill>
-                  <a:srgbClr val="0F172A"/>
-                </a:solidFill>
-              </a:defRPr>
-            </a:pPr>
-            <a:r>
-              <a:t>L_Focal = -sum y_c * alpha_c * (1 - p_c)^gamma * log(p_c)</a:t>
-            </a:r>
-            <a:br/>
-            <a:br/>
-            <a:r>
-              <a:t>• gamma = 2.0 suppresses easy majority-class gradients (Grade 0)</a:t>
-            </a:r>
-            <a:br/>
-            <a:r>
-              <a:t>• alpha_c = N / (C * N_c) enforces 9.3x higher penalty on rare Grade 3 lesions.</a:t>
-            </a:r>
-          </a:p>
-        </p:txBody>
-      </p:sp>
-      <p:sp>
-        <p:nvSpPr>
-          <p:cNvPr id="10" name="Rounded Rectangle 9"/>
+              <a:defRPr sz="1300" b="1">
+                <a:solidFill>
+                  <a:srgbClr val="7E22CE"/>
+                </a:solidFill>
+              </a:defRPr>
+            </a:pPr>
+            <a:r>
+              <a:t>γ  Gamma (γ = 2.0)</a:t>
+            </a:r>
+          </a:p>
+          <a:p>
+            <a:pPr>
+              <a:spcBef>
+                <a:spcPts val="300"/>
+              </a:spcBef>
+              <a:defRPr sz="1100">
+                <a:solidFill>
+                  <a:srgbClr val="475569"/>
+                </a:solidFill>
+              </a:defRPr>
+            </a:pPr>
+            <a:r>
+              <a:t>Suppresses gradient contributions from easy, dominant majority classes (Grade 0).</a:t>
+            </a:r>
+          </a:p>
+          <a:p>
+            <a:pPr>
+              <a:spcBef>
+                <a:spcPts val="1400"/>
+              </a:spcBef>
+              <a:defRPr sz="1300" b="1">
+                <a:solidFill>
+                  <a:srgbClr val="7E22CE"/>
+                </a:solidFill>
+              </a:defRPr>
+            </a:pPr>
+            <a:r>
+              <a:t>α  Alpha (α_c)</a:t>
+            </a:r>
+          </a:p>
+          <a:p>
+            <a:pPr>
+              <a:spcBef>
+                <a:spcPts val="300"/>
+              </a:spcBef>
+              <a:defRPr sz="1100">
+                <a:solidFill>
+                  <a:srgbClr val="475569"/>
+                </a:solidFill>
+              </a:defRPr>
+            </a:pPr>
+            <a:r>
+              <a:t>Enforces a 9.3× higher gradient penalty on rare Grade 3 lesions (α_3 = 3.81 vs α_0 = 0.41).</a:t>
+            </a:r>
+          </a:p>
+        </p:txBody>
+      </p:sp>
+      <p:sp>
+        <p:nvSpPr>
+          <p:cNvPr id="12" name="Rounded Rectangle 11"/>
           <p:cNvSpPr/>
           <p:nvPr/>
         </p:nvSpPr>
         <p:spPr>
           <a:xfrm>
-            <a:off x="8046720" y="1280160"/>
-            <a:ext cx="3410712" cy="2286000"/>
+            <a:off x="8119872" y="1280160"/>
+            <a:ext cx="3337560" cy="4937760"/>
           </a:xfrm>
           <a:prstGeom prst="roundRect">
             <a:avLst/>
@@ -7855,7 +8028,7 @@
           </a:solidFill>
           <a:ln w="12700">
             <a:solidFill>
-              <a:srgbClr val="E2E8F0"/>
+              <a:srgbClr val="CCFBF1"/>
             </a:solidFill>
           </a:ln>
         </p:spPr>
@@ -7883,14 +8056,49 @@
       </p:sp>
       <p:sp>
         <p:nvSpPr>
-          <p:cNvPr id="11" name="TextBox 10"/>
+          <p:cNvPr id="13" name="TextBox 12"/>
           <p:cNvSpPr txBox="1"/>
           <p:nvPr/>
         </p:nvSpPr>
         <p:spPr>
           <a:xfrm>
-            <a:off x="8183880" y="1417319"/>
-            <a:ext cx="3136392" cy="2011680"/>
+            <a:off x="8302752" y="1371600"/>
+            <a:ext cx="2971800" cy="457200"/>
+          </a:xfrm>
+          <a:prstGeom prst="rect">
+            <a:avLst/>
+          </a:prstGeom>
+          <a:noFill/>
+        </p:spPr>
+        <p:txBody>
+          <a:bodyPr wrap="none">
+            <a:spAutoFit/>
+          </a:bodyPr>
+          <a:lstStyle/>
+          <a:p>
+            <a:pPr>
+              <a:defRPr sz="1700" b="1">
+                <a:solidFill>
+                  <a:srgbClr val="0D9488"/>
+                </a:solidFill>
+              </a:defRPr>
+            </a:pPr>
+            <a:r>
+              <a:t>❸  Quantum Layer</a:t>
+            </a:r>
+          </a:p>
+        </p:txBody>
+      </p:sp>
+      <p:sp>
+        <p:nvSpPr>
+          <p:cNvPr id="14" name="TextBox 13"/>
+          <p:cNvSpPr txBox="1"/>
+          <p:nvPr/>
+        </p:nvSpPr>
+        <p:spPr>
+          <a:xfrm>
+            <a:off x="8302752" y="1920240"/>
+            <a:ext cx="2971800" cy="4114800"/>
           </a:xfrm>
           <a:prstGeom prst="rect">
             <a:avLst/>
@@ -7904,6 +8112,44 @@
           <a:lstStyle/>
           <a:p>
             <a:pPr>
+              <a:defRPr sz="1150">
+                <a:solidFill>
+                  <a:srgbClr val="0F172A"/>
+                </a:solidFill>
+              </a:defRPr>
+            </a:pPr>
+            <a:r>
+              <a:t>A Strongly Entangling Ansatz U(θ) is trained via the Parameter-Shift Rule for exact analytical gradients:</a:t>
+            </a:r>
+          </a:p>
+          <a:p>
+            <a:pPr>
+              <a:spcBef>
+                <a:spcPts val="800"/>
+              </a:spcBef>
+              <a:defRPr sz="950" b="1">
+                <a:solidFill>
+                  <a:srgbClr val="0D9488"/>
+                </a:solidFill>
+              </a:defRPr>
+            </a:pPr>
+            <a:r>
+              <a:t>|0⟩ ── Ry(θ_0) ── ● ─────── R(α,β,γ) ── ⟨Z_0⟩</a:t>
+            </a:r>
+            <a:br/>
+            <a:r>
+              <a:t>|0⟩ ── Ry(θ_1) ── ⊕ ── ● ── R(α,β,γ) ── ⟨Z_1⟩</a:t>
+            </a:r>
+            <a:br/>
+            <a:r>
+              <a:t>|0⟩ ── Ry(θ_2) ─────── ⊕ ── R(α,β,γ) ── ⟨Z_2⟩</a:t>
+            </a:r>
+          </a:p>
+          <a:p>
+            <a:pPr>
+              <a:spcBef>
+                <a:spcPts val="1200"/>
+              </a:spcBef>
               <a:defRPr sz="1200" b="1">
                 <a:solidFill>
                   <a:srgbClr val="1E3A8A"/>
@@ -7911,7 +8157,22 @@
               </a:defRPr>
             </a:pPr>
             <a:r>
-              <a:t>3. Quantum State Preparation</a:t>
+              <a:t>Quadratic Weighted Kappa (QWK):</a:t>
+            </a:r>
+          </a:p>
+          <a:p>
+            <a:pPr>
+              <a:spcBef>
+                <a:spcPts val="200"/>
+              </a:spcBef>
+              <a:defRPr sz="1050">
+                <a:solidFill>
+                  <a:srgbClr val="475569"/>
+                </a:solidFill>
+              </a:defRPr>
+            </a:pPr>
+            <a:r>
+              <a:t>Clinical agreement metric that penalizes distant misclassifications quadratically:</a:t>
             </a:r>
           </a:p>
           <a:p>
@@ -7919,335 +8180,18 @@
               <a:spcBef>
                 <a:spcPts val="600"/>
               </a:spcBef>
-              <a:defRPr sz="1000">
-                <a:solidFill>
-                  <a:srgbClr val="0F172A"/>
-                </a:solidFill>
-              </a:defRPr>
-            </a:pPr>
-            <a:r>
-              <a:t>|psi(z)&gt; = (X)_{i=0}^{n-1} Ry(z_i) |0&gt;</a:t>
+              <a:defRPr sz="1050" b="1">
+                <a:solidFill>
+                  <a:srgbClr val="1E3A8A"/>
+                </a:solidFill>
+              </a:defRPr>
+            </a:pPr>
+            <a:r>
+              <a:t>κ = 1 - (∑_ij w_ij O_ij) / (∑_ij w_ij E_ij)</a:t>
             </a:r>
             <a:br/>
-            <a:br/>
-            <a:r>
-              <a:t>• Continuous angles z_i in [-pi, pi] rotate qubits on Bloch sphere</a:t>
-            </a:r>
-            <a:br/>
-            <a:r>
-              <a:t>• Constant circuit depth O(1); zero multi-qubit CNOT overhead.</a:t>
-            </a:r>
-          </a:p>
-        </p:txBody>
-      </p:sp>
-      <p:sp>
-        <p:nvSpPr>
-          <p:cNvPr id="12" name="Rounded Rectangle 11"/>
-          <p:cNvSpPr/>
-          <p:nvPr/>
-        </p:nvSpPr>
-        <p:spPr>
-          <a:xfrm>
-            <a:off x="731520" y="3749039"/>
-            <a:ext cx="3410712" cy="2286000"/>
-          </a:xfrm>
-          <a:prstGeom prst="roundRect">
-            <a:avLst/>
-          </a:prstGeom>
-          <a:solidFill>
-            <a:srgbClr val="FFFFFF"/>
-          </a:solidFill>
-          <a:ln w="12700">
-            <a:solidFill>
-              <a:srgbClr val="E2E8F0"/>
-            </a:solidFill>
-          </a:ln>
-        </p:spPr>
-        <p:style>
-          <a:lnRef idx="1">
-            <a:schemeClr val="accent1"/>
-          </a:lnRef>
-          <a:fillRef idx="3">
-            <a:schemeClr val="accent1"/>
-          </a:fillRef>
-          <a:effectRef idx="2">
-            <a:schemeClr val="accent1"/>
-          </a:effectRef>
-          <a:fontRef idx="minor">
-            <a:schemeClr val="lt1"/>
-          </a:fontRef>
-        </p:style>
-        <p:txBody>
-          <a:bodyPr rtlCol="0" anchor="ctr"/>
-          <a:lstStyle/>
-          <a:p>
-            <a:pPr algn="ctr"/>
-          </a:p>
-        </p:txBody>
-      </p:sp>
-      <p:sp>
-        <p:nvSpPr>
-          <p:cNvPr id="13" name="TextBox 12"/>
-          <p:cNvSpPr txBox="1"/>
-          <p:nvPr/>
-        </p:nvSpPr>
-        <p:spPr>
-          <a:xfrm>
-            <a:off x="868680" y="3886200"/>
-            <a:ext cx="3136392" cy="2011680"/>
-          </a:xfrm>
-          <a:prstGeom prst="rect">
-            <a:avLst/>
-          </a:prstGeom>
-          <a:noFill/>
-        </p:spPr>
-        <p:txBody>
-          <a:bodyPr wrap="square">
-            <a:spAutoFit/>
-          </a:bodyPr>
-          <a:lstStyle/>
-          <a:p>
-            <a:pPr>
-              <a:defRPr sz="1200" b="1">
-                <a:solidFill>
-                  <a:srgbClr val="0D9488"/>
-                </a:solidFill>
-              </a:defRPr>
-            </a:pPr>
-            <a:r>
-              <a:t>4. Strongly Entangling Ansatz</a:t>
-            </a:r>
-          </a:p>
-          <a:p>
-            <a:pPr>
-              <a:spcBef>
-                <a:spcPts val="600"/>
-              </a:spcBef>
-              <a:defRPr sz="1000">
-                <a:solidFill>
-                  <a:srgbClr val="0F172A"/>
-                </a:solidFill>
-              </a:defRPr>
-            </a:pPr>
-            <a:r>
-              <a:t>U(theta) = Prod_{l=1}^L [ U_ent * (X) R(alpha, beta, gamma) ]</a:t>
-            </a:r>
-            <a:br/>
-            <a:br/>
-            <a:r>
-              <a:t>• 3 Euler rotation angles per qubit: Rz(gamma) Ry(beta) Rx(alpha)</a:t>
-            </a:r>
-            <a:br/>
-            <a:r>
-              <a:t>• Periodic circular CNOT ring generates multi-qubit entanglement.</a:t>
-            </a:r>
-          </a:p>
-        </p:txBody>
-      </p:sp>
-      <p:sp>
-        <p:nvSpPr>
-          <p:cNvPr id="14" name="Rounded Rectangle 13"/>
-          <p:cNvSpPr/>
-          <p:nvPr/>
-        </p:nvSpPr>
-        <p:spPr>
-          <a:xfrm>
-            <a:off x="4389120" y="3749039"/>
-            <a:ext cx="3410712" cy="2286000"/>
-          </a:xfrm>
-          <a:prstGeom prst="roundRect">
-            <a:avLst/>
-          </a:prstGeom>
-          <a:solidFill>
-            <a:srgbClr val="FFFFFF"/>
-          </a:solidFill>
-          <a:ln w="12700">
-            <a:solidFill>
-              <a:srgbClr val="E2E8F0"/>
-            </a:solidFill>
-          </a:ln>
-        </p:spPr>
-        <p:style>
-          <a:lnRef idx="1">
-            <a:schemeClr val="accent1"/>
-          </a:lnRef>
-          <a:fillRef idx="3">
-            <a:schemeClr val="accent1"/>
-          </a:fillRef>
-          <a:effectRef idx="2">
-            <a:schemeClr val="accent1"/>
-          </a:effectRef>
-          <a:fontRef idx="minor">
-            <a:schemeClr val="lt1"/>
-          </a:fontRef>
-        </p:style>
-        <p:txBody>
-          <a:bodyPr rtlCol="0" anchor="ctr"/>
-          <a:lstStyle/>
-          <a:p>
-            <a:pPr algn="ctr"/>
-          </a:p>
-        </p:txBody>
-      </p:sp>
-      <p:sp>
-        <p:nvSpPr>
-          <p:cNvPr id="15" name="TextBox 14"/>
-          <p:cNvSpPr txBox="1"/>
-          <p:nvPr/>
-        </p:nvSpPr>
-        <p:spPr>
-          <a:xfrm>
-            <a:off x="4526280" y="3886200"/>
-            <a:ext cx="3136392" cy="2011680"/>
-          </a:xfrm>
-          <a:prstGeom prst="rect">
-            <a:avLst/>
-          </a:prstGeom>
-          <a:noFill/>
-        </p:spPr>
-        <p:txBody>
-          <a:bodyPr wrap="square">
-            <a:spAutoFit/>
-          </a:bodyPr>
-          <a:lstStyle/>
-          <a:p>
-            <a:pPr>
-              <a:defRPr sz="1200" b="1">
-                <a:solidFill>
-                  <a:srgbClr val="1E3A8A"/>
-                </a:solidFill>
-              </a:defRPr>
-            </a:pPr>
-            <a:r>
-              <a:t>5. Parameter-Shift Rule</a:t>
-            </a:r>
-          </a:p>
-          <a:p>
-            <a:pPr>
-              <a:spcBef>
-                <a:spcPts val="600"/>
-              </a:spcBef>
-              <a:defRPr sz="1000">
-                <a:solidFill>
-                  <a:srgbClr val="0F172A"/>
-                </a:solidFill>
-              </a:defRPr>
-            </a:pPr>
-            <a:r>
-              <a:t>d&lt;Z_i&gt;/dtheta_j = (&lt;Z_i&gt;(theta_j + pi/2) - &lt;Z_i&gt;(theta_j - pi/2)) / 2</a:t>
-            </a:r>
-            <a:br/>
-            <a:br/>
-            <a:r>
-              <a:t>• Evaluates exact analytical gradients without intermediate state readout</a:t>
-            </a:r>
-            <a:br/>
-            <a:r>
-              <a:t>• Enables hardware-native backpropagation on physical QPUs.</a:t>
-            </a:r>
-          </a:p>
-        </p:txBody>
-      </p:sp>
-      <p:sp>
-        <p:nvSpPr>
-          <p:cNvPr id="16" name="Rounded Rectangle 15"/>
-          <p:cNvSpPr/>
-          <p:nvPr/>
-        </p:nvSpPr>
-        <p:spPr>
-          <a:xfrm>
-            <a:off x="8046720" y="3749039"/>
-            <a:ext cx="3410712" cy="2286000"/>
-          </a:xfrm>
-          <a:prstGeom prst="roundRect">
-            <a:avLst/>
-          </a:prstGeom>
-          <a:solidFill>
-            <a:srgbClr val="FFFFFF"/>
-          </a:solidFill>
-          <a:ln w="12700">
-            <a:solidFill>
-              <a:srgbClr val="E2E8F0"/>
-            </a:solidFill>
-          </a:ln>
-        </p:spPr>
-        <p:style>
-          <a:lnRef idx="1">
-            <a:schemeClr val="accent1"/>
-          </a:lnRef>
-          <a:fillRef idx="3">
-            <a:schemeClr val="accent1"/>
-          </a:fillRef>
-          <a:effectRef idx="2">
-            <a:schemeClr val="accent1"/>
-          </a:effectRef>
-          <a:fontRef idx="minor">
-            <a:schemeClr val="lt1"/>
-          </a:fontRef>
-        </p:style>
-        <p:txBody>
-          <a:bodyPr rtlCol="0" anchor="ctr"/>
-          <a:lstStyle/>
-          <a:p>
-            <a:pPr algn="ctr"/>
-          </a:p>
-        </p:txBody>
-      </p:sp>
-      <p:sp>
-        <p:nvSpPr>
-          <p:cNvPr id="17" name="TextBox 16"/>
-          <p:cNvSpPr txBox="1"/>
-          <p:nvPr/>
-        </p:nvSpPr>
-        <p:spPr>
-          <a:xfrm>
-            <a:off x="8183880" y="3886200"/>
-            <a:ext cx="3136392" cy="2011680"/>
-          </a:xfrm>
-          <a:prstGeom prst="rect">
-            <a:avLst/>
-          </a:prstGeom>
-          <a:noFill/>
-        </p:spPr>
-        <p:txBody>
-          <a:bodyPr wrap="square">
-            <a:spAutoFit/>
-          </a:bodyPr>
-          <a:lstStyle/>
-          <a:p>
-            <a:pPr>
-              <a:defRPr sz="1200" b="1">
-                <a:solidFill>
-                  <a:srgbClr val="0D9488"/>
-                </a:solidFill>
-              </a:defRPr>
-            </a:pPr>
-            <a:r>
-              <a:t>6. Quadratic Weighted Kappa</a:t>
-            </a:r>
-          </a:p>
-          <a:p>
-            <a:pPr>
-              <a:spcBef>
-                <a:spcPts val="600"/>
-              </a:spcBef>
-              <a:defRPr sz="1000">
-                <a:solidFill>
-                  <a:srgbClr val="0F172A"/>
-                </a:solidFill>
-              </a:defRPr>
-            </a:pPr>
-            <a:r>
-              <a:t>kappa = 1 - (sum w_ij O_ij) / (sum w_ij E_ij)</a:t>
-            </a:r>
-            <a:br/>
-            <a:br/>
-            <a:r>
-              <a:t>w_ij = (i - j)^2 / (C - 1)^2 = (i - j)^2 / 16</a:t>
-            </a:r>
-            <a:br/>
-            <a:r>
-              <a:t>• Penalizes severe clinical misclassifications quadratically (w_0,4 = 1.0 vs w_0,1 = 0.0625).</a:t>
+            <a:r>
+              <a:t>w_ij = (i - j)² / 16  (w_0,4 = 1.0 vs w_0,1 = 0.0625)</a:t>
             </a:r>
           </a:p>
         </p:txBody>
